--- a/handoff/DeviceIdentifierProgress.pptx
+++ b/handoff/DeviceIdentifierProgress.pptx
@@ -19,6 +19,8 @@
     <p:sldId id="267" r:id="rId18"/>
     <p:sldId id="268" r:id="rId19"/>
     <p:sldId id="269" r:id="rId20"/>
+    <p:sldId id="272" r:id="rId23"/>
+    <p:sldId id="273" r:id="rId24"/>
     <p:sldId id="270" r:id="rId21"/>
     <p:sldId id="271" r:id="rId22"/>
   </p:sldIdLst>
@@ -3235,7 +3237,7 @@
                 </a:solidFill>
                 <a:latin typeface="Calibri"/>
               </a:rPr>
-              <a:t>Three machine learning models, a quota-based allocation engine and a deployed C# service — what each part does, where it stands, and what it needs next.</a:t>
+              <a:t>A rule-based device-type lookup, two machine learning models, a quota allocation engine and a deployed ML service — what each part does, where it stands, and what it needs next.</a:t>
             </a:r>
           </a:p>
         </p:txBody>
@@ -3734,7 +3736,7 @@
                 </a:solidFill>
                 <a:latin typeface="Calibri"/>
               </a:rPr>
-              <a:t>Prepared by Siti Syaziyah  ·  Data Analyst Executive  ·  August 2026</a:t>
+              <a:t>Prepared by Siti Syaziyah  ·  Data Analyst Executive  ·  September 2026</a:t>
             </a:r>
           </a:p>
         </p:txBody>
@@ -4618,7 +4620,7 @@
                 </a:solidFill>
                 <a:latin typeface="Calibri"/>
               </a:rPr>
-              <a:t>Reference data and model update</a:t>
+              <a:t>The dictionary is updated</a:t>
             </a:r>
           </a:p>
         </p:txBody>
@@ -4950,7 +4952,7 @@
                 </a:solidFill>
                 <a:latin typeface="Calibri"/>
               </a:rPr>
-              <a:t>The correction updates the prefix dictionary and the classifier through partial_fit, then writes to disk atomically with an automatic backup. The very next prediction uses it.</a:t>
+              <a:t>The correction is written straight into the prefix dictionary and saved atomically with an automatic backup. The very next prediction uses it — there is no model to retrain.</a:t>
             </a:r>
           </a:p>
         </p:txBody>
@@ -5258,7 +5260,7 @@
                 </a:solidFill>
                 <a:latin typeface="Calibri"/>
               </a:rPr>
-              <a:t>Device Identifier  ·  Progress Report  ·  August 2026</a:t>
+              <a:t>Device Identifier  ·  Progress Report  ·  September 2026</a:t>
             </a:r>
           </a:p>
         </p:txBody>
@@ -5416,7 +5418,7 @@
                 </a:solidFill>
                 <a:latin typeface="Calibri"/>
               </a:rPr>
-              <a:t>Since the last review the focus moved from model accuracy to making the system safe to re-run and safe to hand over.</a:t>
+              <a:t>This cycle moved the models onto the ML server and made the codebase safe for another developer to clone, build and run.</a:t>
             </a:r>
           </a:p>
         </p:txBody>
@@ -6382,7 +6384,7 @@
                 </a:solidFill>
                 <a:latin typeface="Cambria"/>
               </a:rPr>
-              <a:t>Pipeline reduced to a single call</a:t>
+              <a:t>Models moved onto the ML server</a:t>
             </a:r>
           </a:p>
         </p:txBody>
@@ -6421,7 +6423,7 @@
                 </a:solidFill>
                 <a:latin typeface="Calibri"/>
               </a:rPr>
-              <a:t>DevicePipeline.RunAsync runs the whole sequence with no console dependency, so a UI, a scheduler or an API can drive it unchanged.</a:t>
+              <a:t>Python and the models now run as a FastAPI service on 128.100.8.213:8000. The C# apps call it over HTTP, far faster than starting a process.</a:t>
             </a:r>
           </a:p>
         </p:txBody>
@@ -6583,7 +6585,7 @@
                 </a:solidFill>
                 <a:latin typeface="Cambria"/>
               </a:rPr>
-              <a:t>Unattended mode and data fixes</a:t>
+              <a:t>Build and handover defects fixed</a:t>
             </a:r>
           </a:p>
         </p:txBody>
@@ -6622,7 +6624,7 @@
                 </a:solidFill>
                 <a:latin typeface="Calibri"/>
               </a:rPr>
-              <a:t>The pipeline can now run headless as a scheduled job. Queries are scoped per project, and case-sensitivity and device-ID formatting faults were fixed.</a:t>
+              <a:t>The console app now builds from any clone: project references instead of file paths, and no dependency outside the repository.</a:t>
             </a:r>
           </a:p>
         </p:txBody>
@@ -6657,7 +6659,7 @@
                 </a:solidFill>
                 <a:latin typeface="Calibri"/>
               </a:rPr>
-              <a:t>Device Identifier  ·  Progress Report  ·  August 2026</a:t>
+              <a:t>Device Identifier  ·  Progress Report  ·  September 2026</a:t>
             </a:r>
           </a:p>
         </p:txBody>
@@ -7045,7 +7047,7 @@
                           </a:solidFill>
                           <a:latin typeface="Calibri"/>
                         </a:rPr>
-                        <a:t>Hybrid ladder, 22 equipment classes</a:t>
+                        <a:t>Prefix dictionary, 23 device types</a:t>
                       </a:r>
                     </a:p>
                   </a:txBody>
@@ -8013,7 +8015,7 @@
                 </a:solidFill>
                 <a:latin typeface="Calibri"/>
               </a:rPr>
-              <a:t>Device Identifier  ·  Progress Report  ·  August 2026</a:t>
+              <a:t>Device Identifier  ·  Progress Report  ·  September 2026</a:t>
             </a:r>
           </a:p>
         </p:txBody>
@@ -9079,7 +9081,7 @@
                 </a:solidFill>
                 <a:latin typeface="Calibri"/>
               </a:rPr>
-              <a:t>Device Identifier  ·  Progress Report  ·  August 2026</a:t>
+              <a:t>Device Identifier  ·  Progress Report  ·  September 2026</a:t>
             </a:r>
           </a:p>
         </p:txBody>
@@ -10210,7 +10212,7 @@
                 </a:solidFill>
                 <a:latin typeface="Calibri"/>
               </a:rPr>
-              <a:t>Device Identifier  ·  Progress Report  ·  August 2026</a:t>
+              <a:t>Device Identifier  ·  Progress Report  ·  September 2026</a:t>
             </a:r>
           </a:p>
         </p:txBody>
@@ -10534,7 +10536,7 @@
                 </a:solidFill>
                 <a:latin typeface="Calibri"/>
               </a:rPr>
-              <a:t>.NET 10 runtime, Python 3.13 with the pinned package versions, and access to the XenCreator database. Windows x64 only.</a:t>
+              <a:t>.NET 10 runtime, access to the XenCreator database, and network access to the ML service. Python is only needed for the local-prediction console app. Windows x64 only.</a:t>
             </a:r>
           </a:p>
         </p:txBody>
@@ -10897,7 +10899,7 @@
                 </a:solidFill>
                 <a:latin typeface="Cambria"/>
               </a:rPr>
-              <a:t>Run a project</a:t>
+              <a:t>Run against the ML service</a:t>
             </a:r>
           </a:p>
         </p:txBody>
@@ -10936,7 +10938,7 @@
                 </a:solidFill>
                 <a:latin typeface="Calibri"/>
               </a:rPr>
-              <a:t>DeviceClusterConsoleApp.exe A9998  —  or omit the code and pick from the list of available projects.</a:t>
+              <a:t>Double-click run-service-app.cmd, or pass a code: run-service-app.cmd A9998. The launcher sets ML_SERVICE_URL for you.</a:t>
             </a:r>
           </a:p>
         </p:txBody>
@@ -11137,7 +11139,7 @@
                 </a:solidFill>
                 <a:latin typeface="Calibri"/>
               </a:rPr>
-              <a:t>DeviceClusterConsoleApp.exe A9998 --unattended skips every prompt, for scheduled or automated runs.</a:t>
+              <a:t>run-service-app.cmd A9998 --unattended skips every prompt, for scheduled or automated runs.</a:t>
             </a:r>
           </a:p>
         </p:txBody>
@@ -11419,7 +11421,7 @@
                 </a:solidFill>
                 <a:latin typeface="Calibri"/>
               </a:rPr>
-              <a:t>For a user interface: reference Logic.dll and call DevicePipeline.RunAsync(…) — it has no console dependency of its own.</a:t>
+              <a:t>For a user interface: reference Logic.dll and call DevicePipeline.RunAsync(…). Note that it binds to local Python today — see the handover slide.</a:t>
             </a:r>
           </a:p>
         </p:txBody>
@@ -11454,7 +11456,7 @@
                 </a:solidFill>
                 <a:latin typeface="Calibri"/>
               </a:rPr>
-              <a:t>Device Identifier  ·  Progress Report  ·  August 2026</a:t>
+              <a:t>Device Identifier  ·  Progress Report  ·  September 2026</a:t>
             </a:r>
           </a:p>
         </p:txBody>
@@ -11489,7 +11491,7 @@
                 </a:solidFill>
                 <a:latin typeface="Calibri"/>
               </a:rPr>
-              <a:t>15</a:t>
+              <a:t>17</a:t>
             </a:r>
           </a:p>
         </p:txBody>
@@ -11644,7 +11646,7 @@
                 </a:solidFill>
                 <a:latin typeface="Calibri"/>
               </a:rPr>
-              <a:t>Five of six stages are complete. The three models, the allocation engine, the SQL integration and the handover package are all finished and running against live data. What stands between here and production use is reference data, an interface, and one validation run.</a:t>
+              <a:t>Five of six stages are complete. The prediction models, the allocation engine, the SQL integration and the handover package are all finished and running against live data. What stands between here and production use is reference data, an interface, and one validation run.</a:t>
             </a:r>
           </a:p>
         </p:txBody>
@@ -11841,7 +11843,7 @@
                 </a:solidFill>
                 <a:latin typeface="Cambria"/>
               </a:rPr>
-              <a:t>3</a:t>
+              <a:t>2</a:t>
             </a:r>
           </a:p>
         </p:txBody>
@@ -11876,7 +11878,7 @@
                 </a:solidFill>
                 <a:latin typeface="Calibri"/>
               </a:rPr>
-              <a:t>models in production</a:t>
+              <a:t>ML models + 1 dictionary</a:t>
             </a:r>
           </a:p>
         </p:txBody>
@@ -12123,7 +12125,7 @@
                 </a:solidFill>
                 <a:latin typeface="Calibri"/>
               </a:rPr>
-              <a:t>Device Identifier  ·  Progress Report  ·  August 2026</a:t>
+              <a:t>Device Identifier  ·  Progress Report  ·  September 2026</a:t>
             </a:r>
           </a:p>
         </p:txBody>
@@ -12155,6 +12157,2782 @@
               <a:rPr sz="900" b="0" i="0">
                 <a:solidFill>
                   <a:srgbClr val="5D6B78"/>
+                </a:solidFill>
+                <a:latin typeface="Calibri"/>
+              </a:rPr>
+              <a:t>18</a:t>
+            </a:r>
+          </a:p>
+        </p:txBody>
+      </p:sp>
+    </p:spTree>
+  </p:cSld>
+  <p:clrMapOvr>
+    <a:masterClrMapping/>
+  </p:clrMapOvr>
+</p:sld>
+</file>
+
+<file path=ppt/slides/slide17.xml><?xml version="1.0" encoding="utf-8"?>
+<p:sld xmlns:a="http://schemas.openxmlformats.org/drawingml/2006/main" xmlns:p="http://schemas.openxmlformats.org/presentationml/2006/main" xmlns:r="http://schemas.openxmlformats.org/officeDocument/2006/relationships">
+  <p:cSld>
+    <p:spTree>
+      <p:nvGrpSpPr>
+        <p:cNvPr id="1" name=""/>
+        <p:cNvGrpSpPr/>
+        <p:nvPr/>
+      </p:nvGrpSpPr>
+      <p:grpSpPr/>
+      <p:sp>
+        <p:nvSpPr>
+          <p:cNvPr id="2" name="TextBox 1"/>
+          <p:cNvSpPr txBox="1"/>
+          <p:nvPr/>
+        </p:nvSpPr>
+        <p:spPr>
+          <a:xfrm>
+            <a:off x="548640" y="402336"/>
+            <a:ext cx="10607040" cy="237744"/>
+          </a:xfrm>
+          <a:prstGeom prst="rect">
+            <a:avLst/>
+          </a:prstGeom>
+          <a:noFill/>
+        </p:spPr>
+        <p:txBody>
+          <a:bodyPr wrap="square" lIns="0" rIns="0" tIns="0" bIns="0" anchor="t">
+            <a:spAutoFit/>
+          </a:bodyPr>
+          <a:lstStyle/>
+          <a:p>
+            <a:pPr algn="l"/>
+            <a:r>
+              <a:rPr sz="1050" b="1" i="0" spc="200">
+                <a:solidFill>
+                  <a:srgbClr val="C46A24"/>
+                </a:solidFill>
+                <a:latin typeface="Calibri"/>
+              </a:rPr>
+              <a:t>12  ·  HANDOVER</a:t>
+            </a:r>
+          </a:p>
+        </p:txBody>
+      </p:sp>
+      <p:sp>
+        <p:nvSpPr>
+          <p:cNvPr id="3" name="TextBox 2"/>
+          <p:cNvSpPr txBox="1"/>
+          <p:nvPr/>
+        </p:nvSpPr>
+        <p:spPr>
+          <a:xfrm>
+            <a:off x="548640" y="694944"/>
+            <a:ext cx="11091672" cy="475488"/>
+          </a:xfrm>
+          <a:prstGeom prst="rect">
+            <a:avLst/>
+          </a:prstGeom>
+          <a:noFill/>
+        </p:spPr>
+        <p:txBody>
+          <a:bodyPr wrap="square" lIns="0" rIns="0" tIns="0" bIns="0" anchor="t">
+            <a:spAutoFit/>
+          </a:bodyPr>
+          <a:lstStyle/>
+          <a:p>
+            <a:pPr algn="l"/>
+            <a:r>
+              <a:rPr sz="2900" b="1" i="0">
+                <a:solidFill>
+                  <a:srgbClr val="1B2430"/>
+                </a:solidFill>
+                <a:latin typeface="Cambria"/>
+              </a:rPr>
+              <a:t>What the software developer needs</a:t>
+            </a:r>
+          </a:p>
+        </p:txBody>
+      </p:sp>
+      <p:sp>
+        <p:nvSpPr>
+          <p:cNvPr id="4" name="Rounded Rectangle 3"/>
+          <p:cNvSpPr/>
+          <p:nvPr/>
+        </p:nvSpPr>
+        <p:spPr>
+          <a:xfrm>
+            <a:off x="548640" y="1481328"/>
+            <a:ext cx="3561588" cy="2103120"/>
+          </a:xfrm>
+          <a:prstGeom prst="roundRect">
+            <a:avLst>
+              <a:gd name="adj" fmla="val 5500"/>
+            </a:avLst>
+          </a:prstGeom>
+          <a:solidFill>
+            <a:srgbClr val="F3F5F7"/>
+          </a:solidFill>
+          <a:ln w="9525">
+            <a:solidFill>
+              <a:srgbClr val="DFE4E9"/>
+            </a:solidFill>
+          </a:ln>
+          <a:effectLst/>
+        </p:spPr>
+        <p:style>
+          <a:lnRef idx="1">
+            <a:schemeClr val="accent1"/>
+          </a:lnRef>
+          <a:fillRef idx="3">
+            <a:schemeClr val="accent1"/>
+          </a:fillRef>
+          <a:effectRef idx="2">
+            <a:schemeClr val="accent1"/>
+          </a:effectRef>
+          <a:fontRef idx="minor">
+            <a:schemeClr val="lt1"/>
+          </a:fontRef>
+        </p:style>
+        <p:txBody>
+          <a:bodyPr rtlCol="0" anchor="ctr" wrap="square"/>
+          <a:lstStyle/>
+          <a:p>
+            <a:pPr algn="ctr"/>
+          </a:p>
+        </p:txBody>
+      </p:sp>
+      <p:sp>
+        <p:nvSpPr>
+          <p:cNvPr id="5" name="Oval 4"/>
+          <p:cNvSpPr/>
+          <p:nvPr/>
+        </p:nvSpPr>
+        <p:spPr>
+          <a:xfrm>
+            <a:off x="822959" y="1737360"/>
+            <a:ext cx="384048" cy="384048"/>
+          </a:xfrm>
+          <a:prstGeom prst="ellipse">
+            <a:avLst/>
+          </a:prstGeom>
+          <a:solidFill>
+            <a:srgbClr val="2E7D63"/>
+          </a:solidFill>
+          <a:ln>
+            <a:noFill/>
+          </a:ln>
+          <a:effectLst/>
+        </p:spPr>
+        <p:style>
+          <a:lnRef idx="1">
+            <a:schemeClr val="accent1"/>
+          </a:lnRef>
+          <a:fillRef idx="3">
+            <a:schemeClr val="accent1"/>
+          </a:fillRef>
+          <a:effectRef idx="2">
+            <a:schemeClr val="accent1"/>
+          </a:effectRef>
+          <a:fontRef idx="minor">
+            <a:schemeClr val="lt1"/>
+          </a:fontRef>
+        </p:style>
+        <p:txBody>
+          <a:bodyPr rtlCol="0" anchor="ctr"/>
+          <a:lstStyle/>
+          <a:p>
+            <a:pPr algn="ctr"/>
+          </a:p>
+        </p:txBody>
+      </p:sp>
+      <p:sp>
+        <p:nvSpPr>
+          <p:cNvPr id="6" name="TextBox 5"/>
+          <p:cNvSpPr txBox="1"/>
+          <p:nvPr/>
+        </p:nvSpPr>
+        <p:spPr>
+          <a:xfrm>
+            <a:off x="822959" y="1737360"/>
+            <a:ext cx="384048" cy="384048"/>
+          </a:xfrm>
+          <a:prstGeom prst="rect">
+            <a:avLst/>
+          </a:prstGeom>
+          <a:noFill/>
+        </p:spPr>
+        <p:txBody>
+          <a:bodyPr wrap="square" lIns="0" rIns="0" tIns="0" bIns="0" anchor="ctr">
+            <a:spAutoFit/>
+          </a:bodyPr>
+          <a:lstStyle/>
+          <a:p>
+            <a:pPr algn="ctr"/>
+            <a:r>
+              <a:rPr sz="1300" b="1" i="0">
+                <a:solidFill>
+                  <a:srgbClr val="FFFFFF"/>
+                </a:solidFill>
+                <a:latin typeface="Cambria"/>
+              </a:rPr>
+              <a:t>1</a:t>
+            </a:r>
+          </a:p>
+        </p:txBody>
+      </p:sp>
+      <p:sp>
+        <p:nvSpPr>
+          <p:cNvPr id="7" name="TextBox 6"/>
+          <p:cNvSpPr txBox="1"/>
+          <p:nvPr/>
+        </p:nvSpPr>
+        <p:spPr>
+          <a:xfrm>
+            <a:off x="822959" y="2267712"/>
+            <a:ext cx="3017520" cy="457200"/>
+          </a:xfrm>
+          <a:prstGeom prst="rect">
+            <a:avLst/>
+          </a:prstGeom>
+          <a:noFill/>
+        </p:spPr>
+        <p:txBody>
+          <a:bodyPr wrap="square" lIns="0" rIns="0" tIns="0" bIns="0" anchor="t">
+            <a:spAutoFit/>
+          </a:bodyPr>
+          <a:lstStyle/>
+          <a:p>
+            <a:pPr algn="l">
+              <a:lnSpc>
+                <a:spcPts val="1800"/>
+              </a:lnSpc>
+            </a:pPr>
+            <a:r>
+              <a:rPr sz="1450" b="1" i="0">
+                <a:solidFill>
+                  <a:srgbClr val="1B2430"/>
+                </a:solidFill>
+                <a:latin typeface="Cambria"/>
+              </a:rPr>
+              <a:t>The two class libraries</a:t>
+            </a:r>
+          </a:p>
+        </p:txBody>
+      </p:sp>
+      <p:sp>
+        <p:nvSpPr>
+          <p:cNvPr id="8" name="TextBox 7"/>
+          <p:cNvSpPr txBox="1"/>
+          <p:nvPr/>
+        </p:nvSpPr>
+        <p:spPr>
+          <a:xfrm>
+            <a:off x="822959" y="2798064"/>
+            <a:ext cx="3017520" cy="658368"/>
+          </a:xfrm>
+          <a:prstGeom prst="rect">
+            <a:avLst/>
+          </a:prstGeom>
+          <a:noFill/>
+        </p:spPr>
+        <p:txBody>
+          <a:bodyPr wrap="square" lIns="0" rIns="0" tIns="0" bIns="0" anchor="t">
+            <a:spAutoFit/>
+          </a:bodyPr>
+          <a:lstStyle/>
+          <a:p>
+            <a:pPr algn="l">
+              <a:lnSpc>
+                <a:spcPts val="1400"/>
+              </a:lnSpc>
+            </a:pPr>
+            <a:r>
+              <a:rPr sz="1100" b="0" i="0">
+                <a:solidFill>
+                  <a:srgbClr val="4E5A66"/>
+                </a:solidFill>
+                <a:latin typeface="Calibri"/>
+              </a:rPr>
+              <a:t>Model.dll and Logic.dll, .NET 10, Windows x64, plus 22 dependencies. Better published to Azure Artifacts than sent as a zip.</a:t>
+            </a:r>
+          </a:p>
+        </p:txBody>
+      </p:sp>
+      <p:sp>
+        <p:nvSpPr>
+          <p:cNvPr id="9" name="Rounded Rectangle 8"/>
+          <p:cNvSpPr/>
+          <p:nvPr/>
+        </p:nvSpPr>
+        <p:spPr>
+          <a:xfrm>
+            <a:off x="4263390" y="1481328"/>
+            <a:ext cx="3561588" cy="2103120"/>
+          </a:xfrm>
+          <a:prstGeom prst="roundRect">
+            <a:avLst>
+              <a:gd name="adj" fmla="val 5500"/>
+            </a:avLst>
+          </a:prstGeom>
+          <a:solidFill>
+            <a:srgbClr val="F3F5F7"/>
+          </a:solidFill>
+          <a:ln w="9525">
+            <a:solidFill>
+              <a:srgbClr val="DFE4E9"/>
+            </a:solidFill>
+          </a:ln>
+          <a:effectLst/>
+        </p:spPr>
+        <p:style>
+          <a:lnRef idx="1">
+            <a:schemeClr val="accent1"/>
+          </a:lnRef>
+          <a:fillRef idx="3">
+            <a:schemeClr val="accent1"/>
+          </a:fillRef>
+          <a:effectRef idx="2">
+            <a:schemeClr val="accent1"/>
+          </a:effectRef>
+          <a:fontRef idx="minor">
+            <a:schemeClr val="lt1"/>
+          </a:fontRef>
+        </p:style>
+        <p:txBody>
+          <a:bodyPr rtlCol="0" anchor="ctr" wrap="square"/>
+          <a:lstStyle/>
+          <a:p>
+            <a:pPr algn="ctr"/>
+          </a:p>
+        </p:txBody>
+      </p:sp>
+      <p:sp>
+        <p:nvSpPr>
+          <p:cNvPr id="10" name="Oval 9"/>
+          <p:cNvSpPr/>
+          <p:nvPr/>
+        </p:nvSpPr>
+        <p:spPr>
+          <a:xfrm>
+            <a:off x="4537709" y="1737360"/>
+            <a:ext cx="384048" cy="384048"/>
+          </a:xfrm>
+          <a:prstGeom prst="ellipse">
+            <a:avLst/>
+          </a:prstGeom>
+          <a:solidFill>
+            <a:srgbClr val="2E7D63"/>
+          </a:solidFill>
+          <a:ln>
+            <a:noFill/>
+          </a:ln>
+          <a:effectLst/>
+        </p:spPr>
+        <p:style>
+          <a:lnRef idx="1">
+            <a:schemeClr val="accent1"/>
+          </a:lnRef>
+          <a:fillRef idx="3">
+            <a:schemeClr val="accent1"/>
+          </a:fillRef>
+          <a:effectRef idx="2">
+            <a:schemeClr val="accent1"/>
+          </a:effectRef>
+          <a:fontRef idx="minor">
+            <a:schemeClr val="lt1"/>
+          </a:fontRef>
+        </p:style>
+        <p:txBody>
+          <a:bodyPr rtlCol="0" anchor="ctr"/>
+          <a:lstStyle/>
+          <a:p>
+            <a:pPr algn="ctr"/>
+          </a:p>
+        </p:txBody>
+      </p:sp>
+      <p:sp>
+        <p:nvSpPr>
+          <p:cNvPr id="11" name="TextBox 10"/>
+          <p:cNvSpPr txBox="1"/>
+          <p:nvPr/>
+        </p:nvSpPr>
+        <p:spPr>
+          <a:xfrm>
+            <a:off x="4537709" y="1737360"/>
+            <a:ext cx="384048" cy="384048"/>
+          </a:xfrm>
+          <a:prstGeom prst="rect">
+            <a:avLst/>
+          </a:prstGeom>
+          <a:noFill/>
+        </p:spPr>
+        <p:txBody>
+          <a:bodyPr wrap="square" lIns="0" rIns="0" tIns="0" bIns="0" anchor="ctr">
+            <a:spAutoFit/>
+          </a:bodyPr>
+          <a:lstStyle/>
+          <a:p>
+            <a:pPr algn="ctr"/>
+            <a:r>
+              <a:rPr sz="1300" b="1" i="0">
+                <a:solidFill>
+                  <a:srgbClr val="FFFFFF"/>
+                </a:solidFill>
+                <a:latin typeface="Cambria"/>
+              </a:rPr>
+              <a:t>2</a:t>
+            </a:r>
+          </a:p>
+        </p:txBody>
+      </p:sp>
+      <p:sp>
+        <p:nvSpPr>
+          <p:cNvPr id="12" name="TextBox 11"/>
+          <p:cNvSpPr txBox="1"/>
+          <p:nvPr/>
+        </p:nvSpPr>
+        <p:spPr>
+          <a:xfrm>
+            <a:off x="4537709" y="2267712"/>
+            <a:ext cx="3017520" cy="457200"/>
+          </a:xfrm>
+          <a:prstGeom prst="rect">
+            <a:avLst/>
+          </a:prstGeom>
+          <a:noFill/>
+        </p:spPr>
+        <p:txBody>
+          <a:bodyPr wrap="square" lIns="0" rIns="0" tIns="0" bIns="0" anchor="t">
+            <a:spAutoFit/>
+          </a:bodyPr>
+          <a:lstStyle/>
+          <a:p>
+            <a:pPr algn="l">
+              <a:lnSpc>
+                <a:spcPts val="1800"/>
+              </a:lnSpc>
+            </a:pPr>
+            <a:r>
+              <a:rPr sz="1450" b="1" i="0">
+                <a:solidFill>
+                  <a:srgbClr val="1B2430"/>
+                </a:solidFill>
+                <a:latin typeface="Cambria"/>
+              </a:rPr>
+              <a:t>The ML service address</a:t>
+            </a:r>
+          </a:p>
+        </p:txBody>
+      </p:sp>
+      <p:sp>
+        <p:nvSpPr>
+          <p:cNvPr id="13" name="TextBox 12"/>
+          <p:cNvSpPr txBox="1"/>
+          <p:nvPr/>
+        </p:nvSpPr>
+        <p:spPr>
+          <a:xfrm>
+            <a:off x="4537709" y="2798064"/>
+            <a:ext cx="3017520" cy="658368"/>
+          </a:xfrm>
+          <a:prstGeom prst="rect">
+            <a:avLst/>
+          </a:prstGeom>
+          <a:noFill/>
+        </p:spPr>
+        <p:txBody>
+          <a:bodyPr wrap="square" lIns="0" rIns="0" tIns="0" bIns="0" anchor="t">
+            <a:spAutoFit/>
+          </a:bodyPr>
+          <a:lstStyle/>
+          <a:p>
+            <a:pPr algn="l">
+              <a:lnSpc>
+                <a:spcPts val="1400"/>
+              </a:lnSpc>
+            </a:pPr>
+            <a:r>
+              <a:rPr sz="1100" b="0" i="0">
+                <a:solidFill>
+                  <a:srgbClr val="4E5A66"/>
+                </a:solidFill>
+                <a:latin typeface="Calibri"/>
+              </a:rPr>
+              <a:t>http://128.100.8.213:8000, passed in ML_SERVICE_URL. Without it the app looks for the service on its own machine.</a:t>
+            </a:r>
+          </a:p>
+        </p:txBody>
+      </p:sp>
+      <p:sp>
+        <p:nvSpPr>
+          <p:cNvPr id="14" name="Rounded Rectangle 13"/>
+          <p:cNvSpPr/>
+          <p:nvPr/>
+        </p:nvSpPr>
+        <p:spPr>
+          <a:xfrm>
+            <a:off x="7978140" y="1481328"/>
+            <a:ext cx="3561588" cy="2103120"/>
+          </a:xfrm>
+          <a:prstGeom prst="roundRect">
+            <a:avLst>
+              <a:gd name="adj" fmla="val 5500"/>
+            </a:avLst>
+          </a:prstGeom>
+          <a:solidFill>
+            <a:srgbClr val="F3F5F7"/>
+          </a:solidFill>
+          <a:ln w="9525">
+            <a:solidFill>
+              <a:srgbClr val="DFE4E9"/>
+            </a:solidFill>
+          </a:ln>
+          <a:effectLst/>
+        </p:spPr>
+        <p:style>
+          <a:lnRef idx="1">
+            <a:schemeClr val="accent1"/>
+          </a:lnRef>
+          <a:fillRef idx="3">
+            <a:schemeClr val="accent1"/>
+          </a:fillRef>
+          <a:effectRef idx="2">
+            <a:schemeClr val="accent1"/>
+          </a:effectRef>
+          <a:fontRef idx="minor">
+            <a:schemeClr val="lt1"/>
+          </a:fontRef>
+        </p:style>
+        <p:txBody>
+          <a:bodyPr rtlCol="0" anchor="ctr" wrap="square"/>
+          <a:lstStyle/>
+          <a:p>
+            <a:pPr algn="ctr"/>
+          </a:p>
+        </p:txBody>
+      </p:sp>
+      <p:sp>
+        <p:nvSpPr>
+          <p:cNvPr id="15" name="Oval 14"/>
+          <p:cNvSpPr/>
+          <p:nvPr/>
+        </p:nvSpPr>
+        <p:spPr>
+          <a:xfrm>
+            <a:off x="8252460" y="1737360"/>
+            <a:ext cx="384048" cy="384048"/>
+          </a:xfrm>
+          <a:prstGeom prst="ellipse">
+            <a:avLst/>
+          </a:prstGeom>
+          <a:solidFill>
+            <a:srgbClr val="2E7D63"/>
+          </a:solidFill>
+          <a:ln>
+            <a:noFill/>
+          </a:ln>
+          <a:effectLst/>
+        </p:spPr>
+        <p:style>
+          <a:lnRef idx="1">
+            <a:schemeClr val="accent1"/>
+          </a:lnRef>
+          <a:fillRef idx="3">
+            <a:schemeClr val="accent1"/>
+          </a:fillRef>
+          <a:effectRef idx="2">
+            <a:schemeClr val="accent1"/>
+          </a:effectRef>
+          <a:fontRef idx="minor">
+            <a:schemeClr val="lt1"/>
+          </a:fontRef>
+        </p:style>
+        <p:txBody>
+          <a:bodyPr rtlCol="0" anchor="ctr"/>
+          <a:lstStyle/>
+          <a:p>
+            <a:pPr algn="ctr"/>
+          </a:p>
+        </p:txBody>
+      </p:sp>
+      <p:sp>
+        <p:nvSpPr>
+          <p:cNvPr id="16" name="TextBox 15"/>
+          <p:cNvSpPr txBox="1"/>
+          <p:nvPr/>
+        </p:nvSpPr>
+        <p:spPr>
+          <a:xfrm>
+            <a:off x="8252460" y="1737360"/>
+            <a:ext cx="384048" cy="384048"/>
+          </a:xfrm>
+          <a:prstGeom prst="rect">
+            <a:avLst/>
+          </a:prstGeom>
+          <a:noFill/>
+        </p:spPr>
+        <p:txBody>
+          <a:bodyPr wrap="square" lIns="0" rIns="0" tIns="0" bIns="0" anchor="ctr">
+            <a:spAutoFit/>
+          </a:bodyPr>
+          <a:lstStyle/>
+          <a:p>
+            <a:pPr algn="ctr"/>
+            <a:r>
+              <a:rPr sz="1300" b="1" i="0">
+                <a:solidFill>
+                  <a:srgbClr val="FFFFFF"/>
+                </a:solidFill>
+                <a:latin typeface="Cambria"/>
+              </a:rPr>
+              <a:t>3</a:t>
+            </a:r>
+          </a:p>
+        </p:txBody>
+      </p:sp>
+      <p:sp>
+        <p:nvSpPr>
+          <p:cNvPr id="17" name="TextBox 16"/>
+          <p:cNvSpPr txBox="1"/>
+          <p:nvPr/>
+        </p:nvSpPr>
+        <p:spPr>
+          <a:xfrm>
+            <a:off x="8252460" y="2267712"/>
+            <a:ext cx="3017520" cy="457200"/>
+          </a:xfrm>
+          <a:prstGeom prst="rect">
+            <a:avLst/>
+          </a:prstGeom>
+          <a:noFill/>
+        </p:spPr>
+        <p:txBody>
+          <a:bodyPr wrap="square" lIns="0" rIns="0" tIns="0" bIns="0" anchor="t">
+            <a:spAutoFit/>
+          </a:bodyPr>
+          <a:lstStyle/>
+          <a:p>
+            <a:pPr algn="l">
+              <a:lnSpc>
+                <a:spcPts val="1800"/>
+              </a:lnSpc>
+            </a:pPr>
+            <a:r>
+              <a:rPr sz="1450" b="1" i="0">
+                <a:solidFill>
+                  <a:srgbClr val="1B2430"/>
+                </a:solidFill>
+                <a:latin typeface="Cambria"/>
+              </a:rPr>
+              <a:t>SQL access and four tables</a:t>
+            </a:r>
+          </a:p>
+        </p:txBody>
+      </p:sp>
+      <p:sp>
+        <p:nvSpPr>
+          <p:cNvPr id="18" name="TextBox 17"/>
+          <p:cNvSpPr txBox="1"/>
+          <p:nvPr/>
+        </p:nvSpPr>
+        <p:spPr>
+          <a:xfrm>
+            <a:off x="8252460" y="2798064"/>
+            <a:ext cx="3017520" cy="658368"/>
+          </a:xfrm>
+          <a:prstGeom prst="rect">
+            <a:avLst/>
+          </a:prstGeom>
+          <a:noFill/>
+        </p:spPr>
+        <p:txBody>
+          <a:bodyPr wrap="square" lIns="0" rIns="0" tIns="0" bIns="0" anchor="t">
+            <a:spAutoFit/>
+          </a:bodyPr>
+          <a:lstStyle/>
+          <a:p>
+            <a:pPr algn="l">
+              <a:lnSpc>
+                <a:spcPts val="1400"/>
+              </a:lnSpc>
+            </a:pPr>
+            <a:r>
+              <a:rPr sz="1100" b="0" i="0">
+                <a:solidFill>
+                  <a:srgbClr val="4E5A66"/>
+                </a:solidFill>
+                <a:latin typeface="Calibri"/>
+              </a:rPr>
+              <a:t>DummyTestingData, PatternCluster, DeviceReviewQueue and OutputDeviceAssignment. Three guarded creation scripts are included.</a:t>
+            </a:r>
+          </a:p>
+        </p:txBody>
+      </p:sp>
+      <p:sp>
+        <p:nvSpPr>
+          <p:cNvPr id="19" name="Rounded Rectangle 18"/>
+          <p:cNvSpPr/>
+          <p:nvPr/>
+        </p:nvSpPr>
+        <p:spPr>
+          <a:xfrm>
+            <a:off x="548640" y="3785616"/>
+            <a:ext cx="3561588" cy="2103120"/>
+          </a:xfrm>
+          <a:prstGeom prst="roundRect">
+            <a:avLst>
+              <a:gd name="adj" fmla="val 5500"/>
+            </a:avLst>
+          </a:prstGeom>
+          <a:solidFill>
+            <a:srgbClr val="F3F5F7"/>
+          </a:solidFill>
+          <a:ln w="9525">
+            <a:solidFill>
+              <a:srgbClr val="DFE4E9"/>
+            </a:solidFill>
+          </a:ln>
+          <a:effectLst/>
+        </p:spPr>
+        <p:style>
+          <a:lnRef idx="1">
+            <a:schemeClr val="accent1"/>
+          </a:lnRef>
+          <a:fillRef idx="3">
+            <a:schemeClr val="accent1"/>
+          </a:fillRef>
+          <a:effectRef idx="2">
+            <a:schemeClr val="accent1"/>
+          </a:effectRef>
+          <a:fontRef idx="minor">
+            <a:schemeClr val="lt1"/>
+          </a:fontRef>
+        </p:style>
+        <p:txBody>
+          <a:bodyPr rtlCol="0" anchor="ctr" wrap="square"/>
+          <a:lstStyle/>
+          <a:p>
+            <a:pPr algn="ctr"/>
+          </a:p>
+        </p:txBody>
+      </p:sp>
+      <p:sp>
+        <p:nvSpPr>
+          <p:cNvPr id="20" name="Oval 19"/>
+          <p:cNvSpPr/>
+          <p:nvPr/>
+        </p:nvSpPr>
+        <p:spPr>
+          <a:xfrm>
+            <a:off x="822959" y="4041648"/>
+            <a:ext cx="384048" cy="384048"/>
+          </a:xfrm>
+          <a:prstGeom prst="ellipse">
+            <a:avLst/>
+          </a:prstGeom>
+          <a:solidFill>
+            <a:srgbClr val="C46A24"/>
+          </a:solidFill>
+          <a:ln>
+            <a:noFill/>
+          </a:ln>
+          <a:effectLst/>
+        </p:spPr>
+        <p:style>
+          <a:lnRef idx="1">
+            <a:schemeClr val="accent1"/>
+          </a:lnRef>
+          <a:fillRef idx="3">
+            <a:schemeClr val="accent1"/>
+          </a:fillRef>
+          <a:effectRef idx="2">
+            <a:schemeClr val="accent1"/>
+          </a:effectRef>
+          <a:fontRef idx="minor">
+            <a:schemeClr val="lt1"/>
+          </a:fontRef>
+        </p:style>
+        <p:txBody>
+          <a:bodyPr rtlCol="0" anchor="ctr"/>
+          <a:lstStyle/>
+          <a:p>
+            <a:pPr algn="ctr"/>
+          </a:p>
+        </p:txBody>
+      </p:sp>
+      <p:sp>
+        <p:nvSpPr>
+          <p:cNvPr id="21" name="TextBox 20"/>
+          <p:cNvSpPr txBox="1"/>
+          <p:nvPr/>
+        </p:nvSpPr>
+        <p:spPr>
+          <a:xfrm>
+            <a:off x="822959" y="4041648"/>
+            <a:ext cx="384048" cy="384048"/>
+          </a:xfrm>
+          <a:prstGeom prst="rect">
+            <a:avLst/>
+          </a:prstGeom>
+          <a:noFill/>
+        </p:spPr>
+        <p:txBody>
+          <a:bodyPr wrap="square" lIns="0" rIns="0" tIns="0" bIns="0" anchor="ctr">
+            <a:spAutoFit/>
+          </a:bodyPr>
+          <a:lstStyle/>
+          <a:p>
+            <a:pPr algn="ctr"/>
+            <a:r>
+              <a:rPr sz="1300" b="1" i="0">
+                <a:solidFill>
+                  <a:srgbClr val="FFFFFF"/>
+                </a:solidFill>
+                <a:latin typeface="Cambria"/>
+              </a:rPr>
+              <a:t>4</a:t>
+            </a:r>
+          </a:p>
+        </p:txBody>
+      </p:sp>
+      <p:sp>
+        <p:nvSpPr>
+          <p:cNvPr id="22" name="TextBox 21"/>
+          <p:cNvSpPr txBox="1"/>
+          <p:nvPr/>
+        </p:nvSpPr>
+        <p:spPr>
+          <a:xfrm>
+            <a:off x="822959" y="4572000"/>
+            <a:ext cx="3017520" cy="457200"/>
+          </a:xfrm>
+          <a:prstGeom prst="rect">
+            <a:avLst/>
+          </a:prstGeom>
+          <a:noFill/>
+        </p:spPr>
+        <p:txBody>
+          <a:bodyPr wrap="square" lIns="0" rIns="0" tIns="0" bIns="0" anchor="t">
+            <a:spAutoFit/>
+          </a:bodyPr>
+          <a:lstStyle/>
+          <a:p>
+            <a:pPr algn="l">
+              <a:lnSpc>
+                <a:spcPts val="1800"/>
+              </a:lnSpc>
+            </a:pPr>
+            <a:r>
+              <a:rPr sz="1450" b="1" i="0">
+                <a:solidFill>
+                  <a:srgbClr val="1B2430"/>
+                </a:solidFill>
+                <a:latin typeface="Cambria"/>
+              </a:rPr>
+              <a:t>The connection string</a:t>
+            </a:r>
+          </a:p>
+        </p:txBody>
+      </p:sp>
+      <p:sp>
+        <p:nvSpPr>
+          <p:cNvPr id="23" name="TextBox 22"/>
+          <p:cNvSpPr txBox="1"/>
+          <p:nvPr/>
+        </p:nvSpPr>
+        <p:spPr>
+          <a:xfrm>
+            <a:off x="822959" y="5102352"/>
+            <a:ext cx="3017520" cy="658368"/>
+          </a:xfrm>
+          <a:prstGeom prst="rect">
+            <a:avLst/>
+          </a:prstGeom>
+          <a:noFill/>
+        </p:spPr>
+        <p:txBody>
+          <a:bodyPr wrap="square" lIns="0" rIns="0" tIns="0" bIns="0" anchor="t">
+            <a:spAutoFit/>
+          </a:bodyPr>
+          <a:lstStyle/>
+          <a:p>
+            <a:pPr algn="l">
+              <a:lnSpc>
+                <a:spcPts val="1400"/>
+              </a:lnSpc>
+            </a:pPr>
+            <a:r>
+              <a:rPr sz="1100" b="0" i="0">
+                <a:solidFill>
+                  <a:srgbClr val="4E5A66"/>
+                </a:solidFill>
+                <a:latin typeface="Calibri"/>
+              </a:rPr>
+              <a:t>Read from the registry at HKEY_CURRENT_USER, Software, XenxibleIdentifier. It must exist on their machine or startup fails.</a:t>
+            </a:r>
+          </a:p>
+        </p:txBody>
+      </p:sp>
+      <p:sp>
+        <p:nvSpPr>
+          <p:cNvPr id="24" name="Rounded Rectangle 23"/>
+          <p:cNvSpPr/>
+          <p:nvPr/>
+        </p:nvSpPr>
+        <p:spPr>
+          <a:xfrm>
+            <a:off x="4263390" y="3785616"/>
+            <a:ext cx="3561588" cy="2103120"/>
+          </a:xfrm>
+          <a:prstGeom prst="roundRect">
+            <a:avLst>
+              <a:gd name="adj" fmla="val 5500"/>
+            </a:avLst>
+          </a:prstGeom>
+          <a:solidFill>
+            <a:srgbClr val="F3F5F7"/>
+          </a:solidFill>
+          <a:ln w="9525">
+            <a:solidFill>
+              <a:srgbClr val="DFE4E9"/>
+            </a:solidFill>
+          </a:ln>
+          <a:effectLst/>
+        </p:spPr>
+        <p:style>
+          <a:lnRef idx="1">
+            <a:schemeClr val="accent1"/>
+          </a:lnRef>
+          <a:fillRef idx="3">
+            <a:schemeClr val="accent1"/>
+          </a:fillRef>
+          <a:effectRef idx="2">
+            <a:schemeClr val="accent1"/>
+          </a:effectRef>
+          <a:fontRef idx="minor">
+            <a:schemeClr val="lt1"/>
+          </a:fontRef>
+        </p:style>
+        <p:txBody>
+          <a:bodyPr rtlCol="0" anchor="ctr" wrap="square"/>
+          <a:lstStyle/>
+          <a:p>
+            <a:pPr algn="ctr"/>
+          </a:p>
+        </p:txBody>
+      </p:sp>
+      <p:sp>
+        <p:nvSpPr>
+          <p:cNvPr id="25" name="Oval 24"/>
+          <p:cNvSpPr/>
+          <p:nvPr/>
+        </p:nvSpPr>
+        <p:spPr>
+          <a:xfrm>
+            <a:off x="4537709" y="4041648"/>
+            <a:ext cx="384048" cy="384048"/>
+          </a:xfrm>
+          <a:prstGeom prst="ellipse">
+            <a:avLst/>
+          </a:prstGeom>
+          <a:solidFill>
+            <a:srgbClr val="C46A24"/>
+          </a:solidFill>
+          <a:ln>
+            <a:noFill/>
+          </a:ln>
+          <a:effectLst/>
+        </p:spPr>
+        <p:style>
+          <a:lnRef idx="1">
+            <a:schemeClr val="accent1"/>
+          </a:lnRef>
+          <a:fillRef idx="3">
+            <a:schemeClr val="accent1"/>
+          </a:fillRef>
+          <a:effectRef idx="2">
+            <a:schemeClr val="accent1"/>
+          </a:effectRef>
+          <a:fontRef idx="minor">
+            <a:schemeClr val="lt1"/>
+          </a:fontRef>
+        </p:style>
+        <p:txBody>
+          <a:bodyPr rtlCol="0" anchor="ctr"/>
+          <a:lstStyle/>
+          <a:p>
+            <a:pPr algn="ctr"/>
+          </a:p>
+        </p:txBody>
+      </p:sp>
+      <p:sp>
+        <p:nvSpPr>
+          <p:cNvPr id="26" name="TextBox 25"/>
+          <p:cNvSpPr txBox="1"/>
+          <p:nvPr/>
+        </p:nvSpPr>
+        <p:spPr>
+          <a:xfrm>
+            <a:off x="4537709" y="4041648"/>
+            <a:ext cx="384048" cy="384048"/>
+          </a:xfrm>
+          <a:prstGeom prst="rect">
+            <a:avLst/>
+          </a:prstGeom>
+          <a:noFill/>
+        </p:spPr>
+        <p:txBody>
+          <a:bodyPr wrap="square" lIns="0" rIns="0" tIns="0" bIns="0" anchor="ctr">
+            <a:spAutoFit/>
+          </a:bodyPr>
+          <a:lstStyle/>
+          <a:p>
+            <a:pPr algn="ctr"/>
+            <a:r>
+              <a:rPr sz="1300" b="1" i="0">
+                <a:solidFill>
+                  <a:srgbClr val="FFFFFF"/>
+                </a:solidFill>
+                <a:latin typeface="Cambria"/>
+              </a:rPr>
+              <a:t>5</a:t>
+            </a:r>
+          </a:p>
+        </p:txBody>
+      </p:sp>
+      <p:sp>
+        <p:nvSpPr>
+          <p:cNvPr id="27" name="TextBox 26"/>
+          <p:cNvSpPr txBox="1"/>
+          <p:nvPr/>
+        </p:nvSpPr>
+        <p:spPr>
+          <a:xfrm>
+            <a:off x="4537709" y="4572000"/>
+            <a:ext cx="3017520" cy="457200"/>
+          </a:xfrm>
+          <a:prstGeom prst="rect">
+            <a:avLst/>
+          </a:prstGeom>
+          <a:noFill/>
+        </p:spPr>
+        <p:txBody>
+          <a:bodyPr wrap="square" lIns="0" rIns="0" tIns="0" bIns="0" anchor="t">
+            <a:spAutoFit/>
+          </a:bodyPr>
+          <a:lstStyle/>
+          <a:p>
+            <a:pPr algn="l">
+              <a:lnSpc>
+                <a:spcPts val="1800"/>
+              </a:lnSpc>
+            </a:pPr>
+            <a:r>
+              <a:rPr sz="1450" b="1" i="0">
+                <a:solidFill>
+                  <a:srgbClr val="1B2430"/>
+                </a:solidFill>
+                <a:latin typeface="Cambria"/>
+              </a:rPr>
+              <a:t>The entry point caveat</a:t>
+            </a:r>
+          </a:p>
+        </p:txBody>
+      </p:sp>
+      <p:sp>
+        <p:nvSpPr>
+          <p:cNvPr id="28" name="TextBox 27"/>
+          <p:cNvSpPr txBox="1"/>
+          <p:nvPr/>
+        </p:nvSpPr>
+        <p:spPr>
+          <a:xfrm>
+            <a:off x="4537709" y="5102352"/>
+            <a:ext cx="3017520" cy="658368"/>
+          </a:xfrm>
+          <a:prstGeom prst="rect">
+            <a:avLst/>
+          </a:prstGeom>
+          <a:noFill/>
+        </p:spPr>
+        <p:txBody>
+          <a:bodyPr wrap="square" lIns="0" rIns="0" tIns="0" bIns="0" anchor="t">
+            <a:spAutoFit/>
+          </a:bodyPr>
+          <a:lstStyle/>
+          <a:p>
+            <a:pPr algn="l">
+              <a:lnSpc>
+                <a:spcPts val="1400"/>
+              </a:lnSpc>
+            </a:pPr>
+            <a:r>
+              <a:rPr sz="1100" b="0" i="0">
+                <a:solidFill>
+                  <a:srgbClr val="4E5A66"/>
+                </a:solidFill>
+                <a:latin typeface="Calibri"/>
+              </a:rPr>
+              <a:t>DevicePipeline.RunAsync takes a concrete PythonClient, so it always runs Python locally. Using the ML service needs an interface.</a:t>
+            </a:r>
+          </a:p>
+        </p:txBody>
+      </p:sp>
+      <p:sp>
+        <p:nvSpPr>
+          <p:cNvPr id="29" name="Rounded Rectangle 28"/>
+          <p:cNvSpPr/>
+          <p:nvPr/>
+        </p:nvSpPr>
+        <p:spPr>
+          <a:xfrm>
+            <a:off x="7978140" y="3785616"/>
+            <a:ext cx="3561588" cy="2103120"/>
+          </a:xfrm>
+          <a:prstGeom prst="roundRect">
+            <a:avLst>
+              <a:gd name="adj" fmla="val 5500"/>
+            </a:avLst>
+          </a:prstGeom>
+          <a:solidFill>
+            <a:srgbClr val="F3F5F7"/>
+          </a:solidFill>
+          <a:ln w="9525">
+            <a:solidFill>
+              <a:srgbClr val="DFE4E9"/>
+            </a:solidFill>
+          </a:ln>
+          <a:effectLst/>
+        </p:spPr>
+        <p:style>
+          <a:lnRef idx="1">
+            <a:schemeClr val="accent1"/>
+          </a:lnRef>
+          <a:fillRef idx="3">
+            <a:schemeClr val="accent1"/>
+          </a:fillRef>
+          <a:effectRef idx="2">
+            <a:schemeClr val="accent1"/>
+          </a:effectRef>
+          <a:fontRef idx="minor">
+            <a:schemeClr val="lt1"/>
+          </a:fontRef>
+        </p:style>
+        <p:txBody>
+          <a:bodyPr rtlCol="0" anchor="ctr" wrap="square"/>
+          <a:lstStyle/>
+          <a:p>
+            <a:pPr algn="ctr"/>
+          </a:p>
+        </p:txBody>
+      </p:sp>
+      <p:sp>
+        <p:nvSpPr>
+          <p:cNvPr id="30" name="Oval 29"/>
+          <p:cNvSpPr/>
+          <p:nvPr/>
+        </p:nvSpPr>
+        <p:spPr>
+          <a:xfrm>
+            <a:off x="8252460" y="4041648"/>
+            <a:ext cx="384048" cy="384048"/>
+          </a:xfrm>
+          <a:prstGeom prst="ellipse">
+            <a:avLst/>
+          </a:prstGeom>
+          <a:solidFill>
+            <a:srgbClr val="C46A24"/>
+          </a:solidFill>
+          <a:ln>
+            <a:noFill/>
+          </a:ln>
+          <a:effectLst/>
+        </p:spPr>
+        <p:style>
+          <a:lnRef idx="1">
+            <a:schemeClr val="accent1"/>
+          </a:lnRef>
+          <a:fillRef idx="3">
+            <a:schemeClr val="accent1"/>
+          </a:fillRef>
+          <a:effectRef idx="2">
+            <a:schemeClr val="accent1"/>
+          </a:effectRef>
+          <a:fontRef idx="minor">
+            <a:schemeClr val="lt1"/>
+          </a:fontRef>
+        </p:style>
+        <p:txBody>
+          <a:bodyPr rtlCol="0" anchor="ctr"/>
+          <a:lstStyle/>
+          <a:p>
+            <a:pPr algn="ctr"/>
+          </a:p>
+        </p:txBody>
+      </p:sp>
+      <p:sp>
+        <p:nvSpPr>
+          <p:cNvPr id="31" name="TextBox 30"/>
+          <p:cNvSpPr txBox="1"/>
+          <p:nvPr/>
+        </p:nvSpPr>
+        <p:spPr>
+          <a:xfrm>
+            <a:off x="8252460" y="4041648"/>
+            <a:ext cx="384048" cy="384048"/>
+          </a:xfrm>
+          <a:prstGeom prst="rect">
+            <a:avLst/>
+          </a:prstGeom>
+          <a:noFill/>
+        </p:spPr>
+        <p:txBody>
+          <a:bodyPr wrap="square" lIns="0" rIns="0" tIns="0" bIns="0" anchor="ctr">
+            <a:spAutoFit/>
+          </a:bodyPr>
+          <a:lstStyle/>
+          <a:p>
+            <a:pPr algn="ctr"/>
+            <a:r>
+              <a:rPr sz="1300" b="1" i="0">
+                <a:solidFill>
+                  <a:srgbClr val="FFFFFF"/>
+                </a:solidFill>
+                <a:latin typeface="Cambria"/>
+              </a:rPr>
+              <a:t>6</a:t>
+            </a:r>
+          </a:p>
+        </p:txBody>
+      </p:sp>
+      <p:sp>
+        <p:nvSpPr>
+          <p:cNvPr id="32" name="TextBox 31"/>
+          <p:cNvSpPr txBox="1"/>
+          <p:nvPr/>
+        </p:nvSpPr>
+        <p:spPr>
+          <a:xfrm>
+            <a:off x="8252460" y="4572000"/>
+            <a:ext cx="3017520" cy="457200"/>
+          </a:xfrm>
+          <a:prstGeom prst="rect">
+            <a:avLst/>
+          </a:prstGeom>
+          <a:noFill/>
+        </p:spPr>
+        <p:txBody>
+          <a:bodyPr wrap="square" lIns="0" rIns="0" tIns="0" bIns="0" anchor="t">
+            <a:spAutoFit/>
+          </a:bodyPr>
+          <a:lstStyle/>
+          <a:p>
+            <a:pPr algn="l">
+              <a:lnSpc>
+                <a:spcPts val="1800"/>
+              </a:lnSpc>
+            </a:pPr>
+            <a:r>
+              <a:rPr sz="1450" b="1" i="0">
+                <a:solidFill>
+                  <a:srgbClr val="1B2430"/>
+                </a:solidFill>
+                <a:latin typeface="Cambria"/>
+              </a:rPr>
+              <a:t>The documentation</a:t>
+            </a:r>
+          </a:p>
+        </p:txBody>
+      </p:sp>
+      <p:sp>
+        <p:nvSpPr>
+          <p:cNvPr id="33" name="TextBox 32"/>
+          <p:cNvSpPr txBox="1"/>
+          <p:nvPr/>
+        </p:nvSpPr>
+        <p:spPr>
+          <a:xfrm>
+            <a:off x="8252460" y="5102352"/>
+            <a:ext cx="3017520" cy="658368"/>
+          </a:xfrm>
+          <a:prstGeom prst="rect">
+            <a:avLst/>
+          </a:prstGeom>
+          <a:noFill/>
+        </p:spPr>
+        <p:txBody>
+          <a:bodyPr wrap="square" lIns="0" rIns="0" tIns="0" bIns="0" anchor="t">
+            <a:spAutoFit/>
+          </a:bodyPr>
+          <a:lstStyle/>
+          <a:p>
+            <a:pPr algn="l">
+              <a:lnSpc>
+                <a:spcPts val="1400"/>
+              </a:lnSpc>
+            </a:pPr>
+            <a:r>
+              <a:rPr sz="1100" b="0" i="0">
+                <a:solidFill>
+                  <a:srgbClr val="4E5A66"/>
+                </a:solidFill>
+                <a:latin typeface="Calibri"/>
+              </a:rPr>
+              <a:t>A 15-page API reference covering every class and method, plus a 2-page quick reference. Both are in the repository.</a:t>
+            </a:r>
+          </a:p>
+        </p:txBody>
+      </p:sp>
+      <p:sp>
+        <p:nvSpPr>
+          <p:cNvPr id="34" name="TextBox 33"/>
+          <p:cNvSpPr txBox="1"/>
+          <p:nvPr/>
+        </p:nvSpPr>
+        <p:spPr>
+          <a:xfrm>
+            <a:off x="548640" y="6419088"/>
+            <a:ext cx="8229600" cy="237744"/>
+          </a:xfrm>
+          <a:prstGeom prst="rect">
+            <a:avLst/>
+          </a:prstGeom>
+          <a:noFill/>
+        </p:spPr>
+        <p:txBody>
+          <a:bodyPr wrap="square" lIns="0" rIns="0" tIns="0" bIns="0" anchor="t">
+            <a:spAutoFit/>
+          </a:bodyPr>
+          <a:lstStyle/>
+          <a:p>
+            <a:pPr algn="l"/>
+            <a:r>
+              <a:rPr sz="900" b="0" i="0">
+                <a:solidFill>
+                  <a:srgbClr val="A6AEB6"/>
+                </a:solidFill>
+                <a:latin typeface="Calibri"/>
+              </a:rPr>
+              <a:t>Device Identifier  ·  Progress Report  ·  September 2026</a:t>
+            </a:r>
+          </a:p>
+        </p:txBody>
+      </p:sp>
+      <p:sp>
+        <p:nvSpPr>
+          <p:cNvPr id="35" name="TextBox 34"/>
+          <p:cNvSpPr txBox="1"/>
+          <p:nvPr/>
+        </p:nvSpPr>
+        <p:spPr>
+          <a:xfrm>
+            <a:off x="10698480" y="6419088"/>
+            <a:ext cx="941832" cy="237744"/>
+          </a:xfrm>
+          <a:prstGeom prst="rect">
+            <a:avLst/>
+          </a:prstGeom>
+          <a:noFill/>
+        </p:spPr>
+        <p:txBody>
+          <a:bodyPr wrap="square" lIns="0" rIns="0" tIns="0" bIns="0" anchor="t">
+            <a:spAutoFit/>
+          </a:bodyPr>
+          <a:lstStyle/>
+          <a:p>
+            <a:pPr algn="r"/>
+            <a:r>
+              <a:rPr sz="900" b="0" i="0">
+                <a:solidFill>
+                  <a:srgbClr val="A6AEB6"/>
+                </a:solidFill>
+                <a:latin typeface="Calibri"/>
+              </a:rPr>
+              <a:t>15</a:t>
+            </a:r>
+          </a:p>
+        </p:txBody>
+      </p:sp>
+    </p:spTree>
+  </p:cSld>
+  <p:clrMapOvr>
+    <a:masterClrMapping/>
+  </p:clrMapOvr>
+</p:sld>
+</file>
+
+<file path=ppt/slides/slide18.xml><?xml version="1.0" encoding="utf-8"?>
+<p:sld xmlns:a="http://schemas.openxmlformats.org/drawingml/2006/main" xmlns:p="http://schemas.openxmlformats.org/presentationml/2006/main" xmlns:r="http://schemas.openxmlformats.org/officeDocument/2006/relationships">
+  <p:cSld>
+    <p:spTree>
+      <p:nvGrpSpPr>
+        <p:cNvPr id="1" name=""/>
+        <p:cNvGrpSpPr/>
+        <p:nvPr/>
+      </p:nvGrpSpPr>
+      <p:grpSpPr/>
+      <p:sp>
+        <p:nvSpPr>
+          <p:cNvPr id="2" name="TextBox 1"/>
+          <p:cNvSpPr txBox="1"/>
+          <p:nvPr/>
+        </p:nvSpPr>
+        <p:spPr>
+          <a:xfrm>
+            <a:off x="548640" y="402336"/>
+            <a:ext cx="10607040" cy="237744"/>
+          </a:xfrm>
+          <a:prstGeom prst="rect">
+            <a:avLst/>
+          </a:prstGeom>
+          <a:noFill/>
+        </p:spPr>
+        <p:txBody>
+          <a:bodyPr wrap="square" lIns="0" rIns="0" tIns="0" bIns="0" anchor="t">
+            <a:spAutoFit/>
+          </a:bodyPr>
+          <a:lstStyle/>
+          <a:p>
+            <a:pPr algn="l"/>
+            <a:r>
+              <a:rPr sz="1050" b="1" i="0" spc="200">
+                <a:solidFill>
+                  <a:srgbClr val="C46A24"/>
+                </a:solidFill>
+                <a:latin typeface="Calibri"/>
+              </a:rPr>
+              <a:t>13  ·  IMPORTANT</a:t>
+            </a:r>
+          </a:p>
+        </p:txBody>
+      </p:sp>
+      <p:sp>
+        <p:nvSpPr>
+          <p:cNvPr id="3" name="TextBox 2"/>
+          <p:cNvSpPr txBox="1"/>
+          <p:nvPr/>
+        </p:nvSpPr>
+        <p:spPr>
+          <a:xfrm>
+            <a:off x="548640" y="694944"/>
+            <a:ext cx="11091672" cy="475488"/>
+          </a:xfrm>
+          <a:prstGeom prst="rect">
+            <a:avLst/>
+          </a:prstGeom>
+          <a:noFill/>
+        </p:spPr>
+        <p:txBody>
+          <a:bodyPr wrap="square" lIns="0" rIns="0" tIns="0" bIns="0" anchor="t">
+            <a:spAutoFit/>
+          </a:bodyPr>
+          <a:lstStyle/>
+          <a:p>
+            <a:pPr algn="l"/>
+            <a:r>
+              <a:rPr sz="2900" b="1" i="0">
+                <a:solidFill>
+                  <a:srgbClr val="1B2430"/>
+                </a:solidFill>
+                <a:latin typeface="Cambria"/>
+              </a:rPr>
+              <a:t>Six things to know before building on it</a:t>
+            </a:r>
+          </a:p>
+        </p:txBody>
+      </p:sp>
+      <p:sp>
+        <p:nvSpPr>
+          <p:cNvPr id="4" name="Rounded Rectangle 3"/>
+          <p:cNvSpPr/>
+          <p:nvPr/>
+        </p:nvSpPr>
+        <p:spPr>
+          <a:xfrm>
+            <a:off x="548640" y="1481328"/>
+            <a:ext cx="3561588" cy="2103120"/>
+          </a:xfrm>
+          <a:prstGeom prst="roundRect">
+            <a:avLst>
+              <a:gd name="adj" fmla="val 5500"/>
+            </a:avLst>
+          </a:prstGeom>
+          <a:solidFill>
+            <a:srgbClr val="F3F5F7"/>
+          </a:solidFill>
+          <a:ln w="9525">
+            <a:solidFill>
+              <a:srgbClr val="DFE4E9"/>
+            </a:solidFill>
+          </a:ln>
+          <a:effectLst/>
+        </p:spPr>
+        <p:style>
+          <a:lnRef idx="1">
+            <a:schemeClr val="accent1"/>
+          </a:lnRef>
+          <a:fillRef idx="3">
+            <a:schemeClr val="accent1"/>
+          </a:fillRef>
+          <a:effectRef idx="2">
+            <a:schemeClr val="accent1"/>
+          </a:effectRef>
+          <a:fontRef idx="minor">
+            <a:schemeClr val="lt1"/>
+          </a:fontRef>
+        </p:style>
+        <p:txBody>
+          <a:bodyPr rtlCol="0" anchor="ctr" wrap="square"/>
+          <a:lstStyle/>
+          <a:p>
+            <a:pPr algn="ctr"/>
+          </a:p>
+        </p:txBody>
+      </p:sp>
+      <p:sp>
+        <p:nvSpPr>
+          <p:cNvPr id="5" name="Oval 4"/>
+          <p:cNvSpPr/>
+          <p:nvPr/>
+        </p:nvSpPr>
+        <p:spPr>
+          <a:xfrm>
+            <a:off x="822959" y="1737360"/>
+            <a:ext cx="384048" cy="384048"/>
+          </a:xfrm>
+          <a:prstGeom prst="ellipse">
+            <a:avLst/>
+          </a:prstGeom>
+          <a:solidFill>
+            <a:srgbClr val="2E7D63"/>
+          </a:solidFill>
+          <a:ln>
+            <a:noFill/>
+          </a:ln>
+          <a:effectLst/>
+        </p:spPr>
+        <p:style>
+          <a:lnRef idx="1">
+            <a:schemeClr val="accent1"/>
+          </a:lnRef>
+          <a:fillRef idx="3">
+            <a:schemeClr val="accent1"/>
+          </a:fillRef>
+          <a:effectRef idx="2">
+            <a:schemeClr val="accent1"/>
+          </a:effectRef>
+          <a:fontRef idx="minor">
+            <a:schemeClr val="lt1"/>
+          </a:fontRef>
+        </p:style>
+        <p:txBody>
+          <a:bodyPr rtlCol="0" anchor="ctr"/>
+          <a:lstStyle/>
+          <a:p>
+            <a:pPr algn="ctr"/>
+          </a:p>
+        </p:txBody>
+      </p:sp>
+      <p:sp>
+        <p:nvSpPr>
+          <p:cNvPr id="6" name="TextBox 5"/>
+          <p:cNvSpPr txBox="1"/>
+          <p:nvPr/>
+        </p:nvSpPr>
+        <p:spPr>
+          <a:xfrm>
+            <a:off x="822959" y="1737360"/>
+            <a:ext cx="384048" cy="384048"/>
+          </a:xfrm>
+          <a:prstGeom prst="rect">
+            <a:avLst/>
+          </a:prstGeom>
+          <a:noFill/>
+        </p:spPr>
+        <p:txBody>
+          <a:bodyPr wrap="square" lIns="0" rIns="0" tIns="0" bIns="0" anchor="ctr">
+            <a:spAutoFit/>
+          </a:bodyPr>
+          <a:lstStyle/>
+          <a:p>
+            <a:pPr algn="ctr"/>
+            <a:r>
+              <a:rPr sz="1300" b="1" i="0">
+                <a:solidFill>
+                  <a:srgbClr val="FFFFFF"/>
+                </a:solidFill>
+                <a:latin typeface="Cambria"/>
+              </a:rPr>
+              <a:t>1</a:t>
+            </a:r>
+          </a:p>
+        </p:txBody>
+      </p:sp>
+      <p:sp>
+        <p:nvSpPr>
+          <p:cNvPr id="7" name="TextBox 6"/>
+          <p:cNvSpPr txBox="1"/>
+          <p:nvPr/>
+        </p:nvSpPr>
+        <p:spPr>
+          <a:xfrm>
+            <a:off x="822959" y="2267712"/>
+            <a:ext cx="3017520" cy="457200"/>
+          </a:xfrm>
+          <a:prstGeom prst="rect">
+            <a:avLst/>
+          </a:prstGeom>
+          <a:noFill/>
+        </p:spPr>
+        <p:txBody>
+          <a:bodyPr wrap="square" lIns="0" rIns="0" tIns="0" bIns="0" anchor="t">
+            <a:spAutoFit/>
+          </a:bodyPr>
+          <a:lstStyle/>
+          <a:p>
+            <a:pPr algn="l">
+              <a:lnSpc>
+                <a:spcPts val="1800"/>
+              </a:lnSpc>
+            </a:pPr>
+            <a:r>
+              <a:rPr sz="1450" b="1" i="0">
+                <a:solidFill>
+                  <a:srgbClr val="1B2430"/>
+                </a:solidFill>
+                <a:latin typeface="Cambria"/>
+              </a:rPr>
+              <a:t>Not yet a Windows service</a:t>
+            </a:r>
+          </a:p>
+        </p:txBody>
+      </p:sp>
+      <p:sp>
+        <p:nvSpPr>
+          <p:cNvPr id="8" name="TextBox 7"/>
+          <p:cNvSpPr txBox="1"/>
+          <p:nvPr/>
+        </p:nvSpPr>
+        <p:spPr>
+          <a:xfrm>
+            <a:off x="822959" y="2798064"/>
+            <a:ext cx="3017520" cy="658368"/>
+          </a:xfrm>
+          <a:prstGeom prst="rect">
+            <a:avLst/>
+          </a:prstGeom>
+          <a:noFill/>
+        </p:spPr>
+        <p:txBody>
+          <a:bodyPr wrap="square" lIns="0" rIns="0" tIns="0" bIns="0" anchor="t">
+            <a:spAutoFit/>
+          </a:bodyPr>
+          <a:lstStyle/>
+          <a:p>
+            <a:pPr algn="l">
+              <a:lnSpc>
+                <a:spcPts val="1400"/>
+              </a:lnSpc>
+            </a:pPr>
+            <a:r>
+              <a:rPr sz="1100" b="0" i="0">
+                <a:solidFill>
+                  <a:srgbClr val="4E5A66"/>
+                </a:solidFill>
+                <a:latin typeface="Calibri"/>
+              </a:rPr>
+              <a:t>It runs in a PowerShell window on the server. Closing it, or a reboot, stops every prediction. NSSM is the last step.</a:t>
+            </a:r>
+          </a:p>
+        </p:txBody>
+      </p:sp>
+      <p:sp>
+        <p:nvSpPr>
+          <p:cNvPr id="9" name="Rounded Rectangle 8"/>
+          <p:cNvSpPr/>
+          <p:nvPr/>
+        </p:nvSpPr>
+        <p:spPr>
+          <a:xfrm>
+            <a:off x="4263390" y="1481328"/>
+            <a:ext cx="3561588" cy="2103120"/>
+          </a:xfrm>
+          <a:prstGeom prst="roundRect">
+            <a:avLst>
+              <a:gd name="adj" fmla="val 5500"/>
+            </a:avLst>
+          </a:prstGeom>
+          <a:solidFill>
+            <a:srgbClr val="F3F5F7"/>
+          </a:solidFill>
+          <a:ln w="9525">
+            <a:solidFill>
+              <a:srgbClr val="DFE4E9"/>
+            </a:solidFill>
+          </a:ln>
+          <a:effectLst/>
+        </p:spPr>
+        <p:style>
+          <a:lnRef idx="1">
+            <a:schemeClr val="accent1"/>
+          </a:lnRef>
+          <a:fillRef idx="3">
+            <a:schemeClr val="accent1"/>
+          </a:fillRef>
+          <a:effectRef idx="2">
+            <a:schemeClr val="accent1"/>
+          </a:effectRef>
+          <a:fontRef idx="minor">
+            <a:schemeClr val="lt1"/>
+          </a:fontRef>
+        </p:style>
+        <p:txBody>
+          <a:bodyPr rtlCol="0" anchor="ctr" wrap="square"/>
+          <a:lstStyle/>
+          <a:p>
+            <a:pPr algn="ctr"/>
+          </a:p>
+        </p:txBody>
+      </p:sp>
+      <p:sp>
+        <p:nvSpPr>
+          <p:cNvPr id="10" name="Oval 9"/>
+          <p:cNvSpPr/>
+          <p:nvPr/>
+        </p:nvSpPr>
+        <p:spPr>
+          <a:xfrm>
+            <a:off x="4537709" y="1737360"/>
+            <a:ext cx="384048" cy="384048"/>
+          </a:xfrm>
+          <a:prstGeom prst="ellipse">
+            <a:avLst/>
+          </a:prstGeom>
+          <a:solidFill>
+            <a:srgbClr val="2E7D63"/>
+          </a:solidFill>
+          <a:ln>
+            <a:noFill/>
+          </a:ln>
+          <a:effectLst/>
+        </p:spPr>
+        <p:style>
+          <a:lnRef idx="1">
+            <a:schemeClr val="accent1"/>
+          </a:lnRef>
+          <a:fillRef idx="3">
+            <a:schemeClr val="accent1"/>
+          </a:fillRef>
+          <a:effectRef idx="2">
+            <a:schemeClr val="accent1"/>
+          </a:effectRef>
+          <a:fontRef idx="minor">
+            <a:schemeClr val="lt1"/>
+          </a:fontRef>
+        </p:style>
+        <p:txBody>
+          <a:bodyPr rtlCol="0" anchor="ctr"/>
+          <a:lstStyle/>
+          <a:p>
+            <a:pPr algn="ctr"/>
+          </a:p>
+        </p:txBody>
+      </p:sp>
+      <p:sp>
+        <p:nvSpPr>
+          <p:cNvPr id="11" name="TextBox 10"/>
+          <p:cNvSpPr txBox="1"/>
+          <p:nvPr/>
+        </p:nvSpPr>
+        <p:spPr>
+          <a:xfrm>
+            <a:off x="4537709" y="1737360"/>
+            <a:ext cx="384048" cy="384048"/>
+          </a:xfrm>
+          <a:prstGeom prst="rect">
+            <a:avLst/>
+          </a:prstGeom>
+          <a:noFill/>
+        </p:spPr>
+        <p:txBody>
+          <a:bodyPr wrap="square" lIns="0" rIns="0" tIns="0" bIns="0" anchor="ctr">
+            <a:spAutoFit/>
+          </a:bodyPr>
+          <a:lstStyle/>
+          <a:p>
+            <a:pPr algn="ctr"/>
+            <a:r>
+              <a:rPr sz="1300" b="1" i="0">
+                <a:solidFill>
+                  <a:srgbClr val="FFFFFF"/>
+                </a:solidFill>
+                <a:latin typeface="Cambria"/>
+              </a:rPr>
+              <a:t>2</a:t>
+            </a:r>
+          </a:p>
+        </p:txBody>
+      </p:sp>
+      <p:sp>
+        <p:nvSpPr>
+          <p:cNvPr id="12" name="TextBox 11"/>
+          <p:cNvSpPr txBox="1"/>
+          <p:nvPr/>
+        </p:nvSpPr>
+        <p:spPr>
+          <a:xfrm>
+            <a:off x="4537709" y="2267712"/>
+            <a:ext cx="3017520" cy="457200"/>
+          </a:xfrm>
+          <a:prstGeom prst="rect">
+            <a:avLst/>
+          </a:prstGeom>
+          <a:noFill/>
+        </p:spPr>
+        <p:txBody>
+          <a:bodyPr wrap="square" lIns="0" rIns="0" tIns="0" bIns="0" anchor="t">
+            <a:spAutoFit/>
+          </a:bodyPr>
+          <a:lstStyle/>
+          <a:p>
+            <a:pPr algn="l">
+              <a:lnSpc>
+                <a:spcPts val="1800"/>
+              </a:lnSpc>
+            </a:pPr>
+            <a:r>
+              <a:rPr sz="1450" b="1" i="0">
+                <a:solidFill>
+                  <a:srgbClr val="1B2430"/>
+                </a:solidFill>
+                <a:latin typeface="Cambria"/>
+              </a:rPr>
+              <a:t>One machine, two systems</a:t>
+            </a:r>
+          </a:p>
+        </p:txBody>
+      </p:sp>
+      <p:sp>
+        <p:nvSpPr>
+          <p:cNvPr id="13" name="TextBox 12"/>
+          <p:cNvSpPr txBox="1"/>
+          <p:nvPr/>
+        </p:nvSpPr>
+        <p:spPr>
+          <a:xfrm>
+            <a:off x="4537709" y="2798064"/>
+            <a:ext cx="3017520" cy="658368"/>
+          </a:xfrm>
+          <a:prstGeom prst="rect">
+            <a:avLst/>
+          </a:prstGeom>
+          <a:noFill/>
+        </p:spPr>
+        <p:txBody>
+          <a:bodyPr wrap="square" lIns="0" rIns="0" tIns="0" bIns="0" anchor="t">
+            <a:spAutoFit/>
+          </a:bodyPr>
+          <a:lstStyle/>
+          <a:p>
+            <a:pPr algn="l">
+              <a:lnSpc>
+                <a:spcPts val="1400"/>
+              </a:lnSpc>
+            </a:pPr>
+            <a:r>
+              <a:rPr sz="1100" b="0" i="0">
+                <a:solidFill>
+                  <a:srgbClr val="4E5A66"/>
+                </a:solidFill>
+                <a:latin typeface="Calibri"/>
+              </a:rPr>
+              <a:t>Azure DevOps on port 80 and the ML service on port 8000 share 128.100.8.213. Losing it loses both at once.</a:t>
+            </a:r>
+          </a:p>
+        </p:txBody>
+      </p:sp>
+      <p:sp>
+        <p:nvSpPr>
+          <p:cNvPr id="14" name="Rounded Rectangle 13"/>
+          <p:cNvSpPr/>
+          <p:nvPr/>
+        </p:nvSpPr>
+        <p:spPr>
+          <a:xfrm>
+            <a:off x="7978140" y="1481328"/>
+            <a:ext cx="3561588" cy="2103120"/>
+          </a:xfrm>
+          <a:prstGeom prst="roundRect">
+            <a:avLst>
+              <a:gd name="adj" fmla="val 5500"/>
+            </a:avLst>
+          </a:prstGeom>
+          <a:solidFill>
+            <a:srgbClr val="F3F5F7"/>
+          </a:solidFill>
+          <a:ln w="9525">
+            <a:solidFill>
+              <a:srgbClr val="DFE4E9"/>
+            </a:solidFill>
+          </a:ln>
+          <a:effectLst/>
+        </p:spPr>
+        <p:style>
+          <a:lnRef idx="1">
+            <a:schemeClr val="accent1"/>
+          </a:lnRef>
+          <a:fillRef idx="3">
+            <a:schemeClr val="accent1"/>
+          </a:fillRef>
+          <a:effectRef idx="2">
+            <a:schemeClr val="accent1"/>
+          </a:effectRef>
+          <a:fontRef idx="minor">
+            <a:schemeClr val="lt1"/>
+          </a:fontRef>
+        </p:style>
+        <p:txBody>
+          <a:bodyPr rtlCol="0" anchor="ctr" wrap="square"/>
+          <a:lstStyle/>
+          <a:p>
+            <a:pPr algn="ctr"/>
+          </a:p>
+        </p:txBody>
+      </p:sp>
+      <p:sp>
+        <p:nvSpPr>
+          <p:cNvPr id="15" name="Oval 14"/>
+          <p:cNvSpPr/>
+          <p:nvPr/>
+        </p:nvSpPr>
+        <p:spPr>
+          <a:xfrm>
+            <a:off x="8252460" y="1737360"/>
+            <a:ext cx="384048" cy="384048"/>
+          </a:xfrm>
+          <a:prstGeom prst="ellipse">
+            <a:avLst/>
+          </a:prstGeom>
+          <a:solidFill>
+            <a:srgbClr val="2E7D63"/>
+          </a:solidFill>
+          <a:ln>
+            <a:noFill/>
+          </a:ln>
+          <a:effectLst/>
+        </p:spPr>
+        <p:style>
+          <a:lnRef idx="1">
+            <a:schemeClr val="accent1"/>
+          </a:lnRef>
+          <a:fillRef idx="3">
+            <a:schemeClr val="accent1"/>
+          </a:fillRef>
+          <a:effectRef idx="2">
+            <a:schemeClr val="accent1"/>
+          </a:effectRef>
+          <a:fontRef idx="minor">
+            <a:schemeClr val="lt1"/>
+          </a:fontRef>
+        </p:style>
+        <p:txBody>
+          <a:bodyPr rtlCol="0" anchor="ctr"/>
+          <a:lstStyle/>
+          <a:p>
+            <a:pPr algn="ctr"/>
+          </a:p>
+        </p:txBody>
+      </p:sp>
+      <p:sp>
+        <p:nvSpPr>
+          <p:cNvPr id="16" name="TextBox 15"/>
+          <p:cNvSpPr txBox="1"/>
+          <p:nvPr/>
+        </p:nvSpPr>
+        <p:spPr>
+          <a:xfrm>
+            <a:off x="8252460" y="1737360"/>
+            <a:ext cx="384048" cy="384048"/>
+          </a:xfrm>
+          <a:prstGeom prst="rect">
+            <a:avLst/>
+          </a:prstGeom>
+          <a:noFill/>
+        </p:spPr>
+        <p:txBody>
+          <a:bodyPr wrap="square" lIns="0" rIns="0" tIns="0" bIns="0" anchor="ctr">
+            <a:spAutoFit/>
+          </a:bodyPr>
+          <a:lstStyle/>
+          <a:p>
+            <a:pPr algn="ctr"/>
+            <a:r>
+              <a:rPr sz="1300" b="1" i="0">
+                <a:solidFill>
+                  <a:srgbClr val="FFFFFF"/>
+                </a:solidFill>
+                <a:latin typeface="Cambria"/>
+              </a:rPr>
+              <a:t>3</a:t>
+            </a:r>
+          </a:p>
+        </p:txBody>
+      </p:sp>
+      <p:sp>
+        <p:nvSpPr>
+          <p:cNvPr id="17" name="TextBox 16"/>
+          <p:cNvSpPr txBox="1"/>
+          <p:nvPr/>
+        </p:nvSpPr>
+        <p:spPr>
+          <a:xfrm>
+            <a:off x="8252460" y="2267712"/>
+            <a:ext cx="3017520" cy="457200"/>
+          </a:xfrm>
+          <a:prstGeom prst="rect">
+            <a:avLst/>
+          </a:prstGeom>
+          <a:noFill/>
+        </p:spPr>
+        <p:txBody>
+          <a:bodyPr wrap="square" lIns="0" rIns="0" tIns="0" bIns="0" anchor="t">
+            <a:spAutoFit/>
+          </a:bodyPr>
+          <a:lstStyle/>
+          <a:p>
+            <a:pPr algn="l">
+              <a:lnSpc>
+                <a:spcPts val="1800"/>
+              </a:lnSpc>
+            </a:pPr>
+            <a:r>
+              <a:rPr sz="1450" b="1" i="0">
+                <a:solidFill>
+                  <a:srgbClr val="1B2430"/>
+                </a:solidFill>
+                <a:latin typeface="Cambria"/>
+              </a:rPr>
+              <a:t>Case sensitivity half fixed</a:t>
+            </a:r>
+          </a:p>
+        </p:txBody>
+      </p:sp>
+      <p:sp>
+        <p:nvSpPr>
+          <p:cNvPr id="18" name="TextBox 17"/>
+          <p:cNvSpPr txBox="1"/>
+          <p:nvPr/>
+        </p:nvSpPr>
+        <p:spPr>
+          <a:xfrm>
+            <a:off x="8252460" y="2798064"/>
+            <a:ext cx="3017520" cy="658368"/>
+          </a:xfrm>
+          <a:prstGeom prst="rect">
+            <a:avLst/>
+          </a:prstGeom>
+          <a:noFill/>
+        </p:spPr>
+        <p:txBody>
+          <a:bodyPr wrap="square" lIns="0" rIns="0" tIns="0" bIns="0" anchor="t">
+            <a:spAutoFit/>
+          </a:bodyPr>
+          <a:lstStyle/>
+          <a:p>
+            <a:pPr algn="l">
+              <a:lnSpc>
+                <a:spcPts val="1400"/>
+              </a:lnSpc>
+            </a:pPr>
+            <a:r>
+              <a:rPr sz="1100" b="0" i="0">
+                <a:solidFill>
+                  <a:srgbClr val="4E5A66"/>
+                </a:solidFill>
+                <a:latin typeface="Calibri"/>
+              </a:rPr>
+              <a:t>Python normalises device IDs; C# still compares DeviceId and ProjectCode ordinally. V001.21 and v001.21 count as two.</a:t>
+            </a:r>
+          </a:p>
+        </p:txBody>
+      </p:sp>
+      <p:sp>
+        <p:nvSpPr>
+          <p:cNvPr id="19" name="Rounded Rectangle 18"/>
+          <p:cNvSpPr/>
+          <p:nvPr/>
+        </p:nvSpPr>
+        <p:spPr>
+          <a:xfrm>
+            <a:off x="548640" y="3785616"/>
+            <a:ext cx="3561588" cy="2103120"/>
+          </a:xfrm>
+          <a:prstGeom prst="roundRect">
+            <a:avLst>
+              <a:gd name="adj" fmla="val 5500"/>
+            </a:avLst>
+          </a:prstGeom>
+          <a:solidFill>
+            <a:srgbClr val="F3F5F7"/>
+          </a:solidFill>
+          <a:ln w="9525">
+            <a:solidFill>
+              <a:srgbClr val="DFE4E9"/>
+            </a:solidFill>
+          </a:ln>
+          <a:effectLst/>
+        </p:spPr>
+        <p:style>
+          <a:lnRef idx="1">
+            <a:schemeClr val="accent1"/>
+          </a:lnRef>
+          <a:fillRef idx="3">
+            <a:schemeClr val="accent1"/>
+          </a:fillRef>
+          <a:effectRef idx="2">
+            <a:schemeClr val="accent1"/>
+          </a:effectRef>
+          <a:fontRef idx="minor">
+            <a:schemeClr val="lt1"/>
+          </a:fontRef>
+        </p:style>
+        <p:txBody>
+          <a:bodyPr rtlCol="0" anchor="ctr" wrap="square"/>
+          <a:lstStyle/>
+          <a:p>
+            <a:pPr algn="ctr"/>
+          </a:p>
+        </p:txBody>
+      </p:sp>
+      <p:sp>
+        <p:nvSpPr>
+          <p:cNvPr id="20" name="Oval 19"/>
+          <p:cNvSpPr/>
+          <p:nvPr/>
+        </p:nvSpPr>
+        <p:spPr>
+          <a:xfrm>
+            <a:off x="822959" y="4041648"/>
+            <a:ext cx="384048" cy="384048"/>
+          </a:xfrm>
+          <a:prstGeom prst="ellipse">
+            <a:avLst/>
+          </a:prstGeom>
+          <a:solidFill>
+            <a:srgbClr val="C46A24"/>
+          </a:solidFill>
+          <a:ln>
+            <a:noFill/>
+          </a:ln>
+          <a:effectLst/>
+        </p:spPr>
+        <p:style>
+          <a:lnRef idx="1">
+            <a:schemeClr val="accent1"/>
+          </a:lnRef>
+          <a:fillRef idx="3">
+            <a:schemeClr val="accent1"/>
+          </a:fillRef>
+          <a:effectRef idx="2">
+            <a:schemeClr val="accent1"/>
+          </a:effectRef>
+          <a:fontRef idx="minor">
+            <a:schemeClr val="lt1"/>
+          </a:fontRef>
+        </p:style>
+        <p:txBody>
+          <a:bodyPr rtlCol="0" anchor="ctr"/>
+          <a:lstStyle/>
+          <a:p>
+            <a:pPr algn="ctr"/>
+          </a:p>
+        </p:txBody>
+      </p:sp>
+      <p:sp>
+        <p:nvSpPr>
+          <p:cNvPr id="21" name="TextBox 20"/>
+          <p:cNvSpPr txBox="1"/>
+          <p:nvPr/>
+        </p:nvSpPr>
+        <p:spPr>
+          <a:xfrm>
+            <a:off x="822959" y="4041648"/>
+            <a:ext cx="384048" cy="384048"/>
+          </a:xfrm>
+          <a:prstGeom prst="rect">
+            <a:avLst/>
+          </a:prstGeom>
+          <a:noFill/>
+        </p:spPr>
+        <p:txBody>
+          <a:bodyPr wrap="square" lIns="0" rIns="0" tIns="0" bIns="0" anchor="ctr">
+            <a:spAutoFit/>
+          </a:bodyPr>
+          <a:lstStyle/>
+          <a:p>
+            <a:pPr algn="ctr"/>
+            <a:r>
+              <a:rPr sz="1300" b="1" i="0">
+                <a:solidFill>
+                  <a:srgbClr val="FFFFFF"/>
+                </a:solidFill>
+                <a:latin typeface="Cambria"/>
+              </a:rPr>
+              <a:t>4</a:t>
+            </a:r>
+          </a:p>
+        </p:txBody>
+      </p:sp>
+      <p:sp>
+        <p:nvSpPr>
+          <p:cNvPr id="22" name="TextBox 21"/>
+          <p:cNvSpPr txBox="1"/>
+          <p:nvPr/>
+        </p:nvSpPr>
+        <p:spPr>
+          <a:xfrm>
+            <a:off x="822959" y="4572000"/>
+            <a:ext cx="3017520" cy="457200"/>
+          </a:xfrm>
+          <a:prstGeom prst="rect">
+            <a:avLst/>
+          </a:prstGeom>
+          <a:noFill/>
+        </p:spPr>
+        <p:txBody>
+          <a:bodyPr wrap="square" lIns="0" rIns="0" tIns="0" bIns="0" anchor="t">
+            <a:spAutoFit/>
+          </a:bodyPr>
+          <a:lstStyle/>
+          <a:p>
+            <a:pPr algn="l">
+              <a:lnSpc>
+                <a:spcPts val="1800"/>
+              </a:lnSpc>
+            </a:pPr>
+            <a:r>
+              <a:rPr sz="1450" b="1" i="0">
+                <a:solidFill>
+                  <a:srgbClr val="1B2430"/>
+                </a:solidFill>
+                <a:latin typeface="Cambria"/>
+              </a:rPr>
+              <a:t>Quota data is placeholder</a:t>
+            </a:r>
+          </a:p>
+        </p:txBody>
+      </p:sp>
+      <p:sp>
+        <p:nvSpPr>
+          <p:cNvPr id="23" name="TextBox 22"/>
+          <p:cNvSpPr txBox="1"/>
+          <p:nvPr/>
+        </p:nvSpPr>
+        <p:spPr>
+          <a:xfrm>
+            <a:off x="822959" y="5102352"/>
+            <a:ext cx="3017520" cy="658368"/>
+          </a:xfrm>
+          <a:prstGeom prst="rect">
+            <a:avLst/>
+          </a:prstGeom>
+          <a:noFill/>
+        </p:spPr>
+        <p:txBody>
+          <a:bodyPr wrap="square" lIns="0" rIns="0" tIns="0" bIns="0" anchor="t">
+            <a:spAutoFit/>
+          </a:bodyPr>
+          <a:lstStyle/>
+          <a:p>
+            <a:pPr algn="l">
+              <a:lnSpc>
+                <a:spcPts val="1400"/>
+              </a:lnSpc>
+            </a:pPr>
+            <a:r>
+              <a:rPr sz="1100" b="0" i="0">
+                <a:solidFill>
+                  <a:srgbClr val="4E5A66"/>
+                </a:solidFill>
+                <a:latin typeface="Calibri"/>
+              </a:rPr>
+              <a:t>Real composition exists for Section 2 only. The 25% auto-assignment rate measures missing data, not model accuracy.</a:t>
+            </a:r>
+          </a:p>
+        </p:txBody>
+      </p:sp>
+      <p:sp>
+        <p:nvSpPr>
+          <p:cNvPr id="24" name="Rounded Rectangle 23"/>
+          <p:cNvSpPr/>
+          <p:nvPr/>
+        </p:nvSpPr>
+        <p:spPr>
+          <a:xfrm>
+            <a:off x="4263390" y="3785616"/>
+            <a:ext cx="3561588" cy="2103120"/>
+          </a:xfrm>
+          <a:prstGeom prst="roundRect">
+            <a:avLst>
+              <a:gd name="adj" fmla="val 5500"/>
+            </a:avLst>
+          </a:prstGeom>
+          <a:solidFill>
+            <a:srgbClr val="F3F5F7"/>
+          </a:solidFill>
+          <a:ln w="9525">
+            <a:solidFill>
+              <a:srgbClr val="DFE4E9"/>
+            </a:solidFill>
+          </a:ln>
+          <a:effectLst/>
+        </p:spPr>
+        <p:style>
+          <a:lnRef idx="1">
+            <a:schemeClr val="accent1"/>
+          </a:lnRef>
+          <a:fillRef idx="3">
+            <a:schemeClr val="accent1"/>
+          </a:fillRef>
+          <a:effectRef idx="2">
+            <a:schemeClr val="accent1"/>
+          </a:effectRef>
+          <a:fontRef idx="minor">
+            <a:schemeClr val="lt1"/>
+          </a:fontRef>
+        </p:style>
+        <p:txBody>
+          <a:bodyPr rtlCol="0" anchor="ctr" wrap="square"/>
+          <a:lstStyle/>
+          <a:p>
+            <a:pPr algn="ctr"/>
+          </a:p>
+        </p:txBody>
+      </p:sp>
+      <p:sp>
+        <p:nvSpPr>
+          <p:cNvPr id="25" name="Oval 24"/>
+          <p:cNvSpPr/>
+          <p:nvPr/>
+        </p:nvSpPr>
+        <p:spPr>
+          <a:xfrm>
+            <a:off x="4537709" y="4041648"/>
+            <a:ext cx="384048" cy="384048"/>
+          </a:xfrm>
+          <a:prstGeom prst="ellipse">
+            <a:avLst/>
+          </a:prstGeom>
+          <a:solidFill>
+            <a:srgbClr val="C46A24"/>
+          </a:solidFill>
+          <a:ln>
+            <a:noFill/>
+          </a:ln>
+          <a:effectLst/>
+        </p:spPr>
+        <p:style>
+          <a:lnRef idx="1">
+            <a:schemeClr val="accent1"/>
+          </a:lnRef>
+          <a:fillRef idx="3">
+            <a:schemeClr val="accent1"/>
+          </a:fillRef>
+          <a:effectRef idx="2">
+            <a:schemeClr val="accent1"/>
+          </a:effectRef>
+          <a:fontRef idx="minor">
+            <a:schemeClr val="lt1"/>
+          </a:fontRef>
+        </p:style>
+        <p:txBody>
+          <a:bodyPr rtlCol="0" anchor="ctr"/>
+          <a:lstStyle/>
+          <a:p>
+            <a:pPr algn="ctr"/>
+          </a:p>
+        </p:txBody>
+      </p:sp>
+      <p:sp>
+        <p:nvSpPr>
+          <p:cNvPr id="26" name="TextBox 25"/>
+          <p:cNvSpPr txBox="1"/>
+          <p:nvPr/>
+        </p:nvSpPr>
+        <p:spPr>
+          <a:xfrm>
+            <a:off x="4537709" y="4041648"/>
+            <a:ext cx="384048" cy="384048"/>
+          </a:xfrm>
+          <a:prstGeom prst="rect">
+            <a:avLst/>
+          </a:prstGeom>
+          <a:noFill/>
+        </p:spPr>
+        <p:txBody>
+          <a:bodyPr wrap="square" lIns="0" rIns="0" tIns="0" bIns="0" anchor="ctr">
+            <a:spAutoFit/>
+          </a:bodyPr>
+          <a:lstStyle/>
+          <a:p>
+            <a:pPr algn="ctr"/>
+            <a:r>
+              <a:rPr sz="1300" b="1" i="0">
+                <a:solidFill>
+                  <a:srgbClr val="FFFFFF"/>
+                </a:solidFill>
+                <a:latin typeface="Cambria"/>
+              </a:rPr>
+              <a:t>5</a:t>
+            </a:r>
+          </a:p>
+        </p:txBody>
+      </p:sp>
+      <p:sp>
+        <p:nvSpPr>
+          <p:cNvPr id="27" name="TextBox 26"/>
+          <p:cNvSpPr txBox="1"/>
+          <p:nvPr/>
+        </p:nvSpPr>
+        <p:spPr>
+          <a:xfrm>
+            <a:off x="4537709" y="4572000"/>
+            <a:ext cx="3017520" cy="457200"/>
+          </a:xfrm>
+          <a:prstGeom prst="rect">
+            <a:avLst/>
+          </a:prstGeom>
+          <a:noFill/>
+        </p:spPr>
+        <p:txBody>
+          <a:bodyPr wrap="square" lIns="0" rIns="0" tIns="0" bIns="0" anchor="t">
+            <a:spAutoFit/>
+          </a:bodyPr>
+          <a:lstStyle/>
+          <a:p>
+            <a:pPr algn="l">
+              <a:lnSpc>
+                <a:spcPts val="1800"/>
+              </a:lnSpc>
+            </a:pPr>
+            <a:r>
+              <a:rPr sz="1450" b="1" i="0">
+                <a:solidFill>
+                  <a:srgbClr val="1B2430"/>
+                </a:solidFill>
+                <a:latin typeface="Cambria"/>
+              </a:rPr>
+              <a:t>Nothing is covered by tests</a:t>
+            </a:r>
+          </a:p>
+        </p:txBody>
+      </p:sp>
+      <p:sp>
+        <p:nvSpPr>
+          <p:cNvPr id="28" name="TextBox 27"/>
+          <p:cNvSpPr txBox="1"/>
+          <p:nvPr/>
+        </p:nvSpPr>
+        <p:spPr>
+          <a:xfrm>
+            <a:off x="4537709" y="5102352"/>
+            <a:ext cx="3017520" cy="658368"/>
+          </a:xfrm>
+          <a:prstGeom prst="rect">
+            <a:avLst/>
+          </a:prstGeom>
+          <a:noFill/>
+        </p:spPr>
+        <p:txBody>
+          <a:bodyPr wrap="square" lIns="0" rIns="0" tIns="0" bIns="0" anchor="t">
+            <a:spAutoFit/>
+          </a:bodyPr>
+          <a:lstStyle/>
+          <a:p>
+            <a:pPr algn="l">
+              <a:lnSpc>
+                <a:spcPts val="1400"/>
+              </a:lnSpc>
+            </a:pPr>
+            <a:r>
+              <a:rPr sz="1100" b="0" i="0">
+                <a:solidFill>
+                  <a:srgbClr val="4E5A66"/>
+                </a:solidFill>
+                <a:latin typeface="Calibri"/>
+              </a:rPr>
+              <a:t>Every check so far was run by hand. Interface work needs automated coverage before a change can break it silently.</a:t>
+            </a:r>
+          </a:p>
+        </p:txBody>
+      </p:sp>
+      <p:sp>
+        <p:nvSpPr>
+          <p:cNvPr id="29" name="Rounded Rectangle 28"/>
+          <p:cNvSpPr/>
+          <p:nvPr/>
+        </p:nvSpPr>
+        <p:spPr>
+          <a:xfrm>
+            <a:off x="7978140" y="3785616"/>
+            <a:ext cx="3561588" cy="2103120"/>
+          </a:xfrm>
+          <a:prstGeom prst="roundRect">
+            <a:avLst>
+              <a:gd name="adj" fmla="val 5500"/>
+            </a:avLst>
+          </a:prstGeom>
+          <a:solidFill>
+            <a:srgbClr val="F3F5F7"/>
+          </a:solidFill>
+          <a:ln w="9525">
+            <a:solidFill>
+              <a:srgbClr val="DFE4E9"/>
+            </a:solidFill>
+          </a:ln>
+          <a:effectLst/>
+        </p:spPr>
+        <p:style>
+          <a:lnRef idx="1">
+            <a:schemeClr val="accent1"/>
+          </a:lnRef>
+          <a:fillRef idx="3">
+            <a:schemeClr val="accent1"/>
+          </a:fillRef>
+          <a:effectRef idx="2">
+            <a:schemeClr val="accent1"/>
+          </a:effectRef>
+          <a:fontRef idx="minor">
+            <a:schemeClr val="lt1"/>
+          </a:fontRef>
+        </p:style>
+        <p:txBody>
+          <a:bodyPr rtlCol="0" anchor="ctr" wrap="square"/>
+          <a:lstStyle/>
+          <a:p>
+            <a:pPr algn="ctr"/>
+          </a:p>
+        </p:txBody>
+      </p:sp>
+      <p:sp>
+        <p:nvSpPr>
+          <p:cNvPr id="30" name="Oval 29"/>
+          <p:cNvSpPr/>
+          <p:nvPr/>
+        </p:nvSpPr>
+        <p:spPr>
+          <a:xfrm>
+            <a:off x="8252460" y="4041648"/>
+            <a:ext cx="384048" cy="384048"/>
+          </a:xfrm>
+          <a:prstGeom prst="ellipse">
+            <a:avLst/>
+          </a:prstGeom>
+          <a:solidFill>
+            <a:srgbClr val="C46A24"/>
+          </a:solidFill>
+          <a:ln>
+            <a:noFill/>
+          </a:ln>
+          <a:effectLst/>
+        </p:spPr>
+        <p:style>
+          <a:lnRef idx="1">
+            <a:schemeClr val="accent1"/>
+          </a:lnRef>
+          <a:fillRef idx="3">
+            <a:schemeClr val="accent1"/>
+          </a:fillRef>
+          <a:effectRef idx="2">
+            <a:schemeClr val="accent1"/>
+          </a:effectRef>
+          <a:fontRef idx="minor">
+            <a:schemeClr val="lt1"/>
+          </a:fontRef>
+        </p:style>
+        <p:txBody>
+          <a:bodyPr rtlCol="0" anchor="ctr"/>
+          <a:lstStyle/>
+          <a:p>
+            <a:pPr algn="ctr"/>
+          </a:p>
+        </p:txBody>
+      </p:sp>
+      <p:sp>
+        <p:nvSpPr>
+          <p:cNvPr id="31" name="TextBox 30"/>
+          <p:cNvSpPr txBox="1"/>
+          <p:nvPr/>
+        </p:nvSpPr>
+        <p:spPr>
+          <a:xfrm>
+            <a:off x="8252460" y="4041648"/>
+            <a:ext cx="384048" cy="384048"/>
+          </a:xfrm>
+          <a:prstGeom prst="rect">
+            <a:avLst/>
+          </a:prstGeom>
+          <a:noFill/>
+        </p:spPr>
+        <p:txBody>
+          <a:bodyPr wrap="square" lIns="0" rIns="0" tIns="0" bIns="0" anchor="ctr">
+            <a:spAutoFit/>
+          </a:bodyPr>
+          <a:lstStyle/>
+          <a:p>
+            <a:pPr algn="ctr"/>
+            <a:r>
+              <a:rPr sz="1300" b="1" i="0">
+                <a:solidFill>
+                  <a:srgbClr val="FFFFFF"/>
+                </a:solidFill>
+                <a:latin typeface="Cambria"/>
+              </a:rPr>
+              <a:t>6</a:t>
+            </a:r>
+          </a:p>
+        </p:txBody>
+      </p:sp>
+      <p:sp>
+        <p:nvSpPr>
+          <p:cNvPr id="32" name="TextBox 31"/>
+          <p:cNvSpPr txBox="1"/>
+          <p:nvPr/>
+        </p:nvSpPr>
+        <p:spPr>
+          <a:xfrm>
+            <a:off x="8252460" y="4572000"/>
+            <a:ext cx="3017520" cy="457200"/>
+          </a:xfrm>
+          <a:prstGeom prst="rect">
+            <a:avLst/>
+          </a:prstGeom>
+          <a:noFill/>
+        </p:spPr>
+        <p:txBody>
+          <a:bodyPr wrap="square" lIns="0" rIns="0" tIns="0" bIns="0" anchor="t">
+            <a:spAutoFit/>
+          </a:bodyPr>
+          <a:lstStyle/>
+          <a:p>
+            <a:pPr algn="l">
+              <a:lnSpc>
+                <a:spcPts val="1800"/>
+              </a:lnSpc>
+            </a:pPr>
+            <a:r>
+              <a:rPr sz="1450" b="1" i="0">
+                <a:solidFill>
+                  <a:srgbClr val="1B2430"/>
+                </a:solidFill>
+                <a:latin typeface="Cambria"/>
+              </a:rPr>
+              <a:t>Device type has no model</a:t>
+            </a:r>
+          </a:p>
+        </p:txBody>
+      </p:sp>
+      <p:sp>
+        <p:nvSpPr>
+          <p:cNvPr id="33" name="TextBox 32"/>
+          <p:cNvSpPr txBox="1"/>
+          <p:nvPr/>
+        </p:nvSpPr>
+        <p:spPr>
+          <a:xfrm>
+            <a:off x="8252460" y="5102352"/>
+            <a:ext cx="3017520" cy="658368"/>
+          </a:xfrm>
+          <a:prstGeom prst="rect">
+            <a:avLst/>
+          </a:prstGeom>
+          <a:noFill/>
+        </p:spPr>
+        <p:txBody>
+          <a:bodyPr wrap="square" lIns="0" rIns="0" tIns="0" bIns="0" anchor="t">
+            <a:spAutoFit/>
+          </a:bodyPr>
+          <a:lstStyle/>
+          <a:p>
+            <a:pPr algn="l">
+              <a:lnSpc>
+                <a:spcPts val="1400"/>
+              </a:lnSpc>
+            </a:pPr>
+            <a:r>
+              <a:rPr sz="1100" b="0" i="0">
+                <a:solidFill>
+                  <a:srgbClr val="4E5A66"/>
+                </a:solidFill>
+                <a:latin typeface="Calibri"/>
+              </a:rPr>
+              <a:t>It is a dictionary. An unseen prefix returns UNKNOWN by design and waits for an engineer to teach it permanently.</a:t>
+            </a:r>
+          </a:p>
+        </p:txBody>
+      </p:sp>
+      <p:sp>
+        <p:nvSpPr>
+          <p:cNvPr id="34" name="TextBox 33"/>
+          <p:cNvSpPr txBox="1"/>
+          <p:nvPr/>
+        </p:nvSpPr>
+        <p:spPr>
+          <a:xfrm>
+            <a:off x="548640" y="6419088"/>
+            <a:ext cx="8229600" cy="237744"/>
+          </a:xfrm>
+          <a:prstGeom prst="rect">
+            <a:avLst/>
+          </a:prstGeom>
+          <a:noFill/>
+        </p:spPr>
+        <p:txBody>
+          <a:bodyPr wrap="square" lIns="0" rIns="0" tIns="0" bIns="0" anchor="t">
+            <a:spAutoFit/>
+          </a:bodyPr>
+          <a:lstStyle/>
+          <a:p>
+            <a:pPr algn="l"/>
+            <a:r>
+              <a:rPr sz="900" b="0" i="0">
+                <a:solidFill>
+                  <a:srgbClr val="A6AEB6"/>
+                </a:solidFill>
+                <a:latin typeface="Calibri"/>
+              </a:rPr>
+              <a:t>Device Identifier  ·  Progress Report  ·  September 2026</a:t>
+            </a:r>
+          </a:p>
+        </p:txBody>
+      </p:sp>
+      <p:sp>
+        <p:nvSpPr>
+          <p:cNvPr id="35" name="TextBox 34"/>
+          <p:cNvSpPr txBox="1"/>
+          <p:nvPr/>
+        </p:nvSpPr>
+        <p:spPr>
+          <a:xfrm>
+            <a:off x="10698480" y="6419088"/>
+            <a:ext cx="941832" cy="237744"/>
+          </a:xfrm>
+          <a:prstGeom prst="rect">
+            <a:avLst/>
+          </a:prstGeom>
+          <a:noFill/>
+        </p:spPr>
+        <p:txBody>
+          <a:bodyPr wrap="square" lIns="0" rIns="0" tIns="0" bIns="0" anchor="t">
+            <a:spAutoFit/>
+          </a:bodyPr>
+          <a:lstStyle/>
+          <a:p>
+            <a:pPr algn="r"/>
+            <a:r>
+              <a:rPr sz="900" b="0" i="0">
+                <a:solidFill>
+                  <a:srgbClr val="A6AEB6"/>
                 </a:solidFill>
                 <a:latin typeface="Calibri"/>
               </a:rPr>
@@ -13531,7 +16309,7 @@
                 </a:solidFill>
                 <a:latin typeface="Calibri"/>
               </a:rPr>
-              <a:t>Device Identifier  ·  Progress Report  ·  August 2026</a:t>
+              <a:t>Device Identifier  ·  Progress Report  ·  September 2026</a:t>
             </a:r>
           </a:p>
         </p:txBody>
@@ -14025,7 +16803,7 @@
                 </a:solidFill>
                 <a:latin typeface="Cambria"/>
               </a:rPr>
-              <a:t>Device Type Model</a:t>
+              <a:t>Device Type Lookup</a:t>
             </a:r>
           </a:p>
         </p:txBody>
@@ -14064,7 +16842,7 @@
                 </a:solidFill>
                 <a:latin typeface="Calibri"/>
               </a:rPr>
-              <a:t>A hybrid of SGD Classifier, TF-IDF similarity and a prefix dictionary covering 22 equipment classes.</a:t>
+              <a:t>A deterministic prefix dictionary — 92 tag prefixes covering 23 device types. A prefix either matches, or the device goes to review.</a:t>
             </a:r>
           </a:p>
         </p:txBody>
@@ -14884,7 +17662,7 @@
                 </a:solidFill>
                 <a:latin typeface="Calibri"/>
               </a:rPr>
-              <a:t>Engineer corrections update the model and reference data immediately, with no full retraining cycle.</a:t>
+              <a:t>An engineer correction updates the prefix dictionary at once. Section and cluster corrections queue for the next retrain.</a:t>
             </a:r>
           </a:p>
         </p:txBody>
@@ -14919,7 +17697,7 @@
                 </a:solidFill>
                 <a:latin typeface="Calibri"/>
               </a:rPr>
-              <a:t>Device Identifier  ·  Progress Report  ·  August 2026</a:t>
+              <a:t>Device Identifier  ·  Progress Report  ·  September 2026</a:t>
             </a:r>
           </a:p>
         </p:txBody>
@@ -15418,7 +18196,7 @@
                 </a:solidFill>
                 <a:latin typeface="Calibri"/>
               </a:rPr>
-              <a:t>SGD Classifier, TF-IDF similarity and a prefix dictionary.</a:t>
+              <a:t>Prefix dictionary lookup. Matched, or UNKNOWN.</a:t>
             </a:r>
           </a:p>
         </p:txBody>
@@ -16912,7 +19690,7 @@
                 </a:solidFill>
                 <a:latin typeface="Calibri"/>
               </a:rPr>
-              <a:t>Device Identifier  ·  Progress Report  ·  August 2026</a:t>
+              <a:t>Device Identifier  ·  Progress Report  ·  September 2026</a:t>
             </a:r>
           </a:p>
         </p:txBody>
@@ -17035,7 +19813,7 @@
                 </a:solidFill>
                 <a:latin typeface="Cambria"/>
               </a:rPr>
-              <a:t>Device Type — a ladder, not a single model</a:t>
+              <a:t>Device Type — a dictionary, not a model</a:t>
             </a:r>
           </a:p>
         </p:txBody>
@@ -17070,7 +19848,7 @@
                 </a:solidFill>
                 <a:latin typeface="Calibri"/>
               </a:rPr>
-              <a:t>Five sources are checked in strict priority order, and the first confident one wins.</a:t>
+              <a:t>One rule decides every device: the tag prefix is either in the reference table, or it is not.</a:t>
             </a:r>
           </a:p>
         </p:txBody>
@@ -17232,7 +20010,7 @@
                 </a:solidFill>
                 <a:latin typeface="Calibri"/>
               </a:rPr>
-              <a:t>Exact match in reference data</a:t>
+              <a:t>Clean the tag</a:t>
             </a:r>
           </a:p>
         </p:txBody>
@@ -17267,7 +20045,7 @@
                 </a:solidFill>
                 <a:latin typeface="Calibri"/>
               </a:rPr>
-              <a:t>Confidence 1.00</a:t>
+              <a:t>Uppercase, trim, normalise</a:t>
             </a:r>
           </a:p>
         </p:txBody>
@@ -17429,7 +20207,7 @@
                 </a:solidFill>
                 <a:latin typeface="Calibri"/>
               </a:rPr>
-              <a:t>SGD Classifier confidence ≥ 0.60</a:t>
+              <a:t>Extract the leading letter prefix</a:t>
             </a:r>
           </a:p>
         </p:txBody>
@@ -17464,7 +20242,7 @@
                 </a:solidFill>
                 <a:latin typeface="Calibri"/>
               </a:rPr>
-              <a:t>SGD label</a:t>
+              <a:t>V001.21 → V</a:t>
             </a:r>
           </a:p>
         </p:txBody>
@@ -17626,7 +20404,7 @@
                 </a:solidFill>
                 <a:latin typeface="Calibri"/>
               </a:rPr>
-              <a:t>Composite similarity ≥ 0.60</a:t>
+              <a:t>Look the prefix up in the dictionary</a:t>
             </a:r>
           </a:p>
         </p:txBody>
@@ -17661,7 +20439,7 @@
                 </a:solidFill>
                 <a:latin typeface="Calibri"/>
               </a:rPr>
-              <a:t>Nearest-neighbour label</a:t>
+              <a:t>92 prefixes  ·  23 device types</a:t>
             </a:r>
           </a:p>
         </p:txBody>
@@ -17823,7 +20601,7 @@
                 </a:solidFill>
                 <a:latin typeface="Calibri"/>
               </a:rPr>
-              <a:t>Prefix dictionary match</a:t>
+              <a:t>Prefix found</a:t>
             </a:r>
           </a:p>
         </p:txBody>
@@ -17858,7 +20636,7 @@
                 </a:solidFill>
                 <a:latin typeface="Calibri"/>
               </a:rPr>
-              <a:t>Dictionary label · 22 classes</a:t>
+              <a:t>Device type · confidence 1.00</a:t>
             </a:r>
           </a:p>
         </p:txBody>
@@ -18020,7 +20798,7 @@
                 </a:solidFill>
                 <a:latin typeface="Calibri"/>
               </a:rPr>
-              <a:t>None of the above</a:t>
+              <a:t>Prefix not found</a:t>
             </a:r>
           </a:p>
         </p:txBody>
@@ -18055,7 +20833,7 @@
                 </a:solidFill>
                 <a:latin typeface="Calibri"/>
               </a:rPr>
-              <a:t>UNKNOWN → review queue</a:t>
+              <a:t>UNKNOWN · 0.00 → review queue</a:t>
             </a:r>
           </a:p>
         </p:txBody>
@@ -18094,7 +20872,7 @@
                 </a:solidFill>
                 <a:latin typeface="Calibri"/>
               </a:rPr>
-              <a:t>Nothing is ever silently guessed — an UNKNOWN carries its best candidates with it.</a:t>
+              <a:t>Nothing is ever guessed. A tag whose prefix is unrecognised goes to an engineer, never to a wrong class.</a:t>
             </a:r>
           </a:p>
         </p:txBody>
@@ -18175,7 +20953,7 @@
                 </a:solidFill>
                 <a:latin typeface="Calibri"/>
               </a:rPr>
-              <a:t>WHY A LADDER</a:t>
+              <a:t>WHY NO MODEL</a:t>
             </a:r>
           </a:p>
         </p:txBody>
@@ -18214,7 +20992,7 @@
                 </a:solidFill>
                 <a:latin typeface="Calibri"/>
               </a:rPr>
-              <a:t>Tag conventions differ between customers and change over time. A single classifier would fail silently on an unseen pattern; the ladder always falls back to something deterministic.</a:t>
+              <a:t>A classifier guesses on patterns it has never seen, and it guesses invisibly. The dictionary cannot: it is either right or it says UNKNOWN. An engineer can read it, edit it, and correct it permanently in one step.</a:t>
             </a:r>
           </a:p>
         </p:txBody>
@@ -18297,7 +21075,7 @@
                 </a:solidFill>
                 <a:latin typeface="Calibri"/>
               </a:rPr>
-              <a:t>COMPOSITE SIMILARITY</a:t>
+              <a:t>THE WHOLE RULE</a:t>
             </a:r>
           </a:p>
         </p:txBody>
@@ -18336,7 +21114,7 @@
                 </a:solidFill>
                 <a:latin typeface="Consolas"/>
               </a:rPr>
-              <a:t>0.65 × prefix score</a:t>
+              <a:t>prefix in dictionary</a:t>
             </a:r>
           </a:p>
           <a:p>
@@ -18352,7 +21130,7 @@
                 </a:solidFill>
                 <a:latin typeface="Consolas"/>
               </a:rPr>
-              <a:t>+ 0.35 × cosine similarity</a:t>
+              <a:t>→ 1.00, else UNKNOWN</a:t>
             </a:r>
           </a:p>
         </p:txBody>
@@ -18435,7 +21213,7 @@
                 </a:solidFill>
                 <a:latin typeface="Calibri"/>
               </a:rPr>
-              <a:t>TECHNIQUES USED</a:t>
+              <a:t>REMOVED ON PURPOSE</a:t>
             </a:r>
           </a:p>
         </p:txBody>
@@ -18506,7 +21284,7 @@
                 </a:solidFill>
                 <a:latin typeface="Calibri"/>
               </a:rPr>
-              <a:t>Cosine k-NN, k = 10</a:t>
+              <a:t>Cosine k-NN similarity</a:t>
             </a:r>
           </a:p>
           <a:p>
@@ -18522,7 +21300,7 @@
                 </a:solidFill>
                 <a:latin typeface="Calibri"/>
               </a:rPr>
-              <a:t>Prefix dictionary, 22 classes</a:t>
+              <a:t>Exact-match history lookup</a:t>
             </a:r>
           </a:p>
         </p:txBody>
@@ -18557,7 +21335,7 @@
                 </a:solidFill>
                 <a:latin typeface="Calibri"/>
               </a:rPr>
-              <a:t>Device Identifier  ·  Progress Report  ·  August 2026</a:t>
+              <a:t>Device Identifier  ·  Progress Report  ·  September 2026</a:t>
             </a:r>
           </a:p>
         </p:txBody>
@@ -20175,7 +22953,7 @@
                 </a:solidFill>
                 <a:latin typeface="Calibri"/>
               </a:rPr>
-              <a:t>Device Identifier  ·  Progress Report  ·  August 2026</a:t>
+              <a:t>Device Identifier  ·  Progress Report  ·  September 2026</a:t>
             </a:r>
           </a:p>
         </p:txBody>
@@ -21292,7 +24070,7 @@
                 </a:solidFill>
                 <a:latin typeface="Calibri"/>
               </a:rPr>
-              <a:t>Device Identifier  ·  Progress Report  ·  August 2026</a:t>
+              <a:t>Device Identifier  ·  Progress Report  ·  September 2026</a:t>
             </a:r>
           </a:p>
         </p:txBody>
@@ -21572,7 +24350,7 @@
                 </a:solidFill>
                 <a:latin typeface="Cambria"/>
               </a:rPr>
-              <a:t>SGD Classifier</a:t>
+              <a:t>Chained prediction</a:t>
             </a:r>
           </a:p>
         </p:txBody>
@@ -21611,7 +24389,7 @@
                 </a:solidFill>
                 <a:latin typeface="Calibri"/>
               </a:rPr>
-              <a:t>Device type. Chosen for partial_fit — it can learn from a single correction without a full retrain.</a:t>
+              <a:t>Device type. Deterministic and fully readable — an engineer edits it directly and the change applies on the next run.</a:t>
             </a:r>
           </a:p>
         </p:txBody>
@@ -21720,7 +24498,7 @@
                 </a:solidFill>
                 <a:latin typeface="Cambria"/>
               </a:rPr>
-              <a:t>TF-IDF + cosine k-NN</a:t>
+              <a:t>k-NN distance test</a:t>
             </a:r>
           </a:p>
         </p:txBody>
@@ -21759,7 +24537,7 @@
                 </a:solidFill>
                 <a:latin typeface="Calibri"/>
               </a:rPr>
-              <a:t>Similarity fallback for tags the classifier has never seen before.</a:t>
+              <a:t>Out-of-distribution check that cuts section and cluster confidence for unfamiliar tags.</a:t>
             </a:r>
           </a:p>
         </p:txBody>
@@ -21833,7 +24611,7 @@
                 </a:solidFill>
                 <a:latin typeface="Calibri"/>
               </a:rPr>
-              <a:t>Deterministic, fully explainable base layer an engineer can read and edit.</a:t>
+              <a:t>The predicted section is fed to the cluster model as an input feature rather than predicted independently.</a:t>
             </a:r>
           </a:p>
         </p:txBody>
@@ -22247,7 +25025,7 @@
                 </a:solidFill>
                 <a:latin typeface="Cambria"/>
               </a:rPr>
-              <a:t>LSTM / neural network</a:t>
+              <a:t>SGD Classifier + TF-IDF</a:t>
             </a:r>
           </a:p>
         </p:txBody>
@@ -22286,7 +25064,7 @@
                 </a:solidFill>
                 <a:latin typeface="Calibri"/>
               </a:rPr>
-              <a:t>Trialled on tag sequences; complexity not justified by the gain.</a:t>
+              <a:t>Ran device type until this cycle. Removed once the dictionary proved as accurate and far easier to explain.</a:t>
             </a:r>
           </a:p>
         </p:txBody>
@@ -22321,7 +25099,7 @@
                 </a:solidFill>
                 <a:latin typeface="Calibri"/>
               </a:rPr>
-              <a:t>Device Identifier  ·  Progress Report  ·  August 2026</a:t>
+              <a:t>Device Identifier  ·  Progress Report  ·  September 2026</a:t>
             </a:r>
           </a:p>
         </p:txBody>
@@ -22810,7 +25588,7 @@
                 </a:solidFill>
                 <a:latin typeface="Calibri"/>
               </a:rPr>
-              <a:t>SQL Server access and Python process invocation</a:t>
+              <a:t>SQL Server access, and predictions over HTTP or via local Python</a:t>
             </a:r>
           </a:p>
         </p:txBody>
@@ -22893,7 +25671,7 @@
                 </a:solidFill>
                 <a:latin typeface="Cambria"/>
               </a:rPr>
-              <a:t>Python models</a:t>
+              <a:t>ML service</a:t>
             </a:r>
           </a:p>
         </p:txBody>
@@ -22932,7 +25710,7 @@
                 </a:solidFill>
                 <a:latin typeface="Calibri"/>
               </a:rPr>
-              <a:t>predict_equipment.py, predict_sectioncluster.py, .pkl files</a:t>
+              <a:t>FastAPI on 128.100.8.213:8000 — models loaded once, held in memory</a:t>
             </a:r>
           </a:p>
         </p:txBody>
@@ -23087,7 +25865,7 @@
                 </a:solidFill>
                 <a:latin typeface="Calibri"/>
               </a:rPr>
-              <a:t>Each layer only depends on the one beneath it.</a:t>
+              <a:t>Each layer depends only on the one beneath it.</a:t>
             </a:r>
           </a:p>
         </p:txBody>
@@ -23168,7 +25946,7 @@
                 </a:solidFill>
                 <a:latin typeface="Calibri"/>
               </a:rPr>
-              <a:t>ONE CALL RUNS EVERYTHING</a:t>
+              <a:t>ONE CALL — WITH A CAVEAT</a:t>
             </a:r>
           </a:p>
         </p:txBody>
@@ -23393,7 +26171,7 @@
                 </a:solidFill>
                 <a:latin typeface="Calibri"/>
               </a:rPr>
-              <a:t>Python 3.13  ·  SQL Server</a:t>
+              <a:t>SQL Server  ·  ML service reachable</a:t>
             </a:r>
           </a:p>
         </p:txBody>
@@ -23547,7 +26325,7 @@
                 </a:solidFill>
                 <a:latin typeface="Calibri"/>
               </a:rPr>
-              <a:t>API reference and quick guide</a:t>
+              <a:t>API reference, quick guide, launcher</a:t>
             </a:r>
           </a:p>
         </p:txBody>
@@ -23582,7 +26360,7 @@
                 </a:solidFill>
                 <a:latin typeface="Calibri"/>
               </a:rPr>
-              <a:t>Device Identifier  ·  Progress Report  ·  August 2026</a:t>
+              <a:t>Device Identifier  ·  Progress Report  ·  September 2026</a:t>
             </a:r>
           </a:p>
         </p:txBody>

--- a/handoff/DeviceIdentifierProgress.pptx
+++ b/handoff/DeviceIdentifierProgress.pptx
@@ -7788,18 +7788,15 @@
       </p:grpSpPr>
       <p:pic>
         <p:nvPicPr>
-          <p:cNvPr id="2" name="Picture 1">
+          <p:cNvPr id="6" name="Picture 5">
             <a:extLst>
               <a:ext uri="{FF2B5EF4-FFF2-40B4-BE49-F238E27FC236}">
-                <a16:creationId xmlns:a16="http://schemas.microsoft.com/office/drawing/2014/main" id="{3B2328C8-9BCF-E4E4-591C-F0D9C2A74396}"/>
-              </a:ext>
-              <a:ext uri="{C183D7F6-B498-43B3-948B-1728B52AA6E4}">
-                <adec:decorative xmlns:adec="http://schemas.microsoft.com/office/drawing/2017/decorative" val="1"/>
+                <a16:creationId xmlns:a16="http://schemas.microsoft.com/office/drawing/2014/main" id="{9AF8E737-0264-407F-B960-B302C0A7065D}"/>
               </a:ext>
             </a:extLst>
           </p:cNvPr>
           <p:cNvPicPr>
-            <a:picLocks noGrp="1" noRot="1" noChangeAspect="1" noMove="1" noResize="1" noEditPoints="1" noAdjustHandles="1" noChangeArrowheads="1" noChangeShapeType="1" noCrop="1"/>
+            <a:picLocks noChangeAspect="1"/>
           </p:cNvPicPr>
           <p:nvPr/>
         </p:nvPicPr>
@@ -7811,364 +7808,14 @@
         </p:blipFill>
         <p:spPr>
           <a:xfrm>
-            <a:off x="2844741" y="321048"/>
-            <a:ext cx="7960562" cy="5713880"/>
+            <a:off x="1464733" y="651660"/>
+            <a:ext cx="9635334" cy="5393539"/>
           </a:xfrm>
           <a:prstGeom prst="rect">
             <a:avLst/>
           </a:prstGeom>
         </p:spPr>
       </p:pic>
-      <p:sp>
-        <p:nvSpPr>
-          <p:cNvPr id="5" name="Rectangle 4">
-            <a:extLst>
-              <a:ext uri="{FF2B5EF4-FFF2-40B4-BE49-F238E27FC236}">
-                <a16:creationId xmlns:a16="http://schemas.microsoft.com/office/drawing/2014/main" id="{024E87D5-9CF2-B963-723E-B5B79C4EE249}"/>
-              </a:ext>
-            </a:extLst>
-          </p:cNvPr>
-          <p:cNvSpPr>
-            <a:spLocks noGrp="1" noRot="1" noMove="1" noResize="1" noEditPoints="1" noAdjustHandles="1" noChangeArrowheads="1" noChangeShapeType="1"/>
-          </p:cNvSpPr>
-          <p:nvPr/>
-        </p:nvSpPr>
-        <p:spPr>
-          <a:xfrm>
-            <a:off x="7428812" y="4056596"/>
-            <a:ext cx="3836894" cy="1687046"/>
-          </a:xfrm>
-          <a:prstGeom prst="rect">
-            <a:avLst/>
-          </a:prstGeom>
-          <a:solidFill>
-            <a:schemeClr val="bg1"/>
-          </a:solidFill>
-          <a:ln>
-            <a:noFill/>
-          </a:ln>
-        </p:spPr>
-        <p:style>
-          <a:lnRef idx="2">
-            <a:schemeClr val="accent1">
-              <a:shade val="15000"/>
-            </a:schemeClr>
-          </a:lnRef>
-          <a:fillRef idx="1">
-            <a:schemeClr val="accent1"/>
-          </a:fillRef>
-          <a:effectRef idx="0">
-            <a:schemeClr val="accent1"/>
-          </a:effectRef>
-          <a:fontRef idx="minor">
-            <a:schemeClr val="lt1"/>
-          </a:fontRef>
-        </p:style>
-        <p:txBody>
-          <a:bodyPr rtlCol="0" anchor="ctr"/>
-          <a:lstStyle/>
-          <a:p>
-            <a:pPr algn="ctr"/>
-            <a:endParaRPr lang="en-MY"/>
-          </a:p>
-        </p:txBody>
-      </p:sp>
-      <p:sp>
-        <p:nvSpPr>
-          <p:cNvPr id="4" name="Rectangle 3">
-            <a:extLst>
-              <a:ext uri="{FF2B5EF4-FFF2-40B4-BE49-F238E27FC236}">
-                <a16:creationId xmlns:a16="http://schemas.microsoft.com/office/drawing/2014/main" id="{FEBF4457-938C-1395-B6DD-5D0BF8AD875F}"/>
-              </a:ext>
-            </a:extLst>
-          </p:cNvPr>
-          <p:cNvSpPr/>
-          <p:nvPr/>
-        </p:nvSpPr>
-        <p:spPr>
-          <a:xfrm>
-            <a:off x="3788876" y="3934878"/>
-            <a:ext cx="1294111" cy="338554"/>
-          </a:xfrm>
-          <a:prstGeom prst="rect">
-            <a:avLst/>
-          </a:prstGeom>
-          <a:solidFill>
-            <a:schemeClr val="bg1"/>
-          </a:solidFill>
-        </p:spPr>
-        <p:txBody>
-          <a:bodyPr wrap="square" lIns="91440" tIns="45720" rIns="91440" bIns="45720">
-            <a:spAutoFit/>
-          </a:bodyPr>
-          <a:lstStyle/>
-          <a:p>
-            <a:pPr algn="ctr"/>
-            <a:r>
-              <a:rPr lang="en-US" sz="1600" dirty="0">
-                <a:ln w="0"/>
-                <a:effectLst>
-                  <a:outerShdw blurRad="38100" dist="19050" dir="2700000" algn="tl" rotWithShape="0">
-                    <a:schemeClr val="dk1">
-                      <a:alpha val="40000"/>
-                    </a:schemeClr>
-                  </a:outerShdw>
-                </a:effectLst>
-              </a:rPr>
-              <a:t>ML service</a:t>
-            </a:r>
-            <a:endParaRPr lang="en-US" sz="1600" b="0" cap="none" spc="0" dirty="0">
-              <a:ln w="0"/>
-              <a:solidFill>
-                <a:schemeClr val="tx1"/>
-              </a:solidFill>
-              <a:effectLst>
-                <a:outerShdw blurRad="38100" dist="19050" dir="2700000" algn="tl" rotWithShape="0">
-                  <a:schemeClr val="dk1">
-                    <a:alpha val="40000"/>
-                  </a:schemeClr>
-                </a:outerShdw>
-              </a:effectLst>
-            </a:endParaRPr>
-          </a:p>
-        </p:txBody>
-      </p:sp>
-      <p:sp>
-        <p:nvSpPr>
-          <p:cNvPr id="7" name="Rectangle 6">
-            <a:extLst>
-              <a:ext uri="{FF2B5EF4-FFF2-40B4-BE49-F238E27FC236}">
-                <a16:creationId xmlns:a16="http://schemas.microsoft.com/office/drawing/2014/main" id="{CB1DCC46-DF47-2BDC-F6A7-47F902B0FF08}"/>
-              </a:ext>
-            </a:extLst>
-          </p:cNvPr>
-          <p:cNvSpPr/>
-          <p:nvPr/>
-        </p:nvSpPr>
-        <p:spPr>
-          <a:xfrm>
-            <a:off x="2961233" y="1577787"/>
-            <a:ext cx="4551192" cy="4195483"/>
-          </a:xfrm>
-          <a:prstGeom prst="rect">
-            <a:avLst/>
-          </a:prstGeom>
-          <a:noFill/>
-        </p:spPr>
-        <p:style>
-          <a:lnRef idx="2">
-            <a:schemeClr val="accent1">
-              <a:shade val="15000"/>
-            </a:schemeClr>
-          </a:lnRef>
-          <a:fillRef idx="1">
-            <a:schemeClr val="accent1"/>
-          </a:fillRef>
-          <a:effectRef idx="0">
-            <a:schemeClr val="accent1"/>
-          </a:effectRef>
-          <a:fontRef idx="minor">
-            <a:schemeClr val="lt1"/>
-          </a:fontRef>
-        </p:style>
-        <p:txBody>
-          <a:bodyPr rtlCol="0" anchor="ctr"/>
-          <a:lstStyle/>
-          <a:p>
-            <a:pPr algn="ctr"/>
-            <a:endParaRPr lang="en-MY"/>
-          </a:p>
-        </p:txBody>
-      </p:sp>
-      <p:sp>
-        <p:nvSpPr>
-          <p:cNvPr id="9" name="Rectangle 8">
-            <a:extLst>
-              <a:ext uri="{FF2B5EF4-FFF2-40B4-BE49-F238E27FC236}">
-                <a16:creationId xmlns:a16="http://schemas.microsoft.com/office/drawing/2014/main" id="{63F89C72-AC29-D555-2211-02C23C26692D}"/>
-              </a:ext>
-            </a:extLst>
-          </p:cNvPr>
-          <p:cNvSpPr/>
-          <p:nvPr/>
-        </p:nvSpPr>
-        <p:spPr>
-          <a:xfrm>
-            <a:off x="3797842" y="1750597"/>
-            <a:ext cx="1294111" cy="338554"/>
-          </a:xfrm>
-          <a:prstGeom prst="rect">
-            <a:avLst/>
-          </a:prstGeom>
-          <a:solidFill>
-            <a:schemeClr val="bg1"/>
-          </a:solidFill>
-        </p:spPr>
-        <p:txBody>
-          <a:bodyPr wrap="square" lIns="91440" tIns="45720" rIns="91440" bIns="45720">
-            <a:spAutoFit/>
-          </a:bodyPr>
-          <a:lstStyle/>
-          <a:p>
-            <a:pPr algn="ctr"/>
-            <a:r>
-              <a:rPr lang="en-US" sz="1600" dirty="0">
-                <a:ln w="0"/>
-                <a:effectLst>
-                  <a:outerShdw blurRad="38100" dist="19050" dir="2700000" algn="tl" rotWithShape="0">
-                    <a:schemeClr val="dk1">
-                      <a:alpha val="40000"/>
-                    </a:schemeClr>
-                  </a:outerShdw>
-                </a:effectLst>
-              </a:rPr>
-              <a:t>API service</a:t>
-            </a:r>
-            <a:endParaRPr lang="en-US" sz="1600" b="0" cap="none" spc="0" dirty="0">
-              <a:ln w="0"/>
-              <a:solidFill>
-                <a:schemeClr val="tx1"/>
-              </a:solidFill>
-              <a:effectLst>
-                <a:outerShdw blurRad="38100" dist="19050" dir="2700000" algn="tl" rotWithShape="0">
-                  <a:schemeClr val="dk1">
-                    <a:alpha val="40000"/>
-                  </a:schemeClr>
-                </a:outerShdw>
-              </a:effectLst>
-            </a:endParaRPr>
-          </a:p>
-        </p:txBody>
-      </p:sp>
-      <p:sp>
-        <p:nvSpPr>
-          <p:cNvPr id="12" name="Rectangle 11">
-            <a:extLst>
-              <a:ext uri="{FF2B5EF4-FFF2-40B4-BE49-F238E27FC236}">
-                <a16:creationId xmlns:a16="http://schemas.microsoft.com/office/drawing/2014/main" id="{2E3A9353-9505-04E4-3412-00C870BE1CE6}"/>
-              </a:ext>
-            </a:extLst>
-          </p:cNvPr>
-          <p:cNvSpPr/>
-          <p:nvPr/>
-        </p:nvSpPr>
-        <p:spPr>
-          <a:xfrm>
-            <a:off x="7763435" y="1325096"/>
-            <a:ext cx="2402541" cy="2591852"/>
-          </a:xfrm>
-          <a:prstGeom prst="rect">
-            <a:avLst/>
-          </a:prstGeom>
-          <a:noFill/>
-        </p:spPr>
-        <p:style>
-          <a:lnRef idx="2">
-            <a:schemeClr val="accent1">
-              <a:shade val="15000"/>
-            </a:schemeClr>
-          </a:lnRef>
-          <a:fillRef idx="1">
-            <a:schemeClr val="accent1"/>
-          </a:fillRef>
-          <a:effectRef idx="0">
-            <a:schemeClr val="accent1"/>
-          </a:effectRef>
-          <a:fontRef idx="minor">
-            <a:schemeClr val="lt1"/>
-          </a:fontRef>
-        </p:style>
-        <p:txBody>
-          <a:bodyPr rtlCol="0" anchor="ctr"/>
-          <a:lstStyle/>
-          <a:p>
-            <a:pPr algn="ctr"/>
-            <a:endParaRPr lang="en-MY"/>
-          </a:p>
-        </p:txBody>
-      </p:sp>
-      <p:sp>
-        <p:nvSpPr>
-          <p:cNvPr id="10" name="TextBox 9">
-            <a:extLst>
-              <a:ext uri="{FF2B5EF4-FFF2-40B4-BE49-F238E27FC236}">
-                <a16:creationId xmlns:a16="http://schemas.microsoft.com/office/drawing/2014/main" id="{204E8AF6-F6C9-6520-F632-C0555A5E13AB}"/>
-              </a:ext>
-            </a:extLst>
-          </p:cNvPr>
-          <p:cNvSpPr txBox="1"/>
-          <p:nvPr/>
-        </p:nvSpPr>
-        <p:spPr>
-          <a:xfrm>
-            <a:off x="8127724" y="1063438"/>
-            <a:ext cx="1650581" cy="369332"/>
-          </a:xfrm>
-          <a:prstGeom prst="rect">
-            <a:avLst/>
-          </a:prstGeom>
-          <a:solidFill>
-            <a:schemeClr val="accent1">
-              <a:lumMod val="20000"/>
-              <a:lumOff val="80000"/>
-            </a:schemeClr>
-          </a:solidFill>
-        </p:spPr>
-        <p:txBody>
-          <a:bodyPr wrap="none" rtlCol="0">
-            <a:spAutoFit/>
-          </a:bodyPr>
-          <a:lstStyle/>
-          <a:p>
-            <a:pPr algn="ctr"/>
-            <a:r>
-              <a:rPr lang="en-MY" b="1" dirty="0"/>
-              <a:t>Neptune Server</a:t>
-            </a:r>
-          </a:p>
-        </p:txBody>
-      </p:sp>
-      <p:sp>
-        <p:nvSpPr>
-          <p:cNvPr id="14" name="TextBox 13">
-            <a:extLst>
-              <a:ext uri="{FF2B5EF4-FFF2-40B4-BE49-F238E27FC236}">
-                <a16:creationId xmlns:a16="http://schemas.microsoft.com/office/drawing/2014/main" id="{4BEA2E67-67FC-8DC1-B6A8-300FA5BA819C}"/>
-              </a:ext>
-            </a:extLst>
-          </p:cNvPr>
-          <p:cNvSpPr txBox="1"/>
-          <p:nvPr/>
-        </p:nvSpPr>
-        <p:spPr>
-          <a:xfrm>
-            <a:off x="2682637" y="1294860"/>
-            <a:ext cx="1815690" cy="369332"/>
-          </a:xfrm>
-          <a:prstGeom prst="rect">
-            <a:avLst/>
-          </a:prstGeom>
-          <a:solidFill>
-            <a:schemeClr val="accent1">
-              <a:lumMod val="20000"/>
-              <a:lumOff val="80000"/>
-            </a:schemeClr>
-          </a:solidFill>
-        </p:spPr>
-        <p:txBody>
-          <a:bodyPr wrap="none" rtlCol="0">
-            <a:spAutoFit/>
-          </a:bodyPr>
-          <a:lstStyle/>
-          <a:p>
-            <a:pPr algn="ctr"/>
-            <a:r>
-              <a:rPr lang="en-MY" b="1" dirty="0"/>
-              <a:t>SSSBPD01 Server</a:t>
-            </a:r>
-          </a:p>
-        </p:txBody>
-      </p:sp>
     </p:spTree>
     <p:extLst>
       <p:ext uri="{BB962C8B-B14F-4D97-AF65-F5344CB8AC3E}">

--- a/handoff/DeviceIdentifierProgress.pptx
+++ b/handoff/DeviceIdentifierProgress.pptx
@@ -16093,7 +16093,7 @@
                 </a:solidFill>
                 <a:latin typeface="Cambria"/>
               </a:rPr>
-              <a:t>Not yet a Windows service</a:t>
+              <a:t>Reboot test still outstanding</a:t>
             </a:r>
           </a:p>
         </p:txBody>
@@ -16132,7 +16132,7 @@
                 </a:solidFill>
                 <a:latin typeface="Calibri"/>
               </a:rPr>
-              <a:t>It runs in a PowerShell window on the server. Closing it, or a reboot, stops every prediction. NSSM is the last step.</a:t>
+              <a:t>Now registered with NSSM and set to start at boot. The server has not restarted since, so boot-survival is configured but unproven.</a:t>
             </a:r>
           </a:p>
         </p:txBody>

--- a/handoff/DeviceIdentifierProgress.pptx
+++ b/handoff/DeviceIdentifierProgress.pptx
@@ -13,14 +13,14 @@
     <p:sldId id="260" r:id="rId7"/>
     <p:sldId id="261" r:id="rId8"/>
     <p:sldId id="262" r:id="rId9"/>
-    <p:sldId id="263" r:id="rId10"/>
-    <p:sldId id="264" r:id="rId11"/>
-    <p:sldId id="265" r:id="rId12"/>
-    <p:sldId id="267" r:id="rId13"/>
-    <p:sldId id="416" r:id="rId14"/>
-    <p:sldId id="276" r:id="rId15"/>
-    <p:sldId id="272" r:id="rId16"/>
-    <p:sldId id="274" r:id="rId17"/>
+    <p:sldId id="264" r:id="rId10"/>
+    <p:sldId id="265" r:id="rId11"/>
+    <p:sldId id="267" r:id="rId12"/>
+    <p:sldId id="416" r:id="rId13"/>
+    <p:sldId id="276" r:id="rId14"/>
+    <p:sldId id="272" r:id="rId15"/>
+    <p:sldId id="274" r:id="rId16"/>
+    <p:sldId id="417" r:id="rId17"/>
     <p:sldId id="266" r:id="rId18"/>
     <p:sldId id="268" r:id="rId19"/>
     <p:sldId id="269" r:id="rId20"/>
@@ -28,7 +28,8 @@
     <p:sldId id="277" r:id="rId22"/>
     <p:sldId id="280" r:id="rId23"/>
     <p:sldId id="281" r:id="rId24"/>
-    <p:sldId id="271" r:id="rId25"/>
+    <p:sldId id="263" r:id="rId25"/>
+    <p:sldId id="271" r:id="rId26"/>
   </p:sldIdLst>
   <p:sldSz cx="12192000" cy="6858000"/>
   <p:notesSz cx="6858000" cy="9144000"/>
@@ -325,7 +326,7 @@
           <a:p>
             <a:fld id="{5BCAD085-E8A6-8845-BD4E-CB4CCA059FC4}" type="datetimeFigureOut">
               <a:rPr lang="en-US" smtClean="0"/>
-              <a:t>9/1/2026</a:t>
+              <a:t>9/2/2026</a:t>
             </a:fld>
             <a:endParaRPr lang="en-US"/>
           </a:p>
@@ -493,7 +494,7 @@
           <a:p>
             <a:fld id="{5BCAD085-E8A6-8845-BD4E-CB4CCA059FC4}" type="datetimeFigureOut">
               <a:rPr lang="en-US" smtClean="0"/>
-              <a:t>9/1/2026</a:t>
+              <a:t>9/2/2026</a:t>
             </a:fld>
             <a:endParaRPr lang="en-US"/>
           </a:p>
@@ -671,7 +672,7 @@
           <a:p>
             <a:fld id="{5BCAD085-E8A6-8845-BD4E-CB4CCA059FC4}" type="datetimeFigureOut">
               <a:rPr lang="en-US" smtClean="0"/>
-              <a:t>9/1/2026</a:t>
+              <a:t>9/2/2026</a:t>
             </a:fld>
             <a:endParaRPr lang="en-US"/>
           </a:p>
@@ -876,7 +877,7 @@
           <a:p>
             <a:fld id="{1CD01395-AC05-405C-BAB9-E5D2B9FDBB40}" type="datetimeFigureOut">
               <a:rPr lang="en-MY" smtClean="0"/>
-              <a:t>1/9/2026</a:t>
+              <a:t>2/9/2026</a:t>
             </a:fld>
             <a:endParaRPr lang="en-MY"/>
           </a:p>
@@ -1044,7 +1045,7 @@
           <a:p>
             <a:fld id="{5BCAD085-E8A6-8845-BD4E-CB4CCA059FC4}" type="datetimeFigureOut">
               <a:rPr lang="en-US" smtClean="0"/>
-              <a:t>9/1/2026</a:t>
+              <a:t>9/2/2026</a:t>
             </a:fld>
             <a:endParaRPr lang="en-US"/>
           </a:p>
@@ -1289,7 +1290,7 @@
           <a:p>
             <a:fld id="{5BCAD085-E8A6-8845-BD4E-CB4CCA059FC4}" type="datetimeFigureOut">
               <a:rPr lang="en-US" smtClean="0"/>
-              <a:t>9/1/2026</a:t>
+              <a:t>9/2/2026</a:t>
             </a:fld>
             <a:endParaRPr lang="en-US"/>
           </a:p>
@@ -1574,7 +1575,7 @@
           <a:p>
             <a:fld id="{5BCAD085-E8A6-8845-BD4E-CB4CCA059FC4}" type="datetimeFigureOut">
               <a:rPr lang="en-US" smtClean="0"/>
-              <a:t>9/1/2026</a:t>
+              <a:t>9/2/2026</a:t>
             </a:fld>
             <a:endParaRPr lang="en-US"/>
           </a:p>
@@ -1993,7 +1994,7 @@
           <a:p>
             <a:fld id="{5BCAD085-E8A6-8845-BD4E-CB4CCA059FC4}" type="datetimeFigureOut">
               <a:rPr lang="en-US" smtClean="0"/>
-              <a:t>9/1/2026</a:t>
+              <a:t>9/2/2026</a:t>
             </a:fld>
             <a:endParaRPr lang="en-US"/>
           </a:p>
@@ -2110,7 +2111,7 @@
           <a:p>
             <a:fld id="{5BCAD085-E8A6-8845-BD4E-CB4CCA059FC4}" type="datetimeFigureOut">
               <a:rPr lang="en-US" smtClean="0"/>
-              <a:t>9/1/2026</a:t>
+              <a:t>9/2/2026</a:t>
             </a:fld>
             <a:endParaRPr lang="en-US"/>
           </a:p>
@@ -2205,7 +2206,7 @@
           <a:p>
             <a:fld id="{5BCAD085-E8A6-8845-BD4E-CB4CCA059FC4}" type="datetimeFigureOut">
               <a:rPr lang="en-US" smtClean="0"/>
-              <a:t>9/1/2026</a:t>
+              <a:t>9/2/2026</a:t>
             </a:fld>
             <a:endParaRPr lang="en-US"/>
           </a:p>
@@ -2480,7 +2481,7 @@
           <a:p>
             <a:fld id="{5BCAD085-E8A6-8845-BD4E-CB4CCA059FC4}" type="datetimeFigureOut">
               <a:rPr lang="en-US" smtClean="0"/>
-              <a:t>9/1/2026</a:t>
+              <a:t>9/2/2026</a:t>
             </a:fld>
             <a:endParaRPr lang="en-US"/>
           </a:p>
@@ -2732,7 +2733,7 @@
           <a:p>
             <a:fld id="{5BCAD085-E8A6-8845-BD4E-CB4CCA059FC4}" type="datetimeFigureOut">
               <a:rPr lang="en-US" smtClean="0"/>
-              <a:t>9/1/2026</a:t>
+              <a:t>9/2/2026</a:t>
             </a:fld>
             <a:endParaRPr lang="en-US"/>
           </a:p>
@@ -2943,7 +2944,7 @@
           <a:p>
             <a:fld id="{5BCAD085-E8A6-8845-BD4E-CB4CCA059FC4}" type="datetimeFigureOut">
               <a:rPr lang="en-US" smtClean="0"/>
-              <a:t>9/1/2026</a:t>
+              <a:t>9/2/2026</a:t>
             </a:fld>
             <a:endParaRPr lang="en-US"/>
           </a:p>
@@ -3378,56 +3379,6 @@
       </p:sp>
       <p:sp>
         <p:nvSpPr>
-          <p:cNvPr id="4" name="TextBox 3">
-            <a:extLst>
-              <a:ext uri="{FF2B5EF4-FFF2-40B4-BE49-F238E27FC236}">
-                <a16:creationId xmlns:a16="http://schemas.microsoft.com/office/drawing/2014/main" id="{8132D0E2-853E-03AA-477D-10599704AB8E}"/>
-              </a:ext>
-            </a:extLst>
-          </p:cNvPr>
-          <p:cNvSpPr txBox="1"/>
-          <p:nvPr/>
-        </p:nvSpPr>
-        <p:spPr>
-          <a:xfrm>
-            <a:off x="3437466" y="3359204"/>
-            <a:ext cx="5642355" cy="738664"/>
-          </a:xfrm>
-          <a:prstGeom prst="rect">
-            <a:avLst/>
-          </a:prstGeom>
-          <a:noFill/>
-        </p:spPr>
-        <p:txBody>
-          <a:bodyPr wrap="square" lIns="0" tIns="0" rIns="0" bIns="0" anchor="t">
-            <a:spAutoFit/>
-          </a:bodyPr>
-          <a:lstStyle/>
-          <a:p>
-            <a:pPr algn="ctr"/>
-            <a:r>
-              <a:rPr lang="en-MY" sz="2400" b="0" i="0" dirty="0">
-                <a:latin typeface="Calibri"/>
-              </a:rPr>
-              <a:t>Progress Update </a:t>
-            </a:r>
-          </a:p>
-          <a:p>
-            <a:pPr algn="ctr"/>
-            <a:r>
-              <a:rPr lang="en-MY" sz="2400" dirty="0">
-                <a:latin typeface="Calibri"/>
-              </a:rPr>
-              <a:t>[1st September 2026]</a:t>
-            </a:r>
-            <a:endParaRPr sz="2400" b="0" i="0" dirty="0">
-              <a:latin typeface="Calibri"/>
-            </a:endParaRPr>
-          </a:p>
-        </p:txBody>
-      </p:sp>
-      <p:sp>
-        <p:nvSpPr>
           <p:cNvPr id="17" name="TextBox 16">
             <a:extLst>
               <a:ext uri="{FF2B5EF4-FFF2-40B4-BE49-F238E27FC236}">
@@ -3464,6 +3415,95 @@
               </a:rPr>
               <a:t>Prepared by Siti Syaziyah  ·  Data Analyst Executive  ·  September 2026</a:t>
             </a:r>
+          </a:p>
+        </p:txBody>
+      </p:sp>
+      <p:sp>
+        <p:nvSpPr>
+          <p:cNvPr id="5" name="TextBox 4">
+            <a:extLst>
+              <a:ext uri="{FF2B5EF4-FFF2-40B4-BE49-F238E27FC236}">
+                <a16:creationId xmlns:a16="http://schemas.microsoft.com/office/drawing/2014/main" id="{5B1ED26C-9450-5CD4-779A-2690A9E0FBF1}"/>
+              </a:ext>
+            </a:extLst>
+          </p:cNvPr>
+          <p:cNvSpPr txBox="1"/>
+          <p:nvPr/>
+        </p:nvSpPr>
+        <p:spPr>
+          <a:xfrm>
+            <a:off x="685800" y="697160"/>
+            <a:ext cx="10789920" cy="184666"/>
+          </a:xfrm>
+          <a:prstGeom prst="rect">
+            <a:avLst/>
+          </a:prstGeom>
+          <a:noFill/>
+        </p:spPr>
+        <p:txBody>
+          <a:bodyPr wrap="square" lIns="0" tIns="0" rIns="0" bIns="0" anchor="t">
+            <a:spAutoFit/>
+          </a:bodyPr>
+          <a:lstStyle/>
+          <a:p>
+            <a:r>
+              <a:rPr lang="en-MY" sz="1200" b="1" i="0" dirty="0">
+                <a:solidFill>
+                  <a:srgbClr val="C46A24"/>
+                </a:solidFill>
+                <a:latin typeface="Consolas"/>
+              </a:rPr>
+              <a:t>XENXIBLE CREATOR - DATA ANALYTICS</a:t>
+            </a:r>
+            <a:r>
+              <a:rPr lang="en-US" sz="1200" b="1" i="0" dirty="0">
+                <a:solidFill>
+                  <a:srgbClr val="C46A24"/>
+                </a:solidFill>
+                <a:latin typeface="Consolas"/>
+              </a:rPr>
+              <a:t> . [1st SEPT 2026].</a:t>
+            </a:r>
+            <a:endParaRPr lang="en-MY" sz="1200" dirty="0"/>
+          </a:p>
+        </p:txBody>
+      </p:sp>
+      <p:sp>
+        <p:nvSpPr>
+          <p:cNvPr id="7" name="TextBox 6">
+            <a:extLst>
+              <a:ext uri="{FF2B5EF4-FFF2-40B4-BE49-F238E27FC236}">
+                <a16:creationId xmlns:a16="http://schemas.microsoft.com/office/drawing/2014/main" id="{A9EE9356-76E1-F09F-51CD-3787CD8A0955}"/>
+              </a:ext>
+            </a:extLst>
+          </p:cNvPr>
+          <p:cNvSpPr txBox="1"/>
+          <p:nvPr/>
+        </p:nvSpPr>
+        <p:spPr>
+          <a:xfrm>
+            <a:off x="4869656" y="3177374"/>
+            <a:ext cx="2452688" cy="246221"/>
+          </a:xfrm>
+          <a:prstGeom prst="rect">
+            <a:avLst/>
+          </a:prstGeom>
+          <a:noFill/>
+        </p:spPr>
+        <p:txBody>
+          <a:bodyPr wrap="square" lIns="0" tIns="0" rIns="0" bIns="0" anchor="t">
+            <a:spAutoFit/>
+          </a:bodyPr>
+          <a:lstStyle/>
+          <a:p>
+            <a:pPr algn="ctr"/>
+            <a:r>
+              <a:rPr lang="en-US" sz="1600" b="1" i="0" dirty="0">
+                <a:latin typeface="Consolas"/>
+              </a:rPr>
+              <a:t>Full Progress Update </a:t>
+            </a:r>
+            <a:endParaRPr lang="en-MY" sz="1600" dirty="0"/>
           </a:p>
         </p:txBody>
       </p:sp>
@@ -3527,7 +3567,7 @@
                 </a:solidFill>
                 <a:latin typeface="Calibri"/>
               </a:rPr>
-              <a:t>06  ·  DEPLOYMENT ARCHITECTURE</a:t>
+              <a:t>07  ·  HUMAN IN THE LOOP</a:t>
             </a:r>
           </a:p>
         </p:txBody>
@@ -3556,13 +3596,13 @@
           <a:p>
             <a:pPr algn="l"/>
             <a:r>
-              <a:rPr sz="2900" b="1" i="0">
+              <a:rPr sz="2900" b="1" i="0" dirty="0">
                 <a:solidFill>
                   <a:srgbClr val="1B2430"/>
                 </a:solidFill>
                 <a:latin typeface="Cambria"/>
               </a:rPr>
-              <a:t>How the models reach the product</a:t>
+              <a:t>The system improves as engineers correct it</a:t>
             </a:r>
           </a:p>
         </p:txBody>
@@ -3575,8 +3615,8 @@
         </p:nvSpPr>
         <p:spPr>
           <a:xfrm>
-            <a:off x="548640" y="1463040"/>
-            <a:ext cx="6035040" cy="713232"/>
+            <a:off x="548640" y="1371600"/>
+            <a:ext cx="2057400" cy="1234440"/>
           </a:xfrm>
           <a:prstGeom prst="roundRect">
             <a:avLst>
@@ -3618,14 +3658,59 @@
       </p:sp>
       <p:sp>
         <p:nvSpPr>
-          <p:cNvPr id="5" name="TextBox 4"/>
-          <p:cNvSpPr txBox="1"/>
-          <p:nvPr/>
-        </p:nvSpPr>
-        <p:spPr>
-          <a:xfrm>
-            <a:off x="804672" y="1463040"/>
-            <a:ext cx="2194560" cy="713232"/>
+          <p:cNvPr id="5" name="Oval 4"/>
+          <p:cNvSpPr/>
+          <p:nvPr/>
+        </p:nvSpPr>
+        <p:spPr>
+          <a:xfrm>
+            <a:off x="749808" y="1572768"/>
+            <a:ext cx="329184" cy="329184"/>
+          </a:xfrm>
+          <a:prstGeom prst="ellipse">
+            <a:avLst/>
+          </a:prstGeom>
+          <a:solidFill>
+            <a:srgbClr val="1B2430"/>
+          </a:solidFill>
+          <a:ln>
+            <a:noFill/>
+          </a:ln>
+          <a:effectLst/>
+        </p:spPr>
+        <p:style>
+          <a:lnRef idx="1">
+            <a:schemeClr val="accent1"/>
+          </a:lnRef>
+          <a:fillRef idx="3">
+            <a:schemeClr val="accent1"/>
+          </a:fillRef>
+          <a:effectRef idx="2">
+            <a:schemeClr val="accent1"/>
+          </a:effectRef>
+          <a:fontRef idx="minor">
+            <a:schemeClr val="lt1"/>
+          </a:fontRef>
+        </p:style>
+        <p:txBody>
+          <a:bodyPr rtlCol="0" anchor="ctr"/>
+          <a:lstStyle/>
+          <a:p>
+            <a:pPr algn="ctr"/>
+            <a:endParaRPr/>
+          </a:p>
+        </p:txBody>
+      </p:sp>
+      <p:sp>
+        <p:nvSpPr>
+          <p:cNvPr id="6" name="TextBox 5"/>
+          <p:cNvSpPr txBox="1"/>
+          <p:nvPr/>
+        </p:nvSpPr>
+        <p:spPr>
+          <a:xfrm>
+            <a:off x="749808" y="1572768"/>
+            <a:ext cx="329184" cy="329184"/>
           </a:xfrm>
           <a:prstGeom prst="rect">
             <a:avLst/>
@@ -3638,37 +3723,37 @@
           </a:bodyPr>
           <a:lstStyle/>
           <a:p>
-            <a:pPr algn="l"/>
-            <a:r>
-              <a:rPr sz="1350" b="1" i="0">
-                <a:solidFill>
-                  <a:srgbClr val="1B2430"/>
+            <a:pPr algn="ctr"/>
+            <a:r>
+              <a:rPr sz="1100" b="1" i="0">
+                <a:solidFill>
+                  <a:srgbClr val="FFFFFF"/>
                 </a:solidFill>
                 <a:latin typeface="Cambria"/>
               </a:rPr>
-              <a:t>Caller</a:t>
-            </a:r>
-          </a:p>
-        </p:txBody>
-      </p:sp>
-      <p:sp>
-        <p:nvSpPr>
-          <p:cNvPr id="6" name="TextBox 5"/>
-          <p:cNvSpPr txBox="1"/>
-          <p:nvPr/>
-        </p:nvSpPr>
-        <p:spPr>
-          <a:xfrm>
-            <a:off x="3200400" y="1463040"/>
-            <a:ext cx="3108960" cy="713232"/>
-          </a:xfrm>
-          <a:prstGeom prst="rect">
-            <a:avLst/>
-          </a:prstGeom>
-          <a:noFill/>
-        </p:spPr>
-        <p:txBody>
-          <a:bodyPr wrap="square" lIns="0" tIns="0" rIns="0" bIns="0" anchor="ctr">
+              <a:t>1</a:t>
+            </a:r>
+          </a:p>
+        </p:txBody>
+      </p:sp>
+      <p:sp>
+        <p:nvSpPr>
+          <p:cNvPr id="7" name="TextBox 6"/>
+          <p:cNvSpPr txBox="1"/>
+          <p:nvPr/>
+        </p:nvSpPr>
+        <p:spPr>
+          <a:xfrm>
+            <a:off x="749808" y="2011680"/>
+            <a:ext cx="1655064" cy="457200"/>
+          </a:xfrm>
+          <a:prstGeom prst="rect">
+            <a:avLst/>
+          </a:prstGeom>
+          <a:noFill/>
+        </p:spPr>
+        <p:txBody>
+          <a:bodyPr wrap="square" lIns="0" tIns="0" rIns="0" bIns="0" anchor="t">
             <a:spAutoFit/>
           </a:bodyPr>
           <a:lstStyle/>
@@ -3679,27 +3764,1055 @@
               </a:lnSpc>
             </a:pPr>
             <a:r>
-              <a:rPr sz="1050" b="0" i="0">
+              <a:rPr sz="1100" b="1" i="0">
+                <a:solidFill>
+                  <a:srgbClr val="1B2430"/>
+                </a:solidFill>
+                <a:latin typeface="Calibri"/>
+              </a:rPr>
+              <a:t>Prediction is made</a:t>
+            </a:r>
+          </a:p>
+        </p:txBody>
+      </p:sp>
+      <p:sp>
+        <p:nvSpPr>
+          <p:cNvPr id="8" name="Isosceles Triangle 7"/>
+          <p:cNvSpPr/>
+          <p:nvPr/>
+        </p:nvSpPr>
+        <p:spPr>
+          <a:xfrm rot="5400000">
+            <a:off x="2633472" y="1915667"/>
+            <a:ext cx="146304" cy="146304"/>
+          </a:xfrm>
+          <a:prstGeom prst="triangle">
+            <a:avLst/>
+          </a:prstGeom>
+          <a:solidFill>
+            <a:srgbClr val="9EA8B2"/>
+          </a:solidFill>
+          <a:ln>
+            <a:noFill/>
+          </a:ln>
+          <a:effectLst/>
+        </p:spPr>
+        <p:style>
+          <a:lnRef idx="1">
+            <a:schemeClr val="accent1"/>
+          </a:lnRef>
+          <a:fillRef idx="3">
+            <a:schemeClr val="accent1"/>
+          </a:fillRef>
+          <a:effectRef idx="2">
+            <a:schemeClr val="accent1"/>
+          </a:effectRef>
+          <a:fontRef idx="minor">
+            <a:schemeClr val="lt1"/>
+          </a:fontRef>
+        </p:style>
+        <p:txBody>
+          <a:bodyPr rtlCol="0" anchor="ctr"/>
+          <a:lstStyle/>
+          <a:p>
+            <a:pPr algn="ctr"/>
+            <a:endParaRPr/>
+          </a:p>
+        </p:txBody>
+      </p:sp>
+      <p:sp>
+        <p:nvSpPr>
+          <p:cNvPr id="9" name="Rounded Rectangle 8"/>
+          <p:cNvSpPr/>
+          <p:nvPr/>
+        </p:nvSpPr>
+        <p:spPr>
+          <a:xfrm>
+            <a:off x="2807208" y="1371600"/>
+            <a:ext cx="2057400" cy="1234440"/>
+          </a:xfrm>
+          <a:prstGeom prst="roundRect">
+            <a:avLst>
+              <a:gd name="adj" fmla="val 5500"/>
+            </a:avLst>
+          </a:prstGeom>
+          <a:solidFill>
+            <a:srgbClr val="F3F5F7"/>
+          </a:solidFill>
+          <a:ln w="9525">
+            <a:solidFill>
+              <a:srgbClr val="DFE4E9"/>
+            </a:solidFill>
+          </a:ln>
+          <a:effectLst/>
+        </p:spPr>
+        <p:style>
+          <a:lnRef idx="1">
+            <a:schemeClr val="accent1"/>
+          </a:lnRef>
+          <a:fillRef idx="3">
+            <a:schemeClr val="accent1"/>
+          </a:fillRef>
+          <a:effectRef idx="2">
+            <a:schemeClr val="accent1"/>
+          </a:effectRef>
+          <a:fontRef idx="minor">
+            <a:schemeClr val="lt1"/>
+          </a:fontRef>
+        </p:style>
+        <p:txBody>
+          <a:bodyPr wrap="square" rtlCol="0" anchor="ctr"/>
+          <a:lstStyle/>
+          <a:p>
+            <a:pPr algn="ctr"/>
+            <a:endParaRPr/>
+          </a:p>
+        </p:txBody>
+      </p:sp>
+      <p:sp>
+        <p:nvSpPr>
+          <p:cNvPr id="10" name="Oval 9"/>
+          <p:cNvSpPr/>
+          <p:nvPr/>
+        </p:nvSpPr>
+        <p:spPr>
+          <a:xfrm>
+            <a:off x="3008376" y="1572768"/>
+            <a:ext cx="329184" cy="329184"/>
+          </a:xfrm>
+          <a:prstGeom prst="ellipse">
+            <a:avLst/>
+          </a:prstGeom>
+          <a:solidFill>
+            <a:srgbClr val="1B2430"/>
+          </a:solidFill>
+          <a:ln>
+            <a:noFill/>
+          </a:ln>
+          <a:effectLst/>
+        </p:spPr>
+        <p:style>
+          <a:lnRef idx="1">
+            <a:schemeClr val="accent1"/>
+          </a:lnRef>
+          <a:fillRef idx="3">
+            <a:schemeClr val="accent1"/>
+          </a:fillRef>
+          <a:effectRef idx="2">
+            <a:schemeClr val="accent1"/>
+          </a:effectRef>
+          <a:fontRef idx="minor">
+            <a:schemeClr val="lt1"/>
+          </a:fontRef>
+        </p:style>
+        <p:txBody>
+          <a:bodyPr rtlCol="0" anchor="ctr"/>
+          <a:lstStyle/>
+          <a:p>
+            <a:pPr algn="ctr"/>
+            <a:endParaRPr/>
+          </a:p>
+        </p:txBody>
+      </p:sp>
+      <p:sp>
+        <p:nvSpPr>
+          <p:cNvPr id="11" name="TextBox 10"/>
+          <p:cNvSpPr txBox="1"/>
+          <p:nvPr/>
+        </p:nvSpPr>
+        <p:spPr>
+          <a:xfrm>
+            <a:off x="3008376" y="1572768"/>
+            <a:ext cx="329184" cy="329184"/>
+          </a:xfrm>
+          <a:prstGeom prst="rect">
+            <a:avLst/>
+          </a:prstGeom>
+          <a:noFill/>
+        </p:spPr>
+        <p:txBody>
+          <a:bodyPr wrap="square" lIns="0" tIns="0" rIns="0" bIns="0" anchor="ctr">
+            <a:spAutoFit/>
+          </a:bodyPr>
+          <a:lstStyle/>
+          <a:p>
+            <a:pPr algn="ctr"/>
+            <a:r>
+              <a:rPr sz="1100" b="1" i="0">
+                <a:solidFill>
+                  <a:srgbClr val="FFFFFF"/>
+                </a:solidFill>
+                <a:latin typeface="Cambria"/>
+              </a:rPr>
+              <a:t>2</a:t>
+            </a:r>
+          </a:p>
+        </p:txBody>
+      </p:sp>
+      <p:sp>
+        <p:nvSpPr>
+          <p:cNvPr id="12" name="TextBox 11"/>
+          <p:cNvSpPr txBox="1"/>
+          <p:nvPr/>
+        </p:nvSpPr>
+        <p:spPr>
+          <a:xfrm>
+            <a:off x="3008376" y="2011680"/>
+            <a:ext cx="1655064" cy="457200"/>
+          </a:xfrm>
+          <a:prstGeom prst="rect">
+            <a:avLst/>
+          </a:prstGeom>
+          <a:noFill/>
+        </p:spPr>
+        <p:txBody>
+          <a:bodyPr wrap="square" lIns="0" tIns="0" rIns="0" bIns="0" anchor="t">
+            <a:spAutoFit/>
+          </a:bodyPr>
+          <a:lstStyle/>
+          <a:p>
+            <a:pPr algn="l">
+              <a:lnSpc>
+                <a:spcPts val="1400"/>
+              </a:lnSpc>
+            </a:pPr>
+            <a:r>
+              <a:rPr sz="1100" b="1" i="0">
+                <a:solidFill>
+                  <a:srgbClr val="1B2430"/>
+                </a:solidFill>
+                <a:latin typeface="Calibri"/>
+              </a:rPr>
+              <a:t>Low confidence goes to the review queue</a:t>
+            </a:r>
+          </a:p>
+        </p:txBody>
+      </p:sp>
+      <p:sp>
+        <p:nvSpPr>
+          <p:cNvPr id="13" name="Isosceles Triangle 12"/>
+          <p:cNvSpPr/>
+          <p:nvPr/>
+        </p:nvSpPr>
+        <p:spPr>
+          <a:xfrm rot="5400000">
+            <a:off x="4892040" y="1915667"/>
+            <a:ext cx="146304" cy="146304"/>
+          </a:xfrm>
+          <a:prstGeom prst="triangle">
+            <a:avLst/>
+          </a:prstGeom>
+          <a:solidFill>
+            <a:srgbClr val="9EA8B2"/>
+          </a:solidFill>
+          <a:ln>
+            <a:noFill/>
+          </a:ln>
+          <a:effectLst/>
+        </p:spPr>
+        <p:style>
+          <a:lnRef idx="1">
+            <a:schemeClr val="accent1"/>
+          </a:lnRef>
+          <a:fillRef idx="3">
+            <a:schemeClr val="accent1"/>
+          </a:fillRef>
+          <a:effectRef idx="2">
+            <a:schemeClr val="accent1"/>
+          </a:effectRef>
+          <a:fontRef idx="minor">
+            <a:schemeClr val="lt1"/>
+          </a:fontRef>
+        </p:style>
+        <p:txBody>
+          <a:bodyPr rtlCol="0" anchor="ctr"/>
+          <a:lstStyle/>
+          <a:p>
+            <a:pPr algn="ctr"/>
+            <a:endParaRPr/>
+          </a:p>
+        </p:txBody>
+      </p:sp>
+      <p:sp>
+        <p:nvSpPr>
+          <p:cNvPr id="14" name="Rounded Rectangle 13"/>
+          <p:cNvSpPr/>
+          <p:nvPr/>
+        </p:nvSpPr>
+        <p:spPr>
+          <a:xfrm>
+            <a:off x="5065776" y="1371600"/>
+            <a:ext cx="2057400" cy="1234440"/>
+          </a:xfrm>
+          <a:prstGeom prst="roundRect">
+            <a:avLst>
+              <a:gd name="adj" fmla="val 5500"/>
+            </a:avLst>
+          </a:prstGeom>
+          <a:solidFill>
+            <a:srgbClr val="F3F5F7"/>
+          </a:solidFill>
+          <a:ln w="9525">
+            <a:solidFill>
+              <a:srgbClr val="DFE4E9"/>
+            </a:solidFill>
+          </a:ln>
+          <a:effectLst/>
+        </p:spPr>
+        <p:style>
+          <a:lnRef idx="1">
+            <a:schemeClr val="accent1"/>
+          </a:lnRef>
+          <a:fillRef idx="3">
+            <a:schemeClr val="accent1"/>
+          </a:fillRef>
+          <a:effectRef idx="2">
+            <a:schemeClr val="accent1"/>
+          </a:effectRef>
+          <a:fontRef idx="minor">
+            <a:schemeClr val="lt1"/>
+          </a:fontRef>
+        </p:style>
+        <p:txBody>
+          <a:bodyPr wrap="square" rtlCol="0" anchor="ctr"/>
+          <a:lstStyle/>
+          <a:p>
+            <a:pPr algn="ctr"/>
+            <a:endParaRPr/>
+          </a:p>
+        </p:txBody>
+      </p:sp>
+      <p:sp>
+        <p:nvSpPr>
+          <p:cNvPr id="15" name="Oval 14"/>
+          <p:cNvSpPr/>
+          <p:nvPr/>
+        </p:nvSpPr>
+        <p:spPr>
+          <a:xfrm>
+            <a:off x="5266944" y="1572768"/>
+            <a:ext cx="329184" cy="329184"/>
+          </a:xfrm>
+          <a:prstGeom prst="ellipse">
+            <a:avLst/>
+          </a:prstGeom>
+          <a:solidFill>
+            <a:srgbClr val="1B2430"/>
+          </a:solidFill>
+          <a:ln>
+            <a:noFill/>
+          </a:ln>
+          <a:effectLst/>
+        </p:spPr>
+        <p:style>
+          <a:lnRef idx="1">
+            <a:schemeClr val="accent1"/>
+          </a:lnRef>
+          <a:fillRef idx="3">
+            <a:schemeClr val="accent1"/>
+          </a:fillRef>
+          <a:effectRef idx="2">
+            <a:schemeClr val="accent1"/>
+          </a:effectRef>
+          <a:fontRef idx="minor">
+            <a:schemeClr val="lt1"/>
+          </a:fontRef>
+        </p:style>
+        <p:txBody>
+          <a:bodyPr rtlCol="0" anchor="ctr"/>
+          <a:lstStyle/>
+          <a:p>
+            <a:pPr algn="ctr"/>
+            <a:endParaRPr/>
+          </a:p>
+        </p:txBody>
+      </p:sp>
+      <p:sp>
+        <p:nvSpPr>
+          <p:cNvPr id="16" name="TextBox 15"/>
+          <p:cNvSpPr txBox="1"/>
+          <p:nvPr/>
+        </p:nvSpPr>
+        <p:spPr>
+          <a:xfrm>
+            <a:off x="5266944" y="1572768"/>
+            <a:ext cx="329184" cy="329184"/>
+          </a:xfrm>
+          <a:prstGeom prst="rect">
+            <a:avLst/>
+          </a:prstGeom>
+          <a:noFill/>
+        </p:spPr>
+        <p:txBody>
+          <a:bodyPr wrap="square" lIns="0" tIns="0" rIns="0" bIns="0" anchor="ctr">
+            <a:spAutoFit/>
+          </a:bodyPr>
+          <a:lstStyle/>
+          <a:p>
+            <a:pPr algn="ctr"/>
+            <a:r>
+              <a:rPr sz="1100" b="1" i="0">
+                <a:solidFill>
+                  <a:srgbClr val="FFFFFF"/>
+                </a:solidFill>
+                <a:latin typeface="Cambria"/>
+              </a:rPr>
+              <a:t>3</a:t>
+            </a:r>
+          </a:p>
+        </p:txBody>
+      </p:sp>
+      <p:sp>
+        <p:nvSpPr>
+          <p:cNvPr id="17" name="TextBox 16"/>
+          <p:cNvSpPr txBox="1"/>
+          <p:nvPr/>
+        </p:nvSpPr>
+        <p:spPr>
+          <a:xfrm>
+            <a:off x="5266944" y="2011680"/>
+            <a:ext cx="1655064" cy="457200"/>
+          </a:xfrm>
+          <a:prstGeom prst="rect">
+            <a:avLst/>
+          </a:prstGeom>
+          <a:noFill/>
+        </p:spPr>
+        <p:txBody>
+          <a:bodyPr wrap="square" lIns="0" tIns="0" rIns="0" bIns="0" anchor="t">
+            <a:spAutoFit/>
+          </a:bodyPr>
+          <a:lstStyle/>
+          <a:p>
+            <a:pPr algn="l">
+              <a:lnSpc>
+                <a:spcPts val="1400"/>
+              </a:lnSpc>
+            </a:pPr>
+            <a:r>
+              <a:rPr sz="1100" b="1" i="0">
+                <a:solidFill>
+                  <a:srgbClr val="1B2430"/>
+                </a:solidFill>
+                <a:latin typeface="Calibri"/>
+              </a:rPr>
+              <a:t>Engineer assigns the correct value</a:t>
+            </a:r>
+          </a:p>
+        </p:txBody>
+      </p:sp>
+      <p:sp>
+        <p:nvSpPr>
+          <p:cNvPr id="18" name="Isosceles Triangle 17"/>
+          <p:cNvSpPr/>
+          <p:nvPr/>
+        </p:nvSpPr>
+        <p:spPr>
+          <a:xfrm rot="5400000">
+            <a:off x="7150608" y="1915667"/>
+            <a:ext cx="146304" cy="146304"/>
+          </a:xfrm>
+          <a:prstGeom prst="triangle">
+            <a:avLst/>
+          </a:prstGeom>
+          <a:solidFill>
+            <a:srgbClr val="9EA8B2"/>
+          </a:solidFill>
+          <a:ln>
+            <a:noFill/>
+          </a:ln>
+          <a:effectLst/>
+        </p:spPr>
+        <p:style>
+          <a:lnRef idx="1">
+            <a:schemeClr val="accent1"/>
+          </a:lnRef>
+          <a:fillRef idx="3">
+            <a:schemeClr val="accent1"/>
+          </a:fillRef>
+          <a:effectRef idx="2">
+            <a:schemeClr val="accent1"/>
+          </a:effectRef>
+          <a:fontRef idx="minor">
+            <a:schemeClr val="lt1"/>
+          </a:fontRef>
+        </p:style>
+        <p:txBody>
+          <a:bodyPr rtlCol="0" anchor="ctr"/>
+          <a:lstStyle/>
+          <a:p>
+            <a:pPr algn="ctr"/>
+            <a:endParaRPr/>
+          </a:p>
+        </p:txBody>
+      </p:sp>
+      <p:sp>
+        <p:nvSpPr>
+          <p:cNvPr id="19" name="Rounded Rectangle 18"/>
+          <p:cNvSpPr/>
+          <p:nvPr/>
+        </p:nvSpPr>
+        <p:spPr>
+          <a:xfrm>
+            <a:off x="7324344" y="1371600"/>
+            <a:ext cx="2057400" cy="1234440"/>
+          </a:xfrm>
+          <a:prstGeom prst="roundRect">
+            <a:avLst>
+              <a:gd name="adj" fmla="val 5500"/>
+            </a:avLst>
+          </a:prstGeom>
+          <a:solidFill>
+            <a:srgbClr val="F3F5F7"/>
+          </a:solidFill>
+          <a:ln w="9525">
+            <a:solidFill>
+              <a:srgbClr val="DFE4E9"/>
+            </a:solidFill>
+          </a:ln>
+          <a:effectLst/>
+        </p:spPr>
+        <p:style>
+          <a:lnRef idx="1">
+            <a:schemeClr val="accent1"/>
+          </a:lnRef>
+          <a:fillRef idx="3">
+            <a:schemeClr val="accent1"/>
+          </a:fillRef>
+          <a:effectRef idx="2">
+            <a:schemeClr val="accent1"/>
+          </a:effectRef>
+          <a:fontRef idx="minor">
+            <a:schemeClr val="lt1"/>
+          </a:fontRef>
+        </p:style>
+        <p:txBody>
+          <a:bodyPr wrap="square" rtlCol="0" anchor="ctr"/>
+          <a:lstStyle/>
+          <a:p>
+            <a:pPr algn="ctr"/>
+            <a:endParaRPr/>
+          </a:p>
+        </p:txBody>
+      </p:sp>
+      <p:sp>
+        <p:nvSpPr>
+          <p:cNvPr id="20" name="Oval 19"/>
+          <p:cNvSpPr/>
+          <p:nvPr/>
+        </p:nvSpPr>
+        <p:spPr>
+          <a:xfrm>
+            <a:off x="7525512" y="1572768"/>
+            <a:ext cx="329184" cy="329184"/>
+          </a:xfrm>
+          <a:prstGeom prst="ellipse">
+            <a:avLst/>
+          </a:prstGeom>
+          <a:solidFill>
+            <a:srgbClr val="1B2430"/>
+          </a:solidFill>
+          <a:ln>
+            <a:noFill/>
+          </a:ln>
+          <a:effectLst/>
+        </p:spPr>
+        <p:style>
+          <a:lnRef idx="1">
+            <a:schemeClr val="accent1"/>
+          </a:lnRef>
+          <a:fillRef idx="3">
+            <a:schemeClr val="accent1"/>
+          </a:fillRef>
+          <a:effectRef idx="2">
+            <a:schemeClr val="accent1"/>
+          </a:effectRef>
+          <a:fontRef idx="minor">
+            <a:schemeClr val="lt1"/>
+          </a:fontRef>
+        </p:style>
+        <p:txBody>
+          <a:bodyPr rtlCol="0" anchor="ctr"/>
+          <a:lstStyle/>
+          <a:p>
+            <a:pPr algn="ctr"/>
+            <a:endParaRPr/>
+          </a:p>
+        </p:txBody>
+      </p:sp>
+      <p:sp>
+        <p:nvSpPr>
+          <p:cNvPr id="21" name="TextBox 20"/>
+          <p:cNvSpPr txBox="1"/>
+          <p:nvPr/>
+        </p:nvSpPr>
+        <p:spPr>
+          <a:xfrm>
+            <a:off x="7525512" y="1572768"/>
+            <a:ext cx="329184" cy="329184"/>
+          </a:xfrm>
+          <a:prstGeom prst="rect">
+            <a:avLst/>
+          </a:prstGeom>
+          <a:noFill/>
+        </p:spPr>
+        <p:txBody>
+          <a:bodyPr wrap="square" lIns="0" tIns="0" rIns="0" bIns="0" anchor="ctr">
+            <a:spAutoFit/>
+          </a:bodyPr>
+          <a:lstStyle/>
+          <a:p>
+            <a:pPr algn="ctr"/>
+            <a:r>
+              <a:rPr sz="1100" b="1" i="0">
+                <a:solidFill>
+                  <a:srgbClr val="FFFFFF"/>
+                </a:solidFill>
+                <a:latin typeface="Cambria"/>
+              </a:rPr>
+              <a:t>4</a:t>
+            </a:r>
+          </a:p>
+        </p:txBody>
+      </p:sp>
+      <p:sp>
+        <p:nvSpPr>
+          <p:cNvPr id="22" name="TextBox 21"/>
+          <p:cNvSpPr txBox="1"/>
+          <p:nvPr/>
+        </p:nvSpPr>
+        <p:spPr>
+          <a:xfrm>
+            <a:off x="7525512" y="2011680"/>
+            <a:ext cx="1655064" cy="457200"/>
+          </a:xfrm>
+          <a:prstGeom prst="rect">
+            <a:avLst/>
+          </a:prstGeom>
+          <a:noFill/>
+        </p:spPr>
+        <p:txBody>
+          <a:bodyPr wrap="square" lIns="0" tIns="0" rIns="0" bIns="0" anchor="t">
+            <a:spAutoFit/>
+          </a:bodyPr>
+          <a:lstStyle/>
+          <a:p>
+            <a:pPr algn="l">
+              <a:lnSpc>
+                <a:spcPts val="1400"/>
+              </a:lnSpc>
+            </a:pPr>
+            <a:r>
+              <a:rPr sz="1100" b="1" i="0">
+                <a:solidFill>
+                  <a:srgbClr val="1B2430"/>
+                </a:solidFill>
+                <a:latin typeface="Calibri"/>
+              </a:rPr>
+              <a:t>The dictionary is updated</a:t>
+            </a:r>
+          </a:p>
+        </p:txBody>
+      </p:sp>
+      <p:sp>
+        <p:nvSpPr>
+          <p:cNvPr id="23" name="Isosceles Triangle 22"/>
+          <p:cNvSpPr/>
+          <p:nvPr/>
+        </p:nvSpPr>
+        <p:spPr>
+          <a:xfrm rot="5400000">
+            <a:off x="9409176" y="1915667"/>
+            <a:ext cx="146304" cy="146304"/>
+          </a:xfrm>
+          <a:prstGeom prst="triangle">
+            <a:avLst/>
+          </a:prstGeom>
+          <a:solidFill>
+            <a:srgbClr val="9EA8B2"/>
+          </a:solidFill>
+          <a:ln>
+            <a:noFill/>
+          </a:ln>
+          <a:effectLst/>
+        </p:spPr>
+        <p:style>
+          <a:lnRef idx="1">
+            <a:schemeClr val="accent1"/>
+          </a:lnRef>
+          <a:fillRef idx="3">
+            <a:schemeClr val="accent1"/>
+          </a:fillRef>
+          <a:effectRef idx="2">
+            <a:schemeClr val="accent1"/>
+          </a:effectRef>
+          <a:fontRef idx="minor">
+            <a:schemeClr val="lt1"/>
+          </a:fontRef>
+        </p:style>
+        <p:txBody>
+          <a:bodyPr rtlCol="0" anchor="ctr"/>
+          <a:lstStyle/>
+          <a:p>
+            <a:pPr algn="ctr"/>
+            <a:endParaRPr/>
+          </a:p>
+        </p:txBody>
+      </p:sp>
+      <p:sp>
+        <p:nvSpPr>
+          <p:cNvPr id="24" name="Rounded Rectangle 23"/>
+          <p:cNvSpPr/>
+          <p:nvPr/>
+        </p:nvSpPr>
+        <p:spPr>
+          <a:xfrm>
+            <a:off x="9582912" y="1371600"/>
+            <a:ext cx="2057400" cy="1234440"/>
+          </a:xfrm>
+          <a:prstGeom prst="roundRect">
+            <a:avLst>
+              <a:gd name="adj" fmla="val 5500"/>
+            </a:avLst>
+          </a:prstGeom>
+          <a:solidFill>
+            <a:srgbClr val="F3F5F7"/>
+          </a:solidFill>
+          <a:ln w="9525">
+            <a:solidFill>
+              <a:srgbClr val="DFE4E9"/>
+            </a:solidFill>
+          </a:ln>
+          <a:effectLst/>
+        </p:spPr>
+        <p:style>
+          <a:lnRef idx="1">
+            <a:schemeClr val="accent1"/>
+          </a:lnRef>
+          <a:fillRef idx="3">
+            <a:schemeClr val="accent1"/>
+          </a:fillRef>
+          <a:effectRef idx="2">
+            <a:schemeClr val="accent1"/>
+          </a:effectRef>
+          <a:fontRef idx="minor">
+            <a:schemeClr val="lt1"/>
+          </a:fontRef>
+        </p:style>
+        <p:txBody>
+          <a:bodyPr wrap="square" rtlCol="0" anchor="ctr"/>
+          <a:lstStyle/>
+          <a:p>
+            <a:pPr algn="ctr"/>
+            <a:endParaRPr/>
+          </a:p>
+        </p:txBody>
+      </p:sp>
+      <p:sp>
+        <p:nvSpPr>
+          <p:cNvPr id="25" name="Oval 24"/>
+          <p:cNvSpPr/>
+          <p:nvPr/>
+        </p:nvSpPr>
+        <p:spPr>
+          <a:xfrm>
+            <a:off x="9784080" y="1572768"/>
+            <a:ext cx="329184" cy="329184"/>
+          </a:xfrm>
+          <a:prstGeom prst="ellipse">
+            <a:avLst/>
+          </a:prstGeom>
+          <a:solidFill>
+            <a:srgbClr val="1B2430"/>
+          </a:solidFill>
+          <a:ln>
+            <a:noFill/>
+          </a:ln>
+          <a:effectLst/>
+        </p:spPr>
+        <p:style>
+          <a:lnRef idx="1">
+            <a:schemeClr val="accent1"/>
+          </a:lnRef>
+          <a:fillRef idx="3">
+            <a:schemeClr val="accent1"/>
+          </a:fillRef>
+          <a:effectRef idx="2">
+            <a:schemeClr val="accent1"/>
+          </a:effectRef>
+          <a:fontRef idx="minor">
+            <a:schemeClr val="lt1"/>
+          </a:fontRef>
+        </p:style>
+        <p:txBody>
+          <a:bodyPr rtlCol="0" anchor="ctr"/>
+          <a:lstStyle/>
+          <a:p>
+            <a:pPr algn="ctr"/>
+            <a:endParaRPr/>
+          </a:p>
+        </p:txBody>
+      </p:sp>
+      <p:sp>
+        <p:nvSpPr>
+          <p:cNvPr id="26" name="TextBox 25"/>
+          <p:cNvSpPr txBox="1"/>
+          <p:nvPr/>
+        </p:nvSpPr>
+        <p:spPr>
+          <a:xfrm>
+            <a:off x="9784080" y="1572768"/>
+            <a:ext cx="329184" cy="329184"/>
+          </a:xfrm>
+          <a:prstGeom prst="rect">
+            <a:avLst/>
+          </a:prstGeom>
+          <a:noFill/>
+        </p:spPr>
+        <p:txBody>
+          <a:bodyPr wrap="square" lIns="0" tIns="0" rIns="0" bIns="0" anchor="ctr">
+            <a:spAutoFit/>
+          </a:bodyPr>
+          <a:lstStyle/>
+          <a:p>
+            <a:pPr algn="ctr"/>
+            <a:r>
+              <a:rPr sz="1100" b="1" i="0">
+                <a:solidFill>
+                  <a:srgbClr val="FFFFFF"/>
+                </a:solidFill>
+                <a:latin typeface="Cambria"/>
+              </a:rPr>
+              <a:t>5</a:t>
+            </a:r>
+          </a:p>
+        </p:txBody>
+      </p:sp>
+      <p:sp>
+        <p:nvSpPr>
+          <p:cNvPr id="27" name="TextBox 26"/>
+          <p:cNvSpPr txBox="1"/>
+          <p:nvPr/>
+        </p:nvSpPr>
+        <p:spPr>
+          <a:xfrm>
+            <a:off x="9784080" y="2011680"/>
+            <a:ext cx="1655064" cy="457200"/>
+          </a:xfrm>
+          <a:prstGeom prst="rect">
+            <a:avLst/>
+          </a:prstGeom>
+          <a:noFill/>
+        </p:spPr>
+        <p:txBody>
+          <a:bodyPr wrap="square" lIns="0" tIns="0" rIns="0" bIns="0" anchor="t">
+            <a:spAutoFit/>
+          </a:bodyPr>
+          <a:lstStyle/>
+          <a:p>
+            <a:pPr algn="l">
+              <a:lnSpc>
+                <a:spcPts val="1400"/>
+              </a:lnSpc>
+            </a:pPr>
+            <a:r>
+              <a:rPr sz="1100" b="1" i="0">
+                <a:solidFill>
+                  <a:srgbClr val="1B2430"/>
+                </a:solidFill>
+                <a:latin typeface="Calibri"/>
+              </a:rPr>
+              <a:t>The next run already knows</a:t>
+            </a:r>
+          </a:p>
+        </p:txBody>
+      </p:sp>
+      <p:sp>
+        <p:nvSpPr>
+          <p:cNvPr id="28" name="Rounded Rectangle 27"/>
+          <p:cNvSpPr/>
+          <p:nvPr/>
+        </p:nvSpPr>
+        <p:spPr>
+          <a:xfrm>
+            <a:off x="548640" y="2926080"/>
+            <a:ext cx="5440680" cy="1783080"/>
+          </a:xfrm>
+          <a:prstGeom prst="roundRect">
+            <a:avLst>
+              <a:gd name="adj" fmla="val 5500"/>
+            </a:avLst>
+          </a:prstGeom>
+          <a:solidFill>
+            <a:srgbClr val="EAF2EE"/>
+          </a:solidFill>
+          <a:ln w="9525">
+            <a:solidFill>
+              <a:srgbClr val="DFE4E9"/>
+            </a:solidFill>
+          </a:ln>
+          <a:effectLst/>
+        </p:spPr>
+        <p:style>
+          <a:lnRef idx="1">
+            <a:schemeClr val="accent1"/>
+          </a:lnRef>
+          <a:fillRef idx="3">
+            <a:schemeClr val="accent1"/>
+          </a:fillRef>
+          <a:effectRef idx="2">
+            <a:schemeClr val="accent1"/>
+          </a:effectRef>
+          <a:fontRef idx="minor">
+            <a:schemeClr val="lt1"/>
+          </a:fontRef>
+        </p:style>
+        <p:txBody>
+          <a:bodyPr wrap="square" rtlCol="0" anchor="ctr"/>
+          <a:lstStyle/>
+          <a:p>
+            <a:pPr algn="ctr"/>
+            <a:endParaRPr/>
+          </a:p>
+        </p:txBody>
+      </p:sp>
+      <p:sp>
+        <p:nvSpPr>
+          <p:cNvPr id="29" name="TextBox 28"/>
+          <p:cNvSpPr txBox="1"/>
+          <p:nvPr/>
+        </p:nvSpPr>
+        <p:spPr>
+          <a:xfrm>
+            <a:off x="822960" y="3145536"/>
+            <a:ext cx="4892040" cy="161583"/>
+          </a:xfrm>
+          <a:prstGeom prst="rect">
+            <a:avLst/>
+          </a:prstGeom>
+          <a:noFill/>
+        </p:spPr>
+        <p:txBody>
+          <a:bodyPr wrap="square" lIns="0" tIns="0" rIns="0" bIns="0" anchor="t">
+            <a:spAutoFit/>
+          </a:bodyPr>
+          <a:lstStyle/>
+          <a:p>
+            <a:pPr algn="l"/>
+            <a:r>
+              <a:rPr sz="1050" b="1" i="0" spc="180" dirty="0">
+                <a:solidFill>
+                  <a:srgbClr val="2E7D63"/>
+                </a:solidFill>
+                <a:latin typeface="Calibri"/>
+              </a:rPr>
+              <a:t>DEVICE TYPE </a:t>
+            </a:r>
+          </a:p>
+        </p:txBody>
+      </p:sp>
+      <p:sp>
+        <p:nvSpPr>
+          <p:cNvPr id="30" name="TextBox 29"/>
+          <p:cNvSpPr txBox="1"/>
+          <p:nvPr/>
+        </p:nvSpPr>
+        <p:spPr>
+          <a:xfrm>
+            <a:off x="822960" y="3456432"/>
+            <a:ext cx="4892040" cy="567912"/>
+          </a:xfrm>
+          <a:prstGeom prst="rect">
+            <a:avLst/>
+          </a:prstGeom>
+          <a:noFill/>
+        </p:spPr>
+        <p:txBody>
+          <a:bodyPr wrap="square" lIns="0" tIns="0" rIns="0" bIns="0" anchor="t">
+            <a:spAutoFit/>
+          </a:bodyPr>
+          <a:lstStyle/>
+          <a:p>
+            <a:pPr algn="l">
+              <a:lnSpc>
+                <a:spcPts val="1500"/>
+              </a:lnSpc>
+            </a:pPr>
+            <a:r>
+              <a:rPr sz="1150" b="0" i="0" dirty="0">
                 <a:solidFill>
                   <a:srgbClr val="4E5A66"/>
                 </a:solidFill>
                 <a:latin typeface="Calibri"/>
               </a:rPr>
-              <a:t>Console app today; a user interface next</a:t>
-            </a:r>
-          </a:p>
-        </p:txBody>
-      </p:sp>
-      <p:sp>
-        <p:nvSpPr>
-          <p:cNvPr id="7" name="Rounded Rectangle 6"/>
+              <a:t>The correction is written straight into the prefix dictionary and saved atomically with an automatic backup. The very next prediction uses it</a:t>
+            </a:r>
+            <a:r>
+              <a:rPr lang="en-MY" sz="1150" b="0" i="0" dirty="0">
+                <a:solidFill>
+                  <a:srgbClr val="4E5A66"/>
+                </a:solidFill>
+                <a:latin typeface="Calibri"/>
+              </a:rPr>
+              <a:t>,</a:t>
+            </a:r>
+            <a:r>
+              <a:rPr sz="1150" b="0" i="0" dirty="0">
+                <a:solidFill>
+                  <a:srgbClr val="4E5A66"/>
+                </a:solidFill>
+                <a:latin typeface="Calibri"/>
+              </a:rPr>
+              <a:t> there is no model to retrain.</a:t>
+            </a:r>
+          </a:p>
+        </p:txBody>
+      </p:sp>
+      <p:sp>
+        <p:nvSpPr>
+          <p:cNvPr id="31" name="TextBox 30"/>
+          <p:cNvSpPr txBox="1"/>
+          <p:nvPr/>
+        </p:nvSpPr>
+        <p:spPr>
+          <a:xfrm>
+            <a:off x="822960" y="4261104"/>
+            <a:ext cx="4892040" cy="310896"/>
+          </a:xfrm>
+          <a:prstGeom prst="rect">
+            <a:avLst/>
+          </a:prstGeom>
+          <a:noFill/>
+        </p:spPr>
+        <p:txBody>
+          <a:bodyPr wrap="square" lIns="0" tIns="0" rIns="0" bIns="0" anchor="t">
+            <a:spAutoFit/>
+          </a:bodyPr>
+          <a:lstStyle/>
+          <a:p>
+            <a:pPr algn="l"/>
+            <a:r>
+              <a:rPr sz="1050" b="0" i="1">
+                <a:solidFill>
+                  <a:srgbClr val="7A8792"/>
+                </a:solidFill>
+                <a:latin typeface="Calibri"/>
+              </a:rPr>
+              <a:t>Buffered flush every 50 records; manual assignments persist at once.</a:t>
+            </a:r>
+          </a:p>
+        </p:txBody>
+      </p:sp>
+      <p:sp>
+        <p:nvSpPr>
+          <p:cNvPr id="32" name="Rounded Rectangle 31"/>
           <p:cNvSpPr/>
           <p:nvPr/>
         </p:nvSpPr>
         <p:spPr>
           <a:xfrm>
-            <a:off x="548640" y="2304288"/>
-            <a:ext cx="6035040" cy="713232"/>
+            <a:off x="6199632" y="2926080"/>
+            <a:ext cx="5440680" cy="1783080"/>
           </a:xfrm>
           <a:prstGeom prst="roundRect">
             <a:avLst>
@@ -3741,964 +4854,125 @@
       </p:sp>
       <p:sp>
         <p:nvSpPr>
-          <p:cNvPr id="8" name="TextBox 7"/>
-          <p:cNvSpPr txBox="1"/>
-          <p:nvPr/>
-        </p:nvSpPr>
-        <p:spPr>
-          <a:xfrm>
-            <a:off x="804672" y="2304288"/>
-            <a:ext cx="2194560" cy="713232"/>
-          </a:xfrm>
-          <a:prstGeom prst="rect">
-            <a:avLst/>
-          </a:prstGeom>
-          <a:noFill/>
-        </p:spPr>
-        <p:txBody>
-          <a:bodyPr wrap="square" lIns="0" tIns="0" rIns="0" bIns="0" anchor="ctr">
+          <p:cNvPr id="33" name="TextBox 32"/>
+          <p:cNvSpPr txBox="1"/>
+          <p:nvPr/>
+        </p:nvSpPr>
+        <p:spPr>
+          <a:xfrm>
+            <a:off x="6473952" y="3145536"/>
+            <a:ext cx="4892040" cy="219456"/>
+          </a:xfrm>
+          <a:prstGeom prst="rect">
+            <a:avLst/>
+          </a:prstGeom>
+          <a:noFill/>
+        </p:spPr>
+        <p:txBody>
+          <a:bodyPr wrap="square" lIns="0" tIns="0" rIns="0" bIns="0" anchor="t">
             <a:spAutoFit/>
           </a:bodyPr>
           <a:lstStyle/>
           <a:p>
             <a:pPr algn="l"/>
             <a:r>
-              <a:rPr sz="1350" b="1" i="0">
-                <a:solidFill>
-                  <a:srgbClr val="1B2430"/>
-                </a:solidFill>
-                <a:latin typeface="Cambria"/>
-              </a:rPr>
-              <a:t>Logic.dll</a:t>
-            </a:r>
-          </a:p>
-        </p:txBody>
-      </p:sp>
-      <p:sp>
-        <p:nvSpPr>
-          <p:cNvPr id="9" name="TextBox 8"/>
-          <p:cNvSpPr txBox="1"/>
-          <p:nvPr/>
-        </p:nvSpPr>
-        <p:spPr>
-          <a:xfrm>
-            <a:off x="3200400" y="2304288"/>
-            <a:ext cx="3108960" cy="713232"/>
-          </a:xfrm>
-          <a:prstGeom prst="rect">
-            <a:avLst/>
-          </a:prstGeom>
-          <a:noFill/>
-        </p:spPr>
-        <p:txBody>
-          <a:bodyPr wrap="square" lIns="0" tIns="0" rIns="0" bIns="0" anchor="ctr">
+              <a:rPr sz="1050" b="1" i="0" spc="180">
+                <a:solidFill>
+                  <a:srgbClr val="C46A24"/>
+                </a:solidFill>
+                <a:latin typeface="Calibri"/>
+              </a:rPr>
+              <a:t>SECTION &amp; CLUSTER — QUEUED FOR RETRAINING</a:t>
+            </a:r>
+          </a:p>
+        </p:txBody>
+      </p:sp>
+      <p:sp>
+        <p:nvSpPr>
+          <p:cNvPr id="34" name="TextBox 33"/>
+          <p:cNvSpPr txBox="1"/>
+          <p:nvPr/>
+        </p:nvSpPr>
+        <p:spPr>
+          <a:xfrm>
+            <a:off x="6473952" y="3456432"/>
+            <a:ext cx="4892040" cy="713232"/>
+          </a:xfrm>
+          <a:prstGeom prst="rect">
+            <a:avLst/>
+          </a:prstGeom>
+          <a:noFill/>
+        </p:spPr>
+        <p:txBody>
+          <a:bodyPr wrap="square" lIns="0" tIns="0" rIns="0" bIns="0" anchor="t">
             <a:spAutoFit/>
           </a:bodyPr>
           <a:lstStyle/>
           <a:p>
             <a:pPr algn="l">
               <a:lnSpc>
-                <a:spcPts val="1400"/>
+                <a:spcPts val="1500"/>
               </a:lnSpc>
             </a:pPr>
             <a:r>
-              <a:rPr sz="1050" b="0" i="0">
+              <a:rPr sz="1150" b="0" i="0" dirty="0" err="1">
                 <a:solidFill>
                   <a:srgbClr val="4E5A66"/>
                 </a:solidFill>
                 <a:latin typeface="Calibri"/>
               </a:rPr>
-              <a:t>Orchestration, quota allocation, placement, review queue</a:t>
-            </a:r>
-          </a:p>
-        </p:txBody>
-      </p:sp>
-      <p:sp>
-        <p:nvSpPr>
-          <p:cNvPr id="10" name="Rounded Rectangle 9"/>
-          <p:cNvSpPr/>
-          <p:nvPr/>
-        </p:nvSpPr>
-        <p:spPr>
-          <a:xfrm>
-            <a:off x="548640" y="3145536"/>
-            <a:ext cx="6035040" cy="713232"/>
-          </a:xfrm>
-          <a:prstGeom prst="roundRect">
-            <a:avLst>
-              <a:gd name="adj" fmla="val 5500"/>
-            </a:avLst>
-          </a:prstGeom>
-          <a:solidFill>
-            <a:srgbClr val="FAF1E8"/>
-          </a:solidFill>
-          <a:ln w="9525">
-            <a:solidFill>
-              <a:srgbClr val="DFE4E9"/>
-            </a:solidFill>
-          </a:ln>
-          <a:effectLst/>
-        </p:spPr>
-        <p:style>
-          <a:lnRef idx="1">
-            <a:schemeClr val="accent1"/>
-          </a:lnRef>
-          <a:fillRef idx="3">
-            <a:schemeClr val="accent1"/>
-          </a:fillRef>
-          <a:effectRef idx="2">
-            <a:schemeClr val="accent1"/>
-          </a:effectRef>
-          <a:fontRef idx="minor">
-            <a:schemeClr val="lt1"/>
-          </a:fontRef>
-        </p:style>
-        <p:txBody>
-          <a:bodyPr wrap="square" rtlCol="0" anchor="ctr"/>
-          <a:lstStyle/>
-          <a:p>
-            <a:pPr algn="ctr"/>
-            <a:endParaRPr/>
-          </a:p>
-        </p:txBody>
-      </p:sp>
-      <p:sp>
-        <p:nvSpPr>
-          <p:cNvPr id="11" name="TextBox 10"/>
-          <p:cNvSpPr txBox="1"/>
-          <p:nvPr/>
-        </p:nvSpPr>
-        <p:spPr>
-          <a:xfrm>
-            <a:off x="804672" y="3145536"/>
-            <a:ext cx="2194560" cy="713232"/>
-          </a:xfrm>
-          <a:prstGeom prst="rect">
-            <a:avLst/>
-          </a:prstGeom>
-          <a:noFill/>
-        </p:spPr>
-        <p:txBody>
-          <a:bodyPr wrap="square" lIns="0" tIns="0" rIns="0" bIns="0" anchor="ctr">
+              <a:t>XGBoost</a:t>
+            </a:r>
+            <a:r>
+              <a:rPr sz="1150" b="0" i="0" dirty="0">
+                <a:solidFill>
+                  <a:srgbClr val="4E5A66"/>
+                </a:solidFill>
+                <a:latin typeface="Calibri"/>
+              </a:rPr>
+              <a:t> cannot learn incrementally, so corrections are stored and applied at the next training cycle rather than changing the live model mid-run.</a:t>
+            </a:r>
+          </a:p>
+        </p:txBody>
+      </p:sp>
+      <p:sp>
+        <p:nvSpPr>
+          <p:cNvPr id="35" name="TextBox 34"/>
+          <p:cNvSpPr txBox="1"/>
+          <p:nvPr/>
+        </p:nvSpPr>
+        <p:spPr>
+          <a:xfrm>
+            <a:off x="6473952" y="4261104"/>
+            <a:ext cx="4892040" cy="310896"/>
+          </a:xfrm>
+          <a:prstGeom prst="rect">
+            <a:avLst/>
+          </a:prstGeom>
+          <a:noFill/>
+        </p:spPr>
+        <p:txBody>
+          <a:bodyPr wrap="square" lIns="0" tIns="0" rIns="0" bIns="0" anchor="t">
             <a:spAutoFit/>
           </a:bodyPr>
           <a:lstStyle/>
           <a:p>
             <a:pPr algn="l"/>
             <a:r>
-              <a:rPr sz="1350" b="1" i="0">
-                <a:solidFill>
-                  <a:srgbClr val="1B2430"/>
-                </a:solidFill>
-                <a:latin typeface="Cambria"/>
-              </a:rPr>
-              <a:t>Model.dll</a:t>
-            </a:r>
-          </a:p>
-        </p:txBody>
-      </p:sp>
-      <p:sp>
-        <p:nvSpPr>
-          <p:cNvPr id="12" name="TextBox 11"/>
-          <p:cNvSpPr txBox="1"/>
-          <p:nvPr/>
-        </p:nvSpPr>
-        <p:spPr>
-          <a:xfrm>
-            <a:off x="3200400" y="3145536"/>
-            <a:ext cx="3108960" cy="713232"/>
-          </a:xfrm>
-          <a:prstGeom prst="rect">
-            <a:avLst/>
-          </a:prstGeom>
-          <a:noFill/>
-        </p:spPr>
-        <p:txBody>
-          <a:bodyPr wrap="square" lIns="0" tIns="0" rIns="0" bIns="0" anchor="ctr">
-            <a:spAutoFit/>
-          </a:bodyPr>
-          <a:lstStyle/>
-          <a:p>
-            <a:pPr algn="l">
-              <a:lnSpc>
-                <a:spcPts val="1400"/>
-              </a:lnSpc>
-            </a:pPr>
-            <a:r>
-              <a:rPr sz="1050" b="0" i="0">
-                <a:solidFill>
-                  <a:srgbClr val="4E5A66"/>
-                </a:solidFill>
-                <a:latin typeface="Calibri"/>
-              </a:rPr>
-              <a:t>SQL Server access, and predictions over HTTP or via local Python</a:t>
-            </a:r>
-          </a:p>
-        </p:txBody>
-      </p:sp>
-      <p:sp>
-        <p:nvSpPr>
-          <p:cNvPr id="13" name="Rounded Rectangle 12"/>
-          <p:cNvSpPr/>
-          <p:nvPr/>
-        </p:nvSpPr>
-        <p:spPr>
-          <a:xfrm>
-            <a:off x="548640" y="3986784"/>
-            <a:ext cx="6035040" cy="713232"/>
-          </a:xfrm>
-          <a:prstGeom prst="roundRect">
-            <a:avLst>
-              <a:gd name="adj" fmla="val 5500"/>
-            </a:avLst>
-          </a:prstGeom>
-          <a:solidFill>
-            <a:srgbClr val="EAF2EE"/>
-          </a:solidFill>
-          <a:ln w="9525">
-            <a:solidFill>
-              <a:srgbClr val="DFE4E9"/>
-            </a:solidFill>
-          </a:ln>
-          <a:effectLst/>
-        </p:spPr>
-        <p:style>
-          <a:lnRef idx="1">
-            <a:schemeClr val="accent1"/>
-          </a:lnRef>
-          <a:fillRef idx="3">
-            <a:schemeClr val="accent1"/>
-          </a:fillRef>
-          <a:effectRef idx="2">
-            <a:schemeClr val="accent1"/>
-          </a:effectRef>
-          <a:fontRef idx="minor">
-            <a:schemeClr val="lt1"/>
-          </a:fontRef>
-        </p:style>
-        <p:txBody>
-          <a:bodyPr wrap="square" rtlCol="0" anchor="ctr"/>
-          <a:lstStyle/>
-          <a:p>
-            <a:pPr algn="ctr"/>
-            <a:endParaRPr/>
-          </a:p>
-        </p:txBody>
-      </p:sp>
-      <p:sp>
-        <p:nvSpPr>
-          <p:cNvPr id="14" name="TextBox 13"/>
-          <p:cNvSpPr txBox="1"/>
-          <p:nvPr/>
-        </p:nvSpPr>
-        <p:spPr>
-          <a:xfrm>
-            <a:off x="804672" y="3986784"/>
-            <a:ext cx="2194560" cy="713232"/>
-          </a:xfrm>
-          <a:prstGeom prst="rect">
-            <a:avLst/>
-          </a:prstGeom>
-          <a:noFill/>
-        </p:spPr>
-        <p:txBody>
-          <a:bodyPr wrap="square" lIns="0" tIns="0" rIns="0" bIns="0" anchor="ctr">
-            <a:spAutoFit/>
-          </a:bodyPr>
-          <a:lstStyle/>
-          <a:p>
-            <a:pPr algn="l"/>
-            <a:r>
-              <a:rPr sz="1350" b="1" i="0">
-                <a:solidFill>
-                  <a:srgbClr val="1B2430"/>
-                </a:solidFill>
-                <a:latin typeface="Cambria"/>
-              </a:rPr>
-              <a:t>ML service</a:t>
-            </a:r>
-          </a:p>
-        </p:txBody>
-      </p:sp>
-      <p:sp>
-        <p:nvSpPr>
-          <p:cNvPr id="15" name="TextBox 14"/>
-          <p:cNvSpPr txBox="1"/>
-          <p:nvPr/>
-        </p:nvSpPr>
-        <p:spPr>
-          <a:xfrm>
-            <a:off x="3200400" y="3986784"/>
-            <a:ext cx="3108960" cy="713232"/>
-          </a:xfrm>
-          <a:prstGeom prst="rect">
-            <a:avLst/>
-          </a:prstGeom>
-          <a:noFill/>
-        </p:spPr>
-        <p:txBody>
-          <a:bodyPr wrap="square" lIns="0" tIns="0" rIns="0" bIns="0" anchor="ctr">
-            <a:spAutoFit/>
-          </a:bodyPr>
-          <a:lstStyle/>
-          <a:p>
-            <a:pPr algn="l">
-              <a:lnSpc>
-                <a:spcPts val="1400"/>
-              </a:lnSpc>
-            </a:pPr>
-            <a:r>
-              <a:rPr sz="1050" b="0" i="0" dirty="0" err="1">
-                <a:solidFill>
-                  <a:srgbClr val="4E5A66"/>
-                </a:solidFill>
-                <a:latin typeface="Calibri"/>
-              </a:rPr>
-              <a:t>FastAPI</a:t>
-            </a:r>
-            <a:r>
-              <a:rPr sz="1050" b="0" i="0" dirty="0">
-                <a:solidFill>
-                  <a:srgbClr val="4E5A66"/>
-                </a:solidFill>
-                <a:latin typeface="Calibri"/>
-              </a:rPr>
-              <a:t> on 128.100.8.213:8000 — models loaded once, held in memory</a:t>
-            </a:r>
-          </a:p>
-        </p:txBody>
-      </p:sp>
-      <p:sp>
-        <p:nvSpPr>
-          <p:cNvPr id="16" name="Rounded Rectangle 15"/>
-          <p:cNvSpPr/>
-          <p:nvPr/>
-        </p:nvSpPr>
-        <p:spPr>
-          <a:xfrm>
-            <a:off x="548640" y="4828032"/>
-            <a:ext cx="6035040" cy="713232"/>
-          </a:xfrm>
-          <a:prstGeom prst="roundRect">
-            <a:avLst>
-              <a:gd name="adj" fmla="val 5500"/>
-            </a:avLst>
-          </a:prstGeom>
-          <a:solidFill>
-            <a:srgbClr val="1B2430"/>
-          </a:solidFill>
-          <a:ln>
-            <a:noFill/>
-          </a:ln>
-          <a:effectLst/>
-        </p:spPr>
-        <p:style>
-          <a:lnRef idx="1">
-            <a:schemeClr val="accent1"/>
-          </a:lnRef>
-          <a:fillRef idx="3">
-            <a:schemeClr val="accent1"/>
-          </a:fillRef>
-          <a:effectRef idx="2">
-            <a:schemeClr val="accent1"/>
-          </a:effectRef>
-          <a:fontRef idx="minor">
-            <a:schemeClr val="lt1"/>
-          </a:fontRef>
-        </p:style>
-        <p:txBody>
-          <a:bodyPr wrap="square" rtlCol="0" anchor="ctr"/>
-          <a:lstStyle/>
-          <a:p>
-            <a:pPr algn="ctr"/>
-            <a:endParaRPr/>
-          </a:p>
-        </p:txBody>
-      </p:sp>
-      <p:sp>
-        <p:nvSpPr>
-          <p:cNvPr id="17" name="TextBox 16"/>
-          <p:cNvSpPr txBox="1"/>
-          <p:nvPr/>
-        </p:nvSpPr>
-        <p:spPr>
-          <a:xfrm>
-            <a:off x="804672" y="4828032"/>
-            <a:ext cx="2194560" cy="713232"/>
-          </a:xfrm>
-          <a:prstGeom prst="rect">
-            <a:avLst/>
-          </a:prstGeom>
-          <a:noFill/>
-        </p:spPr>
-        <p:txBody>
-          <a:bodyPr wrap="square" lIns="0" tIns="0" rIns="0" bIns="0" anchor="ctr">
-            <a:spAutoFit/>
-          </a:bodyPr>
-          <a:lstStyle/>
-          <a:p>
-            <a:pPr algn="l"/>
-            <a:r>
-              <a:rPr sz="1350" b="1" i="0">
-                <a:solidFill>
-                  <a:srgbClr val="FFFFFF"/>
-                </a:solidFill>
-                <a:latin typeface="Cambria"/>
-              </a:rPr>
-              <a:t>SQL Server</a:t>
-            </a:r>
-          </a:p>
-        </p:txBody>
-      </p:sp>
-      <p:sp>
-        <p:nvSpPr>
-          <p:cNvPr id="18" name="TextBox 17"/>
-          <p:cNvSpPr txBox="1"/>
-          <p:nvPr/>
-        </p:nvSpPr>
-        <p:spPr>
-          <a:xfrm>
-            <a:off x="3200400" y="5009792"/>
-            <a:ext cx="3108960" cy="349711"/>
-          </a:xfrm>
-          <a:prstGeom prst="rect">
-            <a:avLst/>
-          </a:prstGeom>
-          <a:noFill/>
-        </p:spPr>
-        <p:txBody>
-          <a:bodyPr wrap="square" lIns="0" tIns="0" rIns="0" bIns="0" anchor="ctr">
-            <a:spAutoFit/>
-          </a:bodyPr>
-          <a:lstStyle/>
-          <a:p>
-            <a:pPr algn="l">
-              <a:lnSpc>
-                <a:spcPts val="1400"/>
-              </a:lnSpc>
-            </a:pPr>
-            <a:r>
-              <a:rPr sz="1050" b="0" i="0" dirty="0" err="1">
-                <a:solidFill>
-                  <a:schemeClr val="bg1"/>
-                </a:solidFill>
-                <a:latin typeface="Calibri"/>
-              </a:rPr>
-              <a:t>XenCreator</a:t>
-            </a:r>
-            <a:r>
-              <a:rPr sz="1050" b="0" i="0" dirty="0">
-                <a:solidFill>
-                  <a:schemeClr val="bg1"/>
-                </a:solidFill>
-                <a:latin typeface="Calibri"/>
-              </a:rPr>
-              <a:t> — source table, quota table, two output tables</a:t>
-            </a:r>
-          </a:p>
-        </p:txBody>
-      </p:sp>
-      <p:sp>
-        <p:nvSpPr>
-          <p:cNvPr id="19" name="TextBox 18"/>
-          <p:cNvSpPr txBox="1"/>
-          <p:nvPr/>
-        </p:nvSpPr>
-        <p:spPr>
-          <a:xfrm>
-            <a:off x="548640" y="5669280"/>
-            <a:ext cx="6035040" cy="274320"/>
-          </a:xfrm>
-          <a:prstGeom prst="rect">
-            <a:avLst/>
-          </a:prstGeom>
-          <a:noFill/>
-        </p:spPr>
-        <p:txBody>
-          <a:bodyPr wrap="square" lIns="0" tIns="0" rIns="0" bIns="0" anchor="t">
-            <a:spAutoFit/>
-          </a:bodyPr>
-          <a:lstStyle/>
-          <a:p>
-            <a:pPr algn="l"/>
-            <a:r>
               <a:rPr sz="1050" b="0" i="1">
                 <a:solidFill>
                   <a:srgbClr val="7A8792"/>
                 </a:solidFill>
                 <a:latin typeface="Calibri"/>
               </a:rPr>
-              <a:t>Each layer depends only on the one beneath it.</a:t>
-            </a:r>
-          </a:p>
-        </p:txBody>
-      </p:sp>
-      <p:sp>
-        <p:nvSpPr>
-          <p:cNvPr id="20" name="Rounded Rectangle 19"/>
-          <p:cNvSpPr/>
-          <p:nvPr/>
-        </p:nvSpPr>
-        <p:spPr>
-          <a:xfrm>
-            <a:off x="6858000" y="1463040"/>
-            <a:ext cx="4782312" cy="1554480"/>
-          </a:xfrm>
-          <a:prstGeom prst="roundRect">
-            <a:avLst>
-              <a:gd name="adj" fmla="val 5500"/>
-            </a:avLst>
-          </a:prstGeom>
-          <a:solidFill>
-            <a:srgbClr val="1B2430"/>
-          </a:solidFill>
-          <a:ln>
-            <a:noFill/>
-          </a:ln>
-          <a:effectLst/>
-        </p:spPr>
-        <p:style>
-          <a:lnRef idx="1">
-            <a:schemeClr val="accent1"/>
-          </a:lnRef>
-          <a:fillRef idx="3">
-            <a:schemeClr val="accent1"/>
-          </a:fillRef>
-          <a:effectRef idx="2">
-            <a:schemeClr val="accent1"/>
-          </a:effectRef>
-          <a:fontRef idx="minor">
-            <a:schemeClr val="lt1"/>
-          </a:fontRef>
-        </p:style>
-        <p:txBody>
-          <a:bodyPr wrap="square" rtlCol="0" anchor="ctr"/>
-          <a:lstStyle/>
-          <a:p>
-            <a:pPr algn="ctr"/>
-            <a:endParaRPr/>
-          </a:p>
-        </p:txBody>
-      </p:sp>
-      <p:sp>
-        <p:nvSpPr>
-          <p:cNvPr id="21" name="TextBox 20"/>
-          <p:cNvSpPr txBox="1"/>
-          <p:nvPr/>
-        </p:nvSpPr>
-        <p:spPr>
-          <a:xfrm>
-            <a:off x="7114032" y="1682496"/>
-            <a:ext cx="4270248" cy="219456"/>
-          </a:xfrm>
-          <a:prstGeom prst="rect">
-            <a:avLst/>
-          </a:prstGeom>
-          <a:noFill/>
-        </p:spPr>
-        <p:txBody>
-          <a:bodyPr wrap="square" lIns="0" tIns="0" rIns="0" bIns="0" anchor="t">
-            <a:spAutoFit/>
-          </a:bodyPr>
-          <a:lstStyle/>
-          <a:p>
-            <a:pPr algn="l"/>
-            <a:r>
-              <a:rPr sz="1050" b="1" i="0" spc="180">
-                <a:solidFill>
-                  <a:srgbClr val="C46A24"/>
-                </a:solidFill>
-                <a:latin typeface="Calibri"/>
-              </a:rPr>
-              <a:t>ONE CALL RUNS EVERYTHING</a:t>
-            </a:r>
-          </a:p>
-        </p:txBody>
-      </p:sp>
-      <p:sp>
-        <p:nvSpPr>
-          <p:cNvPr id="22" name="TextBox 21"/>
-          <p:cNvSpPr txBox="1"/>
-          <p:nvPr/>
-        </p:nvSpPr>
-        <p:spPr>
-          <a:xfrm>
-            <a:off x="7114032" y="1993392"/>
-            <a:ext cx="4270248" cy="822960"/>
-          </a:xfrm>
-          <a:prstGeom prst="rect">
-            <a:avLst/>
-          </a:prstGeom>
-          <a:noFill/>
-        </p:spPr>
-        <p:txBody>
-          <a:bodyPr wrap="square" lIns="0" tIns="0" rIns="0" bIns="0" anchor="t">
-            <a:spAutoFit/>
-          </a:bodyPr>
-          <a:lstStyle/>
-          <a:p>
-            <a:pPr algn="l">
-              <a:lnSpc>
-                <a:spcPts val="1400"/>
-              </a:lnSpc>
-            </a:pPr>
-            <a:r>
-              <a:rPr sz="1050" b="0" i="0">
-                <a:solidFill>
-                  <a:srgbClr val="FFFFFF"/>
-                </a:solidFill>
-                <a:latin typeface="Consolas"/>
-              </a:rPr>
-              <a:t>var result = await</a:t>
-            </a:r>
-          </a:p>
-          <a:p>
-            <a:pPr algn="l">
-              <a:lnSpc>
-                <a:spcPts val="1400"/>
-              </a:lnSpc>
-            </a:pPr>
-            <a:r>
-              <a:rPr sz="1050" b="0" i="0">
-                <a:solidFill>
-                  <a:srgbClr val="FFFFFF"/>
-                </a:solidFill>
-                <a:latin typeface="Consolas"/>
-              </a:rPr>
-              <a:t>DevicePipeline.RunAsync(</a:t>
-            </a:r>
-          </a:p>
-          <a:p>
-            <a:pPr algn="l">
-              <a:lnSpc>
-                <a:spcPts val="1400"/>
-              </a:lnSpc>
-            </a:pPr>
-            <a:r>
-              <a:rPr sz="1050" b="0" i="0">
-                <a:solidFill>
-                  <a:srgbClr val="FFFFFF"/>
-                </a:solidFill>
-                <a:latin typeface="Consolas"/>
-              </a:rPr>
-              <a:t>    sqlReader, client, logic,</a:t>
-            </a:r>
-          </a:p>
-          <a:p>
-            <a:pPr algn="l">
-              <a:lnSpc>
-                <a:spcPts val="1400"/>
-              </a:lnSpc>
-            </a:pPr>
-            <a:r>
-              <a:rPr sz="1050" b="0" i="0">
-                <a:solidFill>
-                  <a:srgbClr val="FFFFFF"/>
-                </a:solidFill>
-                <a:latin typeface="Consolas"/>
-              </a:rPr>
-              <a:t>    projectCode: "A9998");</a:t>
-            </a:r>
-          </a:p>
-        </p:txBody>
-      </p:sp>
-      <p:sp>
-        <p:nvSpPr>
-          <p:cNvPr id="23" name="Rounded Rectangle 22"/>
-          <p:cNvSpPr/>
-          <p:nvPr/>
-        </p:nvSpPr>
-        <p:spPr>
-          <a:xfrm>
-            <a:off x="6858000" y="3145536"/>
-            <a:ext cx="4782312" cy="1234440"/>
-          </a:xfrm>
-          <a:prstGeom prst="roundRect">
-            <a:avLst>
-              <a:gd name="adj" fmla="val 5500"/>
-            </a:avLst>
-          </a:prstGeom>
-          <a:solidFill>
-            <a:srgbClr val="F3F5F7"/>
-          </a:solidFill>
-          <a:ln w="9525">
-            <a:solidFill>
-              <a:srgbClr val="DFE4E9"/>
-            </a:solidFill>
-          </a:ln>
-          <a:effectLst/>
-        </p:spPr>
-        <p:style>
-          <a:lnRef idx="1">
-            <a:schemeClr val="accent1"/>
-          </a:lnRef>
-          <a:fillRef idx="3">
-            <a:schemeClr val="accent1"/>
-          </a:fillRef>
-          <a:effectRef idx="2">
-            <a:schemeClr val="accent1"/>
-          </a:effectRef>
-          <a:fontRef idx="minor">
-            <a:schemeClr val="lt1"/>
-          </a:fontRef>
-        </p:style>
-        <p:txBody>
-          <a:bodyPr wrap="square" rtlCol="0" anchor="ctr"/>
-          <a:lstStyle/>
-          <a:p>
-            <a:pPr algn="ctr"/>
-            <a:endParaRPr/>
-          </a:p>
-        </p:txBody>
-      </p:sp>
-      <p:sp>
-        <p:nvSpPr>
-          <p:cNvPr id="24" name="TextBox 23"/>
-          <p:cNvSpPr txBox="1"/>
-          <p:nvPr/>
-        </p:nvSpPr>
-        <p:spPr>
-          <a:xfrm>
-            <a:off x="7114032" y="3346704"/>
-            <a:ext cx="4270248" cy="219456"/>
-          </a:xfrm>
-          <a:prstGeom prst="rect">
-            <a:avLst/>
-          </a:prstGeom>
-          <a:noFill/>
-        </p:spPr>
-        <p:txBody>
-          <a:bodyPr wrap="square" lIns="0" tIns="0" rIns="0" bIns="0" anchor="t">
-            <a:spAutoFit/>
-          </a:bodyPr>
-          <a:lstStyle/>
-          <a:p>
-            <a:pPr algn="l"/>
-            <a:r>
-              <a:rPr sz="1050" b="1" i="0" spc="180">
-                <a:solidFill>
-                  <a:srgbClr val="C46A24"/>
-                </a:solidFill>
-                <a:latin typeface="Calibri"/>
-              </a:rPr>
-              <a:t>RUNTIME REQUIREMENTS</a:t>
-            </a:r>
-          </a:p>
-        </p:txBody>
-      </p:sp>
-      <p:sp>
-        <p:nvSpPr>
-          <p:cNvPr id="25" name="TextBox 24"/>
-          <p:cNvSpPr txBox="1"/>
-          <p:nvPr/>
-        </p:nvSpPr>
-        <p:spPr>
-          <a:xfrm>
-            <a:off x="7114032" y="3639312"/>
-            <a:ext cx="4270248" cy="548640"/>
-          </a:xfrm>
-          <a:prstGeom prst="rect">
-            <a:avLst/>
-          </a:prstGeom>
-          <a:noFill/>
-        </p:spPr>
-        <p:txBody>
-          <a:bodyPr wrap="square" lIns="0" tIns="0" rIns="0" bIns="0" anchor="t">
-            <a:spAutoFit/>
-          </a:bodyPr>
-          <a:lstStyle/>
-          <a:p>
-            <a:pPr algn="l">
-              <a:lnSpc>
-                <a:spcPts val="1700"/>
-              </a:lnSpc>
-            </a:pPr>
-            <a:r>
-              <a:rPr sz="1200" b="0" i="0">
-                <a:solidFill>
-                  <a:srgbClr val="1B2430"/>
-                </a:solidFill>
-                <a:latin typeface="Calibri"/>
-              </a:rPr>
-              <a:t>.NET 10  ·  Windows x64</a:t>
-            </a:r>
-          </a:p>
-          <a:p>
-            <a:pPr algn="l">
-              <a:lnSpc>
-                <a:spcPts val="1700"/>
-              </a:lnSpc>
-            </a:pPr>
-            <a:r>
-              <a:rPr sz="1200" b="0" i="0">
-                <a:solidFill>
-                  <a:srgbClr val="1B2430"/>
-                </a:solidFill>
-                <a:latin typeface="Calibri"/>
-              </a:rPr>
-              <a:t>SQL Server  ·  ML service reachable</a:t>
-            </a:r>
-          </a:p>
-        </p:txBody>
-      </p:sp>
-      <p:sp>
-        <p:nvSpPr>
-          <p:cNvPr id="26" name="Rounded Rectangle 25"/>
-          <p:cNvSpPr/>
-          <p:nvPr/>
-        </p:nvSpPr>
-        <p:spPr>
-          <a:xfrm>
-            <a:off x="6858000" y="4507992"/>
-            <a:ext cx="4782312" cy="1325880"/>
-          </a:xfrm>
-          <a:prstGeom prst="roundRect">
-            <a:avLst>
-              <a:gd name="adj" fmla="val 5500"/>
-            </a:avLst>
-          </a:prstGeom>
-          <a:solidFill>
-            <a:srgbClr val="F3F5F7"/>
-          </a:solidFill>
-          <a:ln w="9525">
-            <a:solidFill>
-              <a:srgbClr val="DFE4E9"/>
-            </a:solidFill>
-          </a:ln>
-          <a:effectLst/>
-        </p:spPr>
-        <p:style>
-          <a:lnRef idx="1">
-            <a:schemeClr val="accent1"/>
-          </a:lnRef>
-          <a:fillRef idx="3">
-            <a:schemeClr val="accent1"/>
-          </a:fillRef>
-          <a:effectRef idx="2">
-            <a:schemeClr val="accent1"/>
-          </a:effectRef>
-          <a:fontRef idx="minor">
-            <a:schemeClr val="lt1"/>
-          </a:fontRef>
-        </p:style>
-        <p:txBody>
-          <a:bodyPr wrap="square" rtlCol="0" anchor="ctr"/>
-          <a:lstStyle/>
-          <a:p>
-            <a:pPr algn="ctr"/>
-            <a:endParaRPr/>
-          </a:p>
-        </p:txBody>
-      </p:sp>
-      <p:sp>
-        <p:nvSpPr>
-          <p:cNvPr id="27" name="TextBox 26"/>
-          <p:cNvSpPr txBox="1"/>
-          <p:nvPr/>
-        </p:nvSpPr>
-        <p:spPr>
-          <a:xfrm>
-            <a:off x="7114032" y="4709160"/>
-            <a:ext cx="4270248" cy="219456"/>
-          </a:xfrm>
-          <a:prstGeom prst="rect">
-            <a:avLst/>
-          </a:prstGeom>
-          <a:noFill/>
-        </p:spPr>
-        <p:txBody>
-          <a:bodyPr wrap="square" lIns="0" tIns="0" rIns="0" bIns="0" anchor="t">
-            <a:spAutoFit/>
-          </a:bodyPr>
-          <a:lstStyle/>
-          <a:p>
-            <a:pPr algn="l"/>
-            <a:r>
-              <a:rPr sz="1050" b="1" i="0" spc="180">
-                <a:solidFill>
-                  <a:srgbClr val="C46A24"/>
-                </a:solidFill>
-                <a:latin typeface="Calibri"/>
-              </a:rPr>
-              <a:t>HANDOVER PACKAGE DELIVERED</a:t>
-            </a:r>
-          </a:p>
-        </p:txBody>
-      </p:sp>
-      <p:sp>
-        <p:nvSpPr>
-          <p:cNvPr id="28" name="TextBox 27"/>
-          <p:cNvSpPr txBox="1"/>
-          <p:nvPr/>
-        </p:nvSpPr>
-        <p:spPr>
-          <a:xfrm>
-            <a:off x="7114032" y="5001768"/>
-            <a:ext cx="4270248" cy="685800"/>
-          </a:xfrm>
-          <a:prstGeom prst="rect">
-            <a:avLst/>
-          </a:prstGeom>
-          <a:noFill/>
-        </p:spPr>
-        <p:txBody>
-          <a:bodyPr wrap="square" lIns="0" tIns="0" rIns="0" bIns="0" anchor="t">
-            <a:spAutoFit/>
-          </a:bodyPr>
-          <a:lstStyle/>
-          <a:p>
-            <a:pPr algn="l">
-              <a:lnSpc>
-                <a:spcPts val="1600"/>
-              </a:lnSpc>
-            </a:pPr>
-            <a:r>
-              <a:rPr sz="1100" b="0" i="0">
-                <a:solidFill>
-                  <a:srgbClr val="4E5A66"/>
-                </a:solidFill>
-                <a:latin typeface="Calibri"/>
-              </a:rPr>
-              <a:t>2 DLLs + 22 dependencies</a:t>
-            </a:r>
-          </a:p>
-          <a:p>
-            <a:pPr algn="l">
-              <a:lnSpc>
-                <a:spcPts val="1600"/>
-              </a:lnSpc>
-            </a:pPr>
-            <a:r>
-              <a:rPr sz="1100" b="0" i="0">
-                <a:solidFill>
-                  <a:srgbClr val="4E5A66"/>
-                </a:solidFill>
-                <a:latin typeface="Calibri"/>
-              </a:rPr>
-              <a:t>Trained models and 3 SQL scripts</a:t>
-            </a:r>
-          </a:p>
-          <a:p>
-            <a:pPr algn="l">
-              <a:lnSpc>
-                <a:spcPts val="1600"/>
-              </a:lnSpc>
-            </a:pPr>
-            <a:r>
-              <a:rPr sz="1100" b="0" i="0">
-                <a:solidFill>
-                  <a:srgbClr val="4E5A66"/>
-                </a:solidFill>
-                <a:latin typeface="Calibri"/>
-              </a:rPr>
-              <a:t>API reference, quick guide, launcher</a:t>
-            </a:r>
-          </a:p>
-        </p:txBody>
-      </p:sp>
-      <p:sp>
-        <p:nvSpPr>
-          <p:cNvPr id="29" name="TextBox 28"/>
+              <a:t>No silent drift: the model changes only when deliberately retrained.</a:t>
+            </a:r>
+          </a:p>
+        </p:txBody>
+      </p:sp>
+      <p:sp>
+        <p:nvSpPr>
+          <p:cNvPr id="38" name="TextBox 37"/>
           <p:cNvSpPr txBox="1"/>
           <p:nvPr/>
         </p:nvSpPr>
@@ -4733,7 +5007,7 @@
       </p:sp>
       <p:sp>
         <p:nvSpPr>
-          <p:cNvPr id="30" name="TextBox 29"/>
+          <p:cNvPr id="39" name="TextBox 38"/>
           <p:cNvSpPr txBox="1"/>
           <p:nvPr/>
         </p:nvSpPr>
@@ -4761,7 +5035,7 @@
                 </a:solidFill>
                 <a:latin typeface="Calibri"/>
               </a:rPr>
-              <a:t>9</a:t>
+              <a:t>10</a:t>
             </a:r>
           </a:p>
         </p:txBody>
@@ -4775,1534 +5049,6 @@
 </file>
 
 <file path=ppt/slides/slide11.xml><?xml version="1.0" encoding="utf-8"?>
-<p:sld xmlns:a="http://schemas.openxmlformats.org/drawingml/2006/main" xmlns:r="http://schemas.openxmlformats.org/officeDocument/2006/relationships" xmlns:p="http://schemas.openxmlformats.org/presentationml/2006/main">
-  <p:cSld>
-    <p:spTree>
-      <p:nvGrpSpPr>
-        <p:cNvPr id="1" name=""/>
-        <p:cNvGrpSpPr/>
-        <p:nvPr/>
-      </p:nvGrpSpPr>
-      <p:grpSpPr>
-        <a:xfrm>
-          <a:off x="0" y="0"/>
-          <a:ext cx="0" cy="0"/>
-          <a:chOff x="0" y="0"/>
-          <a:chExt cx="0" cy="0"/>
-        </a:xfrm>
-      </p:grpSpPr>
-      <p:sp>
-        <p:nvSpPr>
-          <p:cNvPr id="2" name="TextBox 1"/>
-          <p:cNvSpPr txBox="1"/>
-          <p:nvPr/>
-        </p:nvSpPr>
-        <p:spPr>
-          <a:xfrm>
-            <a:off x="548640" y="402336"/>
-            <a:ext cx="10607040" cy="237744"/>
-          </a:xfrm>
-          <a:prstGeom prst="rect">
-            <a:avLst/>
-          </a:prstGeom>
-          <a:noFill/>
-        </p:spPr>
-        <p:txBody>
-          <a:bodyPr wrap="square" lIns="0" tIns="0" rIns="0" bIns="0" anchor="t">
-            <a:spAutoFit/>
-          </a:bodyPr>
-          <a:lstStyle/>
-          <a:p>
-            <a:pPr algn="l"/>
-            <a:r>
-              <a:rPr sz="1050" b="1" i="0" spc="200">
-                <a:solidFill>
-                  <a:srgbClr val="C46A24"/>
-                </a:solidFill>
-                <a:latin typeface="Calibri"/>
-              </a:rPr>
-              <a:t>07  ·  HUMAN IN THE LOOP</a:t>
-            </a:r>
-          </a:p>
-        </p:txBody>
-      </p:sp>
-      <p:sp>
-        <p:nvSpPr>
-          <p:cNvPr id="3" name="TextBox 2"/>
-          <p:cNvSpPr txBox="1"/>
-          <p:nvPr/>
-        </p:nvSpPr>
-        <p:spPr>
-          <a:xfrm>
-            <a:off x="548640" y="694944"/>
-            <a:ext cx="11091672" cy="475488"/>
-          </a:xfrm>
-          <a:prstGeom prst="rect">
-            <a:avLst/>
-          </a:prstGeom>
-          <a:noFill/>
-        </p:spPr>
-        <p:txBody>
-          <a:bodyPr wrap="square" lIns="0" tIns="0" rIns="0" bIns="0" anchor="t">
-            <a:spAutoFit/>
-          </a:bodyPr>
-          <a:lstStyle/>
-          <a:p>
-            <a:pPr algn="l"/>
-            <a:r>
-              <a:rPr sz="2900" b="1" i="0" dirty="0">
-                <a:solidFill>
-                  <a:srgbClr val="1B2430"/>
-                </a:solidFill>
-                <a:latin typeface="Cambria"/>
-              </a:rPr>
-              <a:t>The system improves as engineers correct it</a:t>
-            </a:r>
-          </a:p>
-        </p:txBody>
-      </p:sp>
-      <p:sp>
-        <p:nvSpPr>
-          <p:cNvPr id="4" name="Rounded Rectangle 3"/>
-          <p:cNvSpPr/>
-          <p:nvPr/>
-        </p:nvSpPr>
-        <p:spPr>
-          <a:xfrm>
-            <a:off x="548640" y="1371600"/>
-            <a:ext cx="2057400" cy="1234440"/>
-          </a:xfrm>
-          <a:prstGeom prst="roundRect">
-            <a:avLst>
-              <a:gd name="adj" fmla="val 5500"/>
-            </a:avLst>
-          </a:prstGeom>
-          <a:solidFill>
-            <a:srgbClr val="F3F5F7"/>
-          </a:solidFill>
-          <a:ln w="9525">
-            <a:solidFill>
-              <a:srgbClr val="DFE4E9"/>
-            </a:solidFill>
-          </a:ln>
-          <a:effectLst/>
-        </p:spPr>
-        <p:style>
-          <a:lnRef idx="1">
-            <a:schemeClr val="accent1"/>
-          </a:lnRef>
-          <a:fillRef idx="3">
-            <a:schemeClr val="accent1"/>
-          </a:fillRef>
-          <a:effectRef idx="2">
-            <a:schemeClr val="accent1"/>
-          </a:effectRef>
-          <a:fontRef idx="minor">
-            <a:schemeClr val="lt1"/>
-          </a:fontRef>
-        </p:style>
-        <p:txBody>
-          <a:bodyPr wrap="square" rtlCol="0" anchor="ctr"/>
-          <a:lstStyle/>
-          <a:p>
-            <a:pPr algn="ctr"/>
-            <a:endParaRPr/>
-          </a:p>
-        </p:txBody>
-      </p:sp>
-      <p:sp>
-        <p:nvSpPr>
-          <p:cNvPr id="5" name="Oval 4"/>
-          <p:cNvSpPr/>
-          <p:nvPr/>
-        </p:nvSpPr>
-        <p:spPr>
-          <a:xfrm>
-            <a:off x="749808" y="1572768"/>
-            <a:ext cx="329184" cy="329184"/>
-          </a:xfrm>
-          <a:prstGeom prst="ellipse">
-            <a:avLst/>
-          </a:prstGeom>
-          <a:solidFill>
-            <a:srgbClr val="1B2430"/>
-          </a:solidFill>
-          <a:ln>
-            <a:noFill/>
-          </a:ln>
-          <a:effectLst/>
-        </p:spPr>
-        <p:style>
-          <a:lnRef idx="1">
-            <a:schemeClr val="accent1"/>
-          </a:lnRef>
-          <a:fillRef idx="3">
-            <a:schemeClr val="accent1"/>
-          </a:fillRef>
-          <a:effectRef idx="2">
-            <a:schemeClr val="accent1"/>
-          </a:effectRef>
-          <a:fontRef idx="minor">
-            <a:schemeClr val="lt1"/>
-          </a:fontRef>
-        </p:style>
-        <p:txBody>
-          <a:bodyPr rtlCol="0" anchor="ctr"/>
-          <a:lstStyle/>
-          <a:p>
-            <a:pPr algn="ctr"/>
-            <a:endParaRPr/>
-          </a:p>
-        </p:txBody>
-      </p:sp>
-      <p:sp>
-        <p:nvSpPr>
-          <p:cNvPr id="6" name="TextBox 5"/>
-          <p:cNvSpPr txBox="1"/>
-          <p:nvPr/>
-        </p:nvSpPr>
-        <p:spPr>
-          <a:xfrm>
-            <a:off x="749808" y="1572768"/>
-            <a:ext cx="329184" cy="329184"/>
-          </a:xfrm>
-          <a:prstGeom prst="rect">
-            <a:avLst/>
-          </a:prstGeom>
-          <a:noFill/>
-        </p:spPr>
-        <p:txBody>
-          <a:bodyPr wrap="square" lIns="0" tIns="0" rIns="0" bIns="0" anchor="ctr">
-            <a:spAutoFit/>
-          </a:bodyPr>
-          <a:lstStyle/>
-          <a:p>
-            <a:pPr algn="ctr"/>
-            <a:r>
-              <a:rPr sz="1100" b="1" i="0">
-                <a:solidFill>
-                  <a:srgbClr val="FFFFFF"/>
-                </a:solidFill>
-                <a:latin typeface="Cambria"/>
-              </a:rPr>
-              <a:t>1</a:t>
-            </a:r>
-          </a:p>
-        </p:txBody>
-      </p:sp>
-      <p:sp>
-        <p:nvSpPr>
-          <p:cNvPr id="7" name="TextBox 6"/>
-          <p:cNvSpPr txBox="1"/>
-          <p:nvPr/>
-        </p:nvSpPr>
-        <p:spPr>
-          <a:xfrm>
-            <a:off x="749808" y="2011680"/>
-            <a:ext cx="1655064" cy="457200"/>
-          </a:xfrm>
-          <a:prstGeom prst="rect">
-            <a:avLst/>
-          </a:prstGeom>
-          <a:noFill/>
-        </p:spPr>
-        <p:txBody>
-          <a:bodyPr wrap="square" lIns="0" tIns="0" rIns="0" bIns="0" anchor="t">
-            <a:spAutoFit/>
-          </a:bodyPr>
-          <a:lstStyle/>
-          <a:p>
-            <a:pPr algn="l">
-              <a:lnSpc>
-                <a:spcPts val="1400"/>
-              </a:lnSpc>
-            </a:pPr>
-            <a:r>
-              <a:rPr sz="1100" b="1" i="0">
-                <a:solidFill>
-                  <a:srgbClr val="1B2430"/>
-                </a:solidFill>
-                <a:latin typeface="Calibri"/>
-              </a:rPr>
-              <a:t>Prediction is made</a:t>
-            </a:r>
-          </a:p>
-        </p:txBody>
-      </p:sp>
-      <p:sp>
-        <p:nvSpPr>
-          <p:cNvPr id="8" name="Isosceles Triangle 7"/>
-          <p:cNvSpPr/>
-          <p:nvPr/>
-        </p:nvSpPr>
-        <p:spPr>
-          <a:xfrm rot="5400000">
-            <a:off x="2633472" y="1915667"/>
-            <a:ext cx="146304" cy="146304"/>
-          </a:xfrm>
-          <a:prstGeom prst="triangle">
-            <a:avLst/>
-          </a:prstGeom>
-          <a:solidFill>
-            <a:srgbClr val="9EA8B2"/>
-          </a:solidFill>
-          <a:ln>
-            <a:noFill/>
-          </a:ln>
-          <a:effectLst/>
-        </p:spPr>
-        <p:style>
-          <a:lnRef idx="1">
-            <a:schemeClr val="accent1"/>
-          </a:lnRef>
-          <a:fillRef idx="3">
-            <a:schemeClr val="accent1"/>
-          </a:fillRef>
-          <a:effectRef idx="2">
-            <a:schemeClr val="accent1"/>
-          </a:effectRef>
-          <a:fontRef idx="minor">
-            <a:schemeClr val="lt1"/>
-          </a:fontRef>
-        </p:style>
-        <p:txBody>
-          <a:bodyPr rtlCol="0" anchor="ctr"/>
-          <a:lstStyle/>
-          <a:p>
-            <a:pPr algn="ctr"/>
-            <a:endParaRPr/>
-          </a:p>
-        </p:txBody>
-      </p:sp>
-      <p:sp>
-        <p:nvSpPr>
-          <p:cNvPr id="9" name="Rounded Rectangle 8"/>
-          <p:cNvSpPr/>
-          <p:nvPr/>
-        </p:nvSpPr>
-        <p:spPr>
-          <a:xfrm>
-            <a:off x="2807208" y="1371600"/>
-            <a:ext cx="2057400" cy="1234440"/>
-          </a:xfrm>
-          <a:prstGeom prst="roundRect">
-            <a:avLst>
-              <a:gd name="adj" fmla="val 5500"/>
-            </a:avLst>
-          </a:prstGeom>
-          <a:solidFill>
-            <a:srgbClr val="F3F5F7"/>
-          </a:solidFill>
-          <a:ln w="9525">
-            <a:solidFill>
-              <a:srgbClr val="DFE4E9"/>
-            </a:solidFill>
-          </a:ln>
-          <a:effectLst/>
-        </p:spPr>
-        <p:style>
-          <a:lnRef idx="1">
-            <a:schemeClr val="accent1"/>
-          </a:lnRef>
-          <a:fillRef idx="3">
-            <a:schemeClr val="accent1"/>
-          </a:fillRef>
-          <a:effectRef idx="2">
-            <a:schemeClr val="accent1"/>
-          </a:effectRef>
-          <a:fontRef idx="minor">
-            <a:schemeClr val="lt1"/>
-          </a:fontRef>
-        </p:style>
-        <p:txBody>
-          <a:bodyPr wrap="square" rtlCol="0" anchor="ctr"/>
-          <a:lstStyle/>
-          <a:p>
-            <a:pPr algn="ctr"/>
-            <a:endParaRPr/>
-          </a:p>
-        </p:txBody>
-      </p:sp>
-      <p:sp>
-        <p:nvSpPr>
-          <p:cNvPr id="10" name="Oval 9"/>
-          <p:cNvSpPr/>
-          <p:nvPr/>
-        </p:nvSpPr>
-        <p:spPr>
-          <a:xfrm>
-            <a:off x="3008376" y="1572768"/>
-            <a:ext cx="329184" cy="329184"/>
-          </a:xfrm>
-          <a:prstGeom prst="ellipse">
-            <a:avLst/>
-          </a:prstGeom>
-          <a:solidFill>
-            <a:srgbClr val="1B2430"/>
-          </a:solidFill>
-          <a:ln>
-            <a:noFill/>
-          </a:ln>
-          <a:effectLst/>
-        </p:spPr>
-        <p:style>
-          <a:lnRef idx="1">
-            <a:schemeClr val="accent1"/>
-          </a:lnRef>
-          <a:fillRef idx="3">
-            <a:schemeClr val="accent1"/>
-          </a:fillRef>
-          <a:effectRef idx="2">
-            <a:schemeClr val="accent1"/>
-          </a:effectRef>
-          <a:fontRef idx="minor">
-            <a:schemeClr val="lt1"/>
-          </a:fontRef>
-        </p:style>
-        <p:txBody>
-          <a:bodyPr rtlCol="0" anchor="ctr"/>
-          <a:lstStyle/>
-          <a:p>
-            <a:pPr algn="ctr"/>
-            <a:endParaRPr/>
-          </a:p>
-        </p:txBody>
-      </p:sp>
-      <p:sp>
-        <p:nvSpPr>
-          <p:cNvPr id="11" name="TextBox 10"/>
-          <p:cNvSpPr txBox="1"/>
-          <p:nvPr/>
-        </p:nvSpPr>
-        <p:spPr>
-          <a:xfrm>
-            <a:off x="3008376" y="1572768"/>
-            <a:ext cx="329184" cy="329184"/>
-          </a:xfrm>
-          <a:prstGeom prst="rect">
-            <a:avLst/>
-          </a:prstGeom>
-          <a:noFill/>
-        </p:spPr>
-        <p:txBody>
-          <a:bodyPr wrap="square" lIns="0" tIns="0" rIns="0" bIns="0" anchor="ctr">
-            <a:spAutoFit/>
-          </a:bodyPr>
-          <a:lstStyle/>
-          <a:p>
-            <a:pPr algn="ctr"/>
-            <a:r>
-              <a:rPr sz="1100" b="1" i="0">
-                <a:solidFill>
-                  <a:srgbClr val="FFFFFF"/>
-                </a:solidFill>
-                <a:latin typeface="Cambria"/>
-              </a:rPr>
-              <a:t>2</a:t>
-            </a:r>
-          </a:p>
-        </p:txBody>
-      </p:sp>
-      <p:sp>
-        <p:nvSpPr>
-          <p:cNvPr id="12" name="TextBox 11"/>
-          <p:cNvSpPr txBox="1"/>
-          <p:nvPr/>
-        </p:nvSpPr>
-        <p:spPr>
-          <a:xfrm>
-            <a:off x="3008376" y="2011680"/>
-            <a:ext cx="1655064" cy="457200"/>
-          </a:xfrm>
-          <a:prstGeom prst="rect">
-            <a:avLst/>
-          </a:prstGeom>
-          <a:noFill/>
-        </p:spPr>
-        <p:txBody>
-          <a:bodyPr wrap="square" lIns="0" tIns="0" rIns="0" bIns="0" anchor="t">
-            <a:spAutoFit/>
-          </a:bodyPr>
-          <a:lstStyle/>
-          <a:p>
-            <a:pPr algn="l">
-              <a:lnSpc>
-                <a:spcPts val="1400"/>
-              </a:lnSpc>
-            </a:pPr>
-            <a:r>
-              <a:rPr sz="1100" b="1" i="0">
-                <a:solidFill>
-                  <a:srgbClr val="1B2430"/>
-                </a:solidFill>
-                <a:latin typeface="Calibri"/>
-              </a:rPr>
-              <a:t>Low confidence goes to the review queue</a:t>
-            </a:r>
-          </a:p>
-        </p:txBody>
-      </p:sp>
-      <p:sp>
-        <p:nvSpPr>
-          <p:cNvPr id="13" name="Isosceles Triangle 12"/>
-          <p:cNvSpPr/>
-          <p:nvPr/>
-        </p:nvSpPr>
-        <p:spPr>
-          <a:xfrm rot="5400000">
-            <a:off x="4892040" y="1915667"/>
-            <a:ext cx="146304" cy="146304"/>
-          </a:xfrm>
-          <a:prstGeom prst="triangle">
-            <a:avLst/>
-          </a:prstGeom>
-          <a:solidFill>
-            <a:srgbClr val="9EA8B2"/>
-          </a:solidFill>
-          <a:ln>
-            <a:noFill/>
-          </a:ln>
-          <a:effectLst/>
-        </p:spPr>
-        <p:style>
-          <a:lnRef idx="1">
-            <a:schemeClr val="accent1"/>
-          </a:lnRef>
-          <a:fillRef idx="3">
-            <a:schemeClr val="accent1"/>
-          </a:fillRef>
-          <a:effectRef idx="2">
-            <a:schemeClr val="accent1"/>
-          </a:effectRef>
-          <a:fontRef idx="minor">
-            <a:schemeClr val="lt1"/>
-          </a:fontRef>
-        </p:style>
-        <p:txBody>
-          <a:bodyPr rtlCol="0" anchor="ctr"/>
-          <a:lstStyle/>
-          <a:p>
-            <a:pPr algn="ctr"/>
-            <a:endParaRPr/>
-          </a:p>
-        </p:txBody>
-      </p:sp>
-      <p:sp>
-        <p:nvSpPr>
-          <p:cNvPr id="14" name="Rounded Rectangle 13"/>
-          <p:cNvSpPr/>
-          <p:nvPr/>
-        </p:nvSpPr>
-        <p:spPr>
-          <a:xfrm>
-            <a:off x="5065776" y="1371600"/>
-            <a:ext cx="2057400" cy="1234440"/>
-          </a:xfrm>
-          <a:prstGeom prst="roundRect">
-            <a:avLst>
-              <a:gd name="adj" fmla="val 5500"/>
-            </a:avLst>
-          </a:prstGeom>
-          <a:solidFill>
-            <a:srgbClr val="F3F5F7"/>
-          </a:solidFill>
-          <a:ln w="9525">
-            <a:solidFill>
-              <a:srgbClr val="DFE4E9"/>
-            </a:solidFill>
-          </a:ln>
-          <a:effectLst/>
-        </p:spPr>
-        <p:style>
-          <a:lnRef idx="1">
-            <a:schemeClr val="accent1"/>
-          </a:lnRef>
-          <a:fillRef idx="3">
-            <a:schemeClr val="accent1"/>
-          </a:fillRef>
-          <a:effectRef idx="2">
-            <a:schemeClr val="accent1"/>
-          </a:effectRef>
-          <a:fontRef idx="minor">
-            <a:schemeClr val="lt1"/>
-          </a:fontRef>
-        </p:style>
-        <p:txBody>
-          <a:bodyPr wrap="square" rtlCol="0" anchor="ctr"/>
-          <a:lstStyle/>
-          <a:p>
-            <a:pPr algn="ctr"/>
-            <a:endParaRPr/>
-          </a:p>
-        </p:txBody>
-      </p:sp>
-      <p:sp>
-        <p:nvSpPr>
-          <p:cNvPr id="15" name="Oval 14"/>
-          <p:cNvSpPr/>
-          <p:nvPr/>
-        </p:nvSpPr>
-        <p:spPr>
-          <a:xfrm>
-            <a:off x="5266944" y="1572768"/>
-            <a:ext cx="329184" cy="329184"/>
-          </a:xfrm>
-          <a:prstGeom prst="ellipse">
-            <a:avLst/>
-          </a:prstGeom>
-          <a:solidFill>
-            <a:srgbClr val="1B2430"/>
-          </a:solidFill>
-          <a:ln>
-            <a:noFill/>
-          </a:ln>
-          <a:effectLst/>
-        </p:spPr>
-        <p:style>
-          <a:lnRef idx="1">
-            <a:schemeClr val="accent1"/>
-          </a:lnRef>
-          <a:fillRef idx="3">
-            <a:schemeClr val="accent1"/>
-          </a:fillRef>
-          <a:effectRef idx="2">
-            <a:schemeClr val="accent1"/>
-          </a:effectRef>
-          <a:fontRef idx="minor">
-            <a:schemeClr val="lt1"/>
-          </a:fontRef>
-        </p:style>
-        <p:txBody>
-          <a:bodyPr rtlCol="0" anchor="ctr"/>
-          <a:lstStyle/>
-          <a:p>
-            <a:pPr algn="ctr"/>
-            <a:endParaRPr/>
-          </a:p>
-        </p:txBody>
-      </p:sp>
-      <p:sp>
-        <p:nvSpPr>
-          <p:cNvPr id="16" name="TextBox 15"/>
-          <p:cNvSpPr txBox="1"/>
-          <p:nvPr/>
-        </p:nvSpPr>
-        <p:spPr>
-          <a:xfrm>
-            <a:off x="5266944" y="1572768"/>
-            <a:ext cx="329184" cy="329184"/>
-          </a:xfrm>
-          <a:prstGeom prst="rect">
-            <a:avLst/>
-          </a:prstGeom>
-          <a:noFill/>
-        </p:spPr>
-        <p:txBody>
-          <a:bodyPr wrap="square" lIns="0" tIns="0" rIns="0" bIns="0" anchor="ctr">
-            <a:spAutoFit/>
-          </a:bodyPr>
-          <a:lstStyle/>
-          <a:p>
-            <a:pPr algn="ctr"/>
-            <a:r>
-              <a:rPr sz="1100" b="1" i="0">
-                <a:solidFill>
-                  <a:srgbClr val="FFFFFF"/>
-                </a:solidFill>
-                <a:latin typeface="Cambria"/>
-              </a:rPr>
-              <a:t>3</a:t>
-            </a:r>
-          </a:p>
-        </p:txBody>
-      </p:sp>
-      <p:sp>
-        <p:nvSpPr>
-          <p:cNvPr id="17" name="TextBox 16"/>
-          <p:cNvSpPr txBox="1"/>
-          <p:nvPr/>
-        </p:nvSpPr>
-        <p:spPr>
-          <a:xfrm>
-            <a:off x="5266944" y="2011680"/>
-            <a:ext cx="1655064" cy="457200"/>
-          </a:xfrm>
-          <a:prstGeom prst="rect">
-            <a:avLst/>
-          </a:prstGeom>
-          <a:noFill/>
-        </p:spPr>
-        <p:txBody>
-          <a:bodyPr wrap="square" lIns="0" tIns="0" rIns="0" bIns="0" anchor="t">
-            <a:spAutoFit/>
-          </a:bodyPr>
-          <a:lstStyle/>
-          <a:p>
-            <a:pPr algn="l">
-              <a:lnSpc>
-                <a:spcPts val="1400"/>
-              </a:lnSpc>
-            </a:pPr>
-            <a:r>
-              <a:rPr sz="1100" b="1" i="0">
-                <a:solidFill>
-                  <a:srgbClr val="1B2430"/>
-                </a:solidFill>
-                <a:latin typeface="Calibri"/>
-              </a:rPr>
-              <a:t>Engineer assigns the correct value</a:t>
-            </a:r>
-          </a:p>
-        </p:txBody>
-      </p:sp>
-      <p:sp>
-        <p:nvSpPr>
-          <p:cNvPr id="18" name="Isosceles Triangle 17"/>
-          <p:cNvSpPr/>
-          <p:nvPr/>
-        </p:nvSpPr>
-        <p:spPr>
-          <a:xfrm rot="5400000">
-            <a:off x="7150608" y="1915667"/>
-            <a:ext cx="146304" cy="146304"/>
-          </a:xfrm>
-          <a:prstGeom prst="triangle">
-            <a:avLst/>
-          </a:prstGeom>
-          <a:solidFill>
-            <a:srgbClr val="9EA8B2"/>
-          </a:solidFill>
-          <a:ln>
-            <a:noFill/>
-          </a:ln>
-          <a:effectLst/>
-        </p:spPr>
-        <p:style>
-          <a:lnRef idx="1">
-            <a:schemeClr val="accent1"/>
-          </a:lnRef>
-          <a:fillRef idx="3">
-            <a:schemeClr val="accent1"/>
-          </a:fillRef>
-          <a:effectRef idx="2">
-            <a:schemeClr val="accent1"/>
-          </a:effectRef>
-          <a:fontRef idx="minor">
-            <a:schemeClr val="lt1"/>
-          </a:fontRef>
-        </p:style>
-        <p:txBody>
-          <a:bodyPr rtlCol="0" anchor="ctr"/>
-          <a:lstStyle/>
-          <a:p>
-            <a:pPr algn="ctr"/>
-            <a:endParaRPr/>
-          </a:p>
-        </p:txBody>
-      </p:sp>
-      <p:sp>
-        <p:nvSpPr>
-          <p:cNvPr id="19" name="Rounded Rectangle 18"/>
-          <p:cNvSpPr/>
-          <p:nvPr/>
-        </p:nvSpPr>
-        <p:spPr>
-          <a:xfrm>
-            <a:off x="7324344" y="1371600"/>
-            <a:ext cx="2057400" cy="1234440"/>
-          </a:xfrm>
-          <a:prstGeom prst="roundRect">
-            <a:avLst>
-              <a:gd name="adj" fmla="val 5500"/>
-            </a:avLst>
-          </a:prstGeom>
-          <a:solidFill>
-            <a:srgbClr val="F3F5F7"/>
-          </a:solidFill>
-          <a:ln w="9525">
-            <a:solidFill>
-              <a:srgbClr val="DFE4E9"/>
-            </a:solidFill>
-          </a:ln>
-          <a:effectLst/>
-        </p:spPr>
-        <p:style>
-          <a:lnRef idx="1">
-            <a:schemeClr val="accent1"/>
-          </a:lnRef>
-          <a:fillRef idx="3">
-            <a:schemeClr val="accent1"/>
-          </a:fillRef>
-          <a:effectRef idx="2">
-            <a:schemeClr val="accent1"/>
-          </a:effectRef>
-          <a:fontRef idx="minor">
-            <a:schemeClr val="lt1"/>
-          </a:fontRef>
-        </p:style>
-        <p:txBody>
-          <a:bodyPr wrap="square" rtlCol="0" anchor="ctr"/>
-          <a:lstStyle/>
-          <a:p>
-            <a:pPr algn="ctr"/>
-            <a:endParaRPr/>
-          </a:p>
-        </p:txBody>
-      </p:sp>
-      <p:sp>
-        <p:nvSpPr>
-          <p:cNvPr id="20" name="Oval 19"/>
-          <p:cNvSpPr/>
-          <p:nvPr/>
-        </p:nvSpPr>
-        <p:spPr>
-          <a:xfrm>
-            <a:off x="7525512" y="1572768"/>
-            <a:ext cx="329184" cy="329184"/>
-          </a:xfrm>
-          <a:prstGeom prst="ellipse">
-            <a:avLst/>
-          </a:prstGeom>
-          <a:solidFill>
-            <a:srgbClr val="1B2430"/>
-          </a:solidFill>
-          <a:ln>
-            <a:noFill/>
-          </a:ln>
-          <a:effectLst/>
-        </p:spPr>
-        <p:style>
-          <a:lnRef idx="1">
-            <a:schemeClr val="accent1"/>
-          </a:lnRef>
-          <a:fillRef idx="3">
-            <a:schemeClr val="accent1"/>
-          </a:fillRef>
-          <a:effectRef idx="2">
-            <a:schemeClr val="accent1"/>
-          </a:effectRef>
-          <a:fontRef idx="minor">
-            <a:schemeClr val="lt1"/>
-          </a:fontRef>
-        </p:style>
-        <p:txBody>
-          <a:bodyPr rtlCol="0" anchor="ctr"/>
-          <a:lstStyle/>
-          <a:p>
-            <a:pPr algn="ctr"/>
-            <a:endParaRPr/>
-          </a:p>
-        </p:txBody>
-      </p:sp>
-      <p:sp>
-        <p:nvSpPr>
-          <p:cNvPr id="21" name="TextBox 20"/>
-          <p:cNvSpPr txBox="1"/>
-          <p:nvPr/>
-        </p:nvSpPr>
-        <p:spPr>
-          <a:xfrm>
-            <a:off x="7525512" y="1572768"/>
-            <a:ext cx="329184" cy="329184"/>
-          </a:xfrm>
-          <a:prstGeom prst="rect">
-            <a:avLst/>
-          </a:prstGeom>
-          <a:noFill/>
-        </p:spPr>
-        <p:txBody>
-          <a:bodyPr wrap="square" lIns="0" tIns="0" rIns="0" bIns="0" anchor="ctr">
-            <a:spAutoFit/>
-          </a:bodyPr>
-          <a:lstStyle/>
-          <a:p>
-            <a:pPr algn="ctr"/>
-            <a:r>
-              <a:rPr sz="1100" b="1" i="0">
-                <a:solidFill>
-                  <a:srgbClr val="FFFFFF"/>
-                </a:solidFill>
-                <a:latin typeface="Cambria"/>
-              </a:rPr>
-              <a:t>4</a:t>
-            </a:r>
-          </a:p>
-        </p:txBody>
-      </p:sp>
-      <p:sp>
-        <p:nvSpPr>
-          <p:cNvPr id="22" name="TextBox 21"/>
-          <p:cNvSpPr txBox="1"/>
-          <p:nvPr/>
-        </p:nvSpPr>
-        <p:spPr>
-          <a:xfrm>
-            <a:off x="7525512" y="2011680"/>
-            <a:ext cx="1655064" cy="457200"/>
-          </a:xfrm>
-          <a:prstGeom prst="rect">
-            <a:avLst/>
-          </a:prstGeom>
-          <a:noFill/>
-        </p:spPr>
-        <p:txBody>
-          <a:bodyPr wrap="square" lIns="0" tIns="0" rIns="0" bIns="0" anchor="t">
-            <a:spAutoFit/>
-          </a:bodyPr>
-          <a:lstStyle/>
-          <a:p>
-            <a:pPr algn="l">
-              <a:lnSpc>
-                <a:spcPts val="1400"/>
-              </a:lnSpc>
-            </a:pPr>
-            <a:r>
-              <a:rPr sz="1100" b="1" i="0">
-                <a:solidFill>
-                  <a:srgbClr val="1B2430"/>
-                </a:solidFill>
-                <a:latin typeface="Calibri"/>
-              </a:rPr>
-              <a:t>The dictionary is updated</a:t>
-            </a:r>
-          </a:p>
-        </p:txBody>
-      </p:sp>
-      <p:sp>
-        <p:nvSpPr>
-          <p:cNvPr id="23" name="Isosceles Triangle 22"/>
-          <p:cNvSpPr/>
-          <p:nvPr/>
-        </p:nvSpPr>
-        <p:spPr>
-          <a:xfrm rot="5400000">
-            <a:off x="9409176" y="1915667"/>
-            <a:ext cx="146304" cy="146304"/>
-          </a:xfrm>
-          <a:prstGeom prst="triangle">
-            <a:avLst/>
-          </a:prstGeom>
-          <a:solidFill>
-            <a:srgbClr val="9EA8B2"/>
-          </a:solidFill>
-          <a:ln>
-            <a:noFill/>
-          </a:ln>
-          <a:effectLst/>
-        </p:spPr>
-        <p:style>
-          <a:lnRef idx="1">
-            <a:schemeClr val="accent1"/>
-          </a:lnRef>
-          <a:fillRef idx="3">
-            <a:schemeClr val="accent1"/>
-          </a:fillRef>
-          <a:effectRef idx="2">
-            <a:schemeClr val="accent1"/>
-          </a:effectRef>
-          <a:fontRef idx="minor">
-            <a:schemeClr val="lt1"/>
-          </a:fontRef>
-        </p:style>
-        <p:txBody>
-          <a:bodyPr rtlCol="0" anchor="ctr"/>
-          <a:lstStyle/>
-          <a:p>
-            <a:pPr algn="ctr"/>
-            <a:endParaRPr/>
-          </a:p>
-        </p:txBody>
-      </p:sp>
-      <p:sp>
-        <p:nvSpPr>
-          <p:cNvPr id="24" name="Rounded Rectangle 23"/>
-          <p:cNvSpPr/>
-          <p:nvPr/>
-        </p:nvSpPr>
-        <p:spPr>
-          <a:xfrm>
-            <a:off x="9582912" y="1371600"/>
-            <a:ext cx="2057400" cy="1234440"/>
-          </a:xfrm>
-          <a:prstGeom prst="roundRect">
-            <a:avLst>
-              <a:gd name="adj" fmla="val 5500"/>
-            </a:avLst>
-          </a:prstGeom>
-          <a:solidFill>
-            <a:srgbClr val="F3F5F7"/>
-          </a:solidFill>
-          <a:ln w="9525">
-            <a:solidFill>
-              <a:srgbClr val="DFE4E9"/>
-            </a:solidFill>
-          </a:ln>
-          <a:effectLst/>
-        </p:spPr>
-        <p:style>
-          <a:lnRef idx="1">
-            <a:schemeClr val="accent1"/>
-          </a:lnRef>
-          <a:fillRef idx="3">
-            <a:schemeClr val="accent1"/>
-          </a:fillRef>
-          <a:effectRef idx="2">
-            <a:schemeClr val="accent1"/>
-          </a:effectRef>
-          <a:fontRef idx="minor">
-            <a:schemeClr val="lt1"/>
-          </a:fontRef>
-        </p:style>
-        <p:txBody>
-          <a:bodyPr wrap="square" rtlCol="0" anchor="ctr"/>
-          <a:lstStyle/>
-          <a:p>
-            <a:pPr algn="ctr"/>
-            <a:endParaRPr/>
-          </a:p>
-        </p:txBody>
-      </p:sp>
-      <p:sp>
-        <p:nvSpPr>
-          <p:cNvPr id="25" name="Oval 24"/>
-          <p:cNvSpPr/>
-          <p:nvPr/>
-        </p:nvSpPr>
-        <p:spPr>
-          <a:xfrm>
-            <a:off x="9784080" y="1572768"/>
-            <a:ext cx="329184" cy="329184"/>
-          </a:xfrm>
-          <a:prstGeom prst="ellipse">
-            <a:avLst/>
-          </a:prstGeom>
-          <a:solidFill>
-            <a:srgbClr val="1B2430"/>
-          </a:solidFill>
-          <a:ln>
-            <a:noFill/>
-          </a:ln>
-          <a:effectLst/>
-        </p:spPr>
-        <p:style>
-          <a:lnRef idx="1">
-            <a:schemeClr val="accent1"/>
-          </a:lnRef>
-          <a:fillRef idx="3">
-            <a:schemeClr val="accent1"/>
-          </a:fillRef>
-          <a:effectRef idx="2">
-            <a:schemeClr val="accent1"/>
-          </a:effectRef>
-          <a:fontRef idx="minor">
-            <a:schemeClr val="lt1"/>
-          </a:fontRef>
-        </p:style>
-        <p:txBody>
-          <a:bodyPr rtlCol="0" anchor="ctr"/>
-          <a:lstStyle/>
-          <a:p>
-            <a:pPr algn="ctr"/>
-            <a:endParaRPr/>
-          </a:p>
-        </p:txBody>
-      </p:sp>
-      <p:sp>
-        <p:nvSpPr>
-          <p:cNvPr id="26" name="TextBox 25"/>
-          <p:cNvSpPr txBox="1"/>
-          <p:nvPr/>
-        </p:nvSpPr>
-        <p:spPr>
-          <a:xfrm>
-            <a:off x="9784080" y="1572768"/>
-            <a:ext cx="329184" cy="329184"/>
-          </a:xfrm>
-          <a:prstGeom prst="rect">
-            <a:avLst/>
-          </a:prstGeom>
-          <a:noFill/>
-        </p:spPr>
-        <p:txBody>
-          <a:bodyPr wrap="square" lIns="0" tIns="0" rIns="0" bIns="0" anchor="ctr">
-            <a:spAutoFit/>
-          </a:bodyPr>
-          <a:lstStyle/>
-          <a:p>
-            <a:pPr algn="ctr"/>
-            <a:r>
-              <a:rPr sz="1100" b="1" i="0">
-                <a:solidFill>
-                  <a:srgbClr val="FFFFFF"/>
-                </a:solidFill>
-                <a:latin typeface="Cambria"/>
-              </a:rPr>
-              <a:t>5</a:t>
-            </a:r>
-          </a:p>
-        </p:txBody>
-      </p:sp>
-      <p:sp>
-        <p:nvSpPr>
-          <p:cNvPr id="27" name="TextBox 26"/>
-          <p:cNvSpPr txBox="1"/>
-          <p:nvPr/>
-        </p:nvSpPr>
-        <p:spPr>
-          <a:xfrm>
-            <a:off x="9784080" y="2011680"/>
-            <a:ext cx="1655064" cy="457200"/>
-          </a:xfrm>
-          <a:prstGeom prst="rect">
-            <a:avLst/>
-          </a:prstGeom>
-          <a:noFill/>
-        </p:spPr>
-        <p:txBody>
-          <a:bodyPr wrap="square" lIns="0" tIns="0" rIns="0" bIns="0" anchor="t">
-            <a:spAutoFit/>
-          </a:bodyPr>
-          <a:lstStyle/>
-          <a:p>
-            <a:pPr algn="l">
-              <a:lnSpc>
-                <a:spcPts val="1400"/>
-              </a:lnSpc>
-            </a:pPr>
-            <a:r>
-              <a:rPr sz="1100" b="1" i="0">
-                <a:solidFill>
-                  <a:srgbClr val="1B2430"/>
-                </a:solidFill>
-                <a:latin typeface="Calibri"/>
-              </a:rPr>
-              <a:t>The next run already knows</a:t>
-            </a:r>
-          </a:p>
-        </p:txBody>
-      </p:sp>
-      <p:sp>
-        <p:nvSpPr>
-          <p:cNvPr id="28" name="Rounded Rectangle 27"/>
-          <p:cNvSpPr/>
-          <p:nvPr/>
-        </p:nvSpPr>
-        <p:spPr>
-          <a:xfrm>
-            <a:off x="548640" y="2926080"/>
-            <a:ext cx="5440680" cy="1783080"/>
-          </a:xfrm>
-          <a:prstGeom prst="roundRect">
-            <a:avLst>
-              <a:gd name="adj" fmla="val 5500"/>
-            </a:avLst>
-          </a:prstGeom>
-          <a:solidFill>
-            <a:srgbClr val="EAF2EE"/>
-          </a:solidFill>
-          <a:ln w="9525">
-            <a:solidFill>
-              <a:srgbClr val="DFE4E9"/>
-            </a:solidFill>
-          </a:ln>
-          <a:effectLst/>
-        </p:spPr>
-        <p:style>
-          <a:lnRef idx="1">
-            <a:schemeClr val="accent1"/>
-          </a:lnRef>
-          <a:fillRef idx="3">
-            <a:schemeClr val="accent1"/>
-          </a:fillRef>
-          <a:effectRef idx="2">
-            <a:schemeClr val="accent1"/>
-          </a:effectRef>
-          <a:fontRef idx="minor">
-            <a:schemeClr val="lt1"/>
-          </a:fontRef>
-        </p:style>
-        <p:txBody>
-          <a:bodyPr wrap="square" rtlCol="0" anchor="ctr"/>
-          <a:lstStyle/>
-          <a:p>
-            <a:pPr algn="ctr"/>
-            <a:endParaRPr/>
-          </a:p>
-        </p:txBody>
-      </p:sp>
-      <p:sp>
-        <p:nvSpPr>
-          <p:cNvPr id="29" name="TextBox 28"/>
-          <p:cNvSpPr txBox="1"/>
-          <p:nvPr/>
-        </p:nvSpPr>
-        <p:spPr>
-          <a:xfrm>
-            <a:off x="822960" y="3145536"/>
-            <a:ext cx="4892040" cy="161583"/>
-          </a:xfrm>
-          <a:prstGeom prst="rect">
-            <a:avLst/>
-          </a:prstGeom>
-          <a:noFill/>
-        </p:spPr>
-        <p:txBody>
-          <a:bodyPr wrap="square" lIns="0" tIns="0" rIns="0" bIns="0" anchor="t">
-            <a:spAutoFit/>
-          </a:bodyPr>
-          <a:lstStyle/>
-          <a:p>
-            <a:pPr algn="l"/>
-            <a:r>
-              <a:rPr sz="1050" b="1" i="0" spc="180" dirty="0">
-                <a:solidFill>
-                  <a:srgbClr val="2E7D63"/>
-                </a:solidFill>
-                <a:latin typeface="Calibri"/>
-              </a:rPr>
-              <a:t>DEVICE TYPE </a:t>
-            </a:r>
-          </a:p>
-        </p:txBody>
-      </p:sp>
-      <p:sp>
-        <p:nvSpPr>
-          <p:cNvPr id="30" name="TextBox 29"/>
-          <p:cNvSpPr txBox="1"/>
-          <p:nvPr/>
-        </p:nvSpPr>
-        <p:spPr>
-          <a:xfrm>
-            <a:off x="822960" y="3456432"/>
-            <a:ext cx="4892040" cy="567912"/>
-          </a:xfrm>
-          <a:prstGeom prst="rect">
-            <a:avLst/>
-          </a:prstGeom>
-          <a:noFill/>
-        </p:spPr>
-        <p:txBody>
-          <a:bodyPr wrap="square" lIns="0" tIns="0" rIns="0" bIns="0" anchor="t">
-            <a:spAutoFit/>
-          </a:bodyPr>
-          <a:lstStyle/>
-          <a:p>
-            <a:pPr algn="l">
-              <a:lnSpc>
-                <a:spcPts val="1500"/>
-              </a:lnSpc>
-            </a:pPr>
-            <a:r>
-              <a:rPr sz="1150" b="0" i="0" dirty="0">
-                <a:solidFill>
-                  <a:srgbClr val="4E5A66"/>
-                </a:solidFill>
-                <a:latin typeface="Calibri"/>
-              </a:rPr>
-              <a:t>The correction is written straight into the prefix dictionary and saved atomically with an automatic backup. The very next prediction uses it</a:t>
-            </a:r>
-            <a:r>
-              <a:rPr lang="en-MY" sz="1150" b="0" i="0" dirty="0">
-                <a:solidFill>
-                  <a:srgbClr val="4E5A66"/>
-                </a:solidFill>
-                <a:latin typeface="Calibri"/>
-              </a:rPr>
-              <a:t>,</a:t>
-            </a:r>
-            <a:r>
-              <a:rPr sz="1150" b="0" i="0" dirty="0">
-                <a:solidFill>
-                  <a:srgbClr val="4E5A66"/>
-                </a:solidFill>
-                <a:latin typeface="Calibri"/>
-              </a:rPr>
-              <a:t> there is no model to retrain.</a:t>
-            </a:r>
-          </a:p>
-        </p:txBody>
-      </p:sp>
-      <p:sp>
-        <p:nvSpPr>
-          <p:cNvPr id="31" name="TextBox 30"/>
-          <p:cNvSpPr txBox="1"/>
-          <p:nvPr/>
-        </p:nvSpPr>
-        <p:spPr>
-          <a:xfrm>
-            <a:off x="822960" y="4261104"/>
-            <a:ext cx="4892040" cy="310896"/>
-          </a:xfrm>
-          <a:prstGeom prst="rect">
-            <a:avLst/>
-          </a:prstGeom>
-          <a:noFill/>
-        </p:spPr>
-        <p:txBody>
-          <a:bodyPr wrap="square" lIns="0" tIns="0" rIns="0" bIns="0" anchor="t">
-            <a:spAutoFit/>
-          </a:bodyPr>
-          <a:lstStyle/>
-          <a:p>
-            <a:pPr algn="l"/>
-            <a:r>
-              <a:rPr sz="1050" b="0" i="1">
-                <a:solidFill>
-                  <a:srgbClr val="7A8792"/>
-                </a:solidFill>
-                <a:latin typeface="Calibri"/>
-              </a:rPr>
-              <a:t>Buffered flush every 50 records; manual assignments persist at once.</a:t>
-            </a:r>
-          </a:p>
-        </p:txBody>
-      </p:sp>
-      <p:sp>
-        <p:nvSpPr>
-          <p:cNvPr id="32" name="Rounded Rectangle 31"/>
-          <p:cNvSpPr/>
-          <p:nvPr/>
-        </p:nvSpPr>
-        <p:spPr>
-          <a:xfrm>
-            <a:off x="6199632" y="2926080"/>
-            <a:ext cx="5440680" cy="1783080"/>
-          </a:xfrm>
-          <a:prstGeom prst="roundRect">
-            <a:avLst>
-              <a:gd name="adj" fmla="val 5500"/>
-            </a:avLst>
-          </a:prstGeom>
-          <a:solidFill>
-            <a:srgbClr val="FAF1E8"/>
-          </a:solidFill>
-          <a:ln w="9525">
-            <a:solidFill>
-              <a:srgbClr val="DFE4E9"/>
-            </a:solidFill>
-          </a:ln>
-          <a:effectLst/>
-        </p:spPr>
-        <p:style>
-          <a:lnRef idx="1">
-            <a:schemeClr val="accent1"/>
-          </a:lnRef>
-          <a:fillRef idx="3">
-            <a:schemeClr val="accent1"/>
-          </a:fillRef>
-          <a:effectRef idx="2">
-            <a:schemeClr val="accent1"/>
-          </a:effectRef>
-          <a:fontRef idx="minor">
-            <a:schemeClr val="lt1"/>
-          </a:fontRef>
-        </p:style>
-        <p:txBody>
-          <a:bodyPr wrap="square" rtlCol="0" anchor="ctr"/>
-          <a:lstStyle/>
-          <a:p>
-            <a:pPr algn="ctr"/>
-            <a:endParaRPr/>
-          </a:p>
-        </p:txBody>
-      </p:sp>
-      <p:sp>
-        <p:nvSpPr>
-          <p:cNvPr id="33" name="TextBox 32"/>
-          <p:cNvSpPr txBox="1"/>
-          <p:nvPr/>
-        </p:nvSpPr>
-        <p:spPr>
-          <a:xfrm>
-            <a:off x="6473952" y="3145536"/>
-            <a:ext cx="4892040" cy="219456"/>
-          </a:xfrm>
-          <a:prstGeom prst="rect">
-            <a:avLst/>
-          </a:prstGeom>
-          <a:noFill/>
-        </p:spPr>
-        <p:txBody>
-          <a:bodyPr wrap="square" lIns="0" tIns="0" rIns="0" bIns="0" anchor="t">
-            <a:spAutoFit/>
-          </a:bodyPr>
-          <a:lstStyle/>
-          <a:p>
-            <a:pPr algn="l"/>
-            <a:r>
-              <a:rPr sz="1050" b="1" i="0" spc="180">
-                <a:solidFill>
-                  <a:srgbClr val="C46A24"/>
-                </a:solidFill>
-                <a:latin typeface="Calibri"/>
-              </a:rPr>
-              <a:t>SECTION &amp; CLUSTER — QUEUED FOR RETRAINING</a:t>
-            </a:r>
-          </a:p>
-        </p:txBody>
-      </p:sp>
-      <p:sp>
-        <p:nvSpPr>
-          <p:cNvPr id="34" name="TextBox 33"/>
-          <p:cNvSpPr txBox="1"/>
-          <p:nvPr/>
-        </p:nvSpPr>
-        <p:spPr>
-          <a:xfrm>
-            <a:off x="6473952" y="3456432"/>
-            <a:ext cx="4892040" cy="713232"/>
-          </a:xfrm>
-          <a:prstGeom prst="rect">
-            <a:avLst/>
-          </a:prstGeom>
-          <a:noFill/>
-        </p:spPr>
-        <p:txBody>
-          <a:bodyPr wrap="square" lIns="0" tIns="0" rIns="0" bIns="0" anchor="t">
-            <a:spAutoFit/>
-          </a:bodyPr>
-          <a:lstStyle/>
-          <a:p>
-            <a:pPr algn="l">
-              <a:lnSpc>
-                <a:spcPts val="1500"/>
-              </a:lnSpc>
-            </a:pPr>
-            <a:r>
-              <a:rPr sz="1150" b="0" i="0" dirty="0" err="1">
-                <a:solidFill>
-                  <a:srgbClr val="4E5A66"/>
-                </a:solidFill>
-                <a:latin typeface="Calibri"/>
-              </a:rPr>
-              <a:t>XGBoost</a:t>
-            </a:r>
-            <a:r>
-              <a:rPr sz="1150" b="0" i="0" dirty="0">
-                <a:solidFill>
-                  <a:srgbClr val="4E5A66"/>
-                </a:solidFill>
-                <a:latin typeface="Calibri"/>
-              </a:rPr>
-              <a:t> cannot learn incrementally, so corrections are stored and applied at the next training cycle rather than changing the live model mid-run.</a:t>
-            </a:r>
-          </a:p>
-        </p:txBody>
-      </p:sp>
-      <p:sp>
-        <p:nvSpPr>
-          <p:cNvPr id="35" name="TextBox 34"/>
-          <p:cNvSpPr txBox="1"/>
-          <p:nvPr/>
-        </p:nvSpPr>
-        <p:spPr>
-          <a:xfrm>
-            <a:off x="6473952" y="4261104"/>
-            <a:ext cx="4892040" cy="310896"/>
-          </a:xfrm>
-          <a:prstGeom prst="rect">
-            <a:avLst/>
-          </a:prstGeom>
-          <a:noFill/>
-        </p:spPr>
-        <p:txBody>
-          <a:bodyPr wrap="square" lIns="0" tIns="0" rIns="0" bIns="0" anchor="t">
-            <a:spAutoFit/>
-          </a:bodyPr>
-          <a:lstStyle/>
-          <a:p>
-            <a:pPr algn="l"/>
-            <a:r>
-              <a:rPr sz="1050" b="0" i="1">
-                <a:solidFill>
-                  <a:srgbClr val="7A8792"/>
-                </a:solidFill>
-                <a:latin typeface="Calibri"/>
-              </a:rPr>
-              <a:t>No silent drift: the model changes only when deliberately retrained.</a:t>
-            </a:r>
-          </a:p>
-        </p:txBody>
-      </p:sp>
-      <p:sp>
-        <p:nvSpPr>
-          <p:cNvPr id="38" name="TextBox 37"/>
-          <p:cNvSpPr txBox="1"/>
-          <p:nvPr/>
-        </p:nvSpPr>
-        <p:spPr>
-          <a:xfrm>
-            <a:off x="548640" y="6419088"/>
-            <a:ext cx="8229600" cy="237744"/>
-          </a:xfrm>
-          <a:prstGeom prst="rect">
-            <a:avLst/>
-          </a:prstGeom>
-          <a:noFill/>
-        </p:spPr>
-        <p:txBody>
-          <a:bodyPr wrap="square" lIns="0" tIns="0" rIns="0" bIns="0" anchor="t">
-            <a:spAutoFit/>
-          </a:bodyPr>
-          <a:lstStyle/>
-          <a:p>
-            <a:pPr algn="l"/>
-            <a:r>
-              <a:rPr sz="900" b="0" i="0">
-                <a:solidFill>
-                  <a:srgbClr val="A6AEB6"/>
-                </a:solidFill>
-                <a:latin typeface="Calibri"/>
-              </a:rPr>
-              <a:t>Device Identifier  ·  Progress Report  ·  September 2026</a:t>
-            </a:r>
-          </a:p>
-        </p:txBody>
-      </p:sp>
-      <p:sp>
-        <p:nvSpPr>
-          <p:cNvPr id="39" name="TextBox 38"/>
-          <p:cNvSpPr txBox="1"/>
-          <p:nvPr/>
-        </p:nvSpPr>
-        <p:spPr>
-          <a:xfrm>
-            <a:off x="10698480" y="6419088"/>
-            <a:ext cx="941832" cy="237744"/>
-          </a:xfrm>
-          <a:prstGeom prst="rect">
-            <a:avLst/>
-          </a:prstGeom>
-          <a:noFill/>
-        </p:spPr>
-        <p:txBody>
-          <a:bodyPr wrap="square" lIns="0" tIns="0" rIns="0" bIns="0" anchor="t">
-            <a:spAutoFit/>
-          </a:bodyPr>
-          <a:lstStyle/>
-          <a:p>
-            <a:pPr algn="r"/>
-            <a:r>
-              <a:rPr sz="900" b="0" i="0">
-                <a:solidFill>
-                  <a:srgbClr val="A6AEB6"/>
-                </a:solidFill>
-                <a:latin typeface="Calibri"/>
-              </a:rPr>
-              <a:t>10</a:t>
-            </a:r>
-          </a:p>
-        </p:txBody>
-      </p:sp>
-    </p:spTree>
-  </p:cSld>
-  <p:clrMapOvr>
-    <a:masterClrMapping/>
-  </p:clrMapOvr>
-</p:sld>
-</file>
-
-<file path=ppt/slides/slide12.xml><?xml version="1.0" encoding="utf-8"?>
 <p:sld xmlns:a="http://schemas.openxmlformats.org/drawingml/2006/main" xmlns:r="http://schemas.openxmlformats.org/officeDocument/2006/relationships" xmlns:p="http://schemas.openxmlformats.org/presentationml/2006/main">
   <p:cSld>
     <p:spTree>
@@ -7763,7 +6509,7 @@
 </p:sld>
 </file>
 
-<file path=ppt/slides/slide13.xml><?xml version="1.0" encoding="utf-8"?>
+<file path=ppt/slides/slide12.xml><?xml version="1.0" encoding="utf-8"?>
 <p:sld xmlns:a="http://schemas.openxmlformats.org/drawingml/2006/main" xmlns:r="http://schemas.openxmlformats.org/officeDocument/2006/relationships" xmlns:p="http://schemas.openxmlformats.org/presentationml/2006/main" showMasterSp="0">
   <p:cSld>
     <p:spTree>
@@ -7829,7 +6575,7 @@
 </p:sld>
 </file>
 
-<file path=ppt/slides/slide14.xml><?xml version="1.0" encoding="utf-8"?>
+<file path=ppt/slides/slide13.xml><?xml version="1.0" encoding="utf-8"?>
 <p:sld xmlns:a="http://schemas.openxmlformats.org/drawingml/2006/main" xmlns:r="http://schemas.openxmlformats.org/officeDocument/2006/relationships" xmlns:p="http://schemas.openxmlformats.org/presentationml/2006/main">
   <p:cSld>
     <p:spTree>
@@ -9864,7 +8610,7 @@
 </p:sld>
 </file>
 
-<file path=ppt/slides/slide15.xml><?xml version="1.0" encoding="utf-8"?>
+<file path=ppt/slides/slide14.xml><?xml version="1.0" encoding="utf-8"?>
 <p:sld xmlns:a="http://schemas.openxmlformats.org/drawingml/2006/main" xmlns:r="http://schemas.openxmlformats.org/officeDocument/2006/relationships" xmlns:p="http://schemas.openxmlformats.org/presentationml/2006/main">
   <p:cSld>
     <p:spTree>
@@ -10128,7 +8874,7 @@
         <p:spPr>
           <a:xfrm>
             <a:off x="820674" y="2627479"/>
-            <a:ext cx="3017520" cy="861774"/>
+            <a:ext cx="3017520" cy="430887"/>
           </a:xfrm>
           <a:prstGeom prst="rect">
             <a:avLst/>
@@ -10182,7 +8928,7 @@
                 </a:solidFill>
                 <a:latin typeface="Calibri"/>
               </a:rPr>
-              <a:t>, .NET 10, Windows x64, plus 22 dependencies. Better published to Azure Artifacts than sent as a zip.</a:t>
+              <a:t>, .NET 10, Windows x64, plus 22 dependencies.</a:t>
             </a:r>
           </a:p>
         </p:txBody>
@@ -10364,7 +9110,7 @@
         <p:spPr>
           <a:xfrm>
             <a:off x="4537709" y="2798064"/>
-            <a:ext cx="3017520" cy="646331"/>
+            <a:ext cx="3017520" cy="430887"/>
           </a:xfrm>
           <a:prstGeom prst="rect">
             <a:avLst/>
@@ -10397,7 +9143,7 @@
                 </a:solidFill>
                 <a:latin typeface="Calibri"/>
               </a:rPr>
-              <a:t>, passed in ML_SERVICE_URL. Without it the app looks for the service on its own machine.</a:t>
+              <a:t>, passed in ML_SERVICE_URL.</a:t>
             </a:r>
           </a:p>
         </p:txBody>
@@ -10579,7 +9325,7 @@
         <p:spPr>
           <a:xfrm>
             <a:off x="8250174" y="2590340"/>
-            <a:ext cx="3017520" cy="861774"/>
+            <a:ext cx="3017520" cy="646331"/>
           </a:xfrm>
           <a:prstGeom prst="rect">
             <a:avLst/>
@@ -10663,7 +9409,7 @@
                 </a:solidFill>
                 <a:latin typeface="Calibri"/>
               </a:rPr>
-              <a:t>. Three guarded creation scripts are included.</a:t>
+              <a:t>. </a:t>
             </a:r>
           </a:p>
         </p:txBody>
@@ -11087,7 +9833,7 @@
         <p:spPr>
           <a:xfrm>
             <a:off x="4535424" y="4885436"/>
-            <a:ext cx="3017520" cy="861774"/>
+            <a:ext cx="3017520" cy="646331"/>
           </a:xfrm>
           <a:prstGeom prst="rect">
             <a:avLst/>
@@ -11132,7 +9878,7 @@
                 </a:solidFill>
                 <a:latin typeface="Calibri"/>
               </a:rPr>
-              <a:t>runs the whole sequence in one call, against the ML service or local Python. Pass whichever client you want.</a:t>
+              <a:t>runs the whole sequence in one call, against the ML service or local Python. </a:t>
             </a:r>
           </a:p>
         </p:txBody>
@@ -11313,8 +10059,8 @@
         </p:nvSpPr>
         <p:spPr>
           <a:xfrm>
-            <a:off x="8252460" y="5102352"/>
-            <a:ext cx="3017520" cy="658368"/>
+            <a:off x="8252460" y="4885436"/>
+            <a:ext cx="3017520" cy="188770"/>
           </a:xfrm>
           <a:prstGeom prst="rect">
             <a:avLst/>
@@ -11333,14 +10079,29 @@
               </a:lnSpc>
             </a:pPr>
             <a:r>
-              <a:rPr sz="1100" b="0" i="0">
+              <a:rPr lang="en-MY" sz="1600" b="0" i="0" dirty="0">
                 <a:solidFill>
                   <a:srgbClr val="4E5A66"/>
                 </a:solidFill>
                 <a:latin typeface="Calibri"/>
               </a:rPr>
-              <a:t>A 15-page API reference covering every class and method, plus a 2-page quick reference. Both are in the repository.</a:t>
-            </a:r>
+              <a:t>Attached together inside the folder</a:t>
+            </a:r>
+            <a:r>
+              <a:rPr lang="en-MY" sz="1600" dirty="0">
+                <a:solidFill>
+                  <a:srgbClr val="4E5A66"/>
+                </a:solidFill>
+                <a:latin typeface="Calibri"/>
+              </a:rPr>
+              <a:t>.</a:t>
+            </a:r>
+            <a:endParaRPr lang="en-MY" sz="1600" b="0" i="0" dirty="0">
+              <a:solidFill>
+                <a:srgbClr val="4E5A66"/>
+              </a:solidFill>
+              <a:latin typeface="Calibri"/>
+            </a:endParaRPr>
           </a:p>
         </p:txBody>
       </p:sp>
@@ -11422,7 +10183,7 @@
 </p:sld>
 </file>
 
-<file path=ppt/slides/slide16.xml><?xml version="1.0" encoding="utf-8"?>
+<file path=ppt/slides/slide15.xml><?xml version="1.0" encoding="utf-8"?>
 <p:sld xmlns:a="http://schemas.openxmlformats.org/drawingml/2006/main" xmlns:r="http://schemas.openxmlformats.org/officeDocument/2006/relationships" xmlns:p="http://schemas.openxmlformats.org/presentationml/2006/main">
   <p:cSld>
     <p:spTree>
@@ -11484,6 +10245,78 @@
     <p:extLst>
       <p:ext uri="{BB962C8B-B14F-4D97-AF65-F5344CB8AC3E}">
         <p14:creationId xmlns:p14="http://schemas.microsoft.com/office/powerpoint/2010/main" val="2447904253"/>
+      </p:ext>
+    </p:extLst>
+  </p:cSld>
+  <p:clrMapOvr>
+    <a:masterClrMapping/>
+  </p:clrMapOvr>
+</p:sld>
+</file>
+
+<file path=ppt/slides/slide16.xml><?xml version="1.0" encoding="utf-8"?>
+<p:sld xmlns:a="http://schemas.openxmlformats.org/drawingml/2006/main" xmlns:r="http://schemas.openxmlformats.org/officeDocument/2006/relationships" xmlns:p="http://schemas.openxmlformats.org/presentationml/2006/main" show="0">
+  <p:cSld>
+    <p:spTree>
+      <p:nvGrpSpPr>
+        <p:cNvPr id="1" name="">
+          <a:extLst>
+            <a:ext uri="{FF2B5EF4-FFF2-40B4-BE49-F238E27FC236}">
+              <a16:creationId xmlns:a16="http://schemas.microsoft.com/office/drawing/2014/main" id="{7CA44FA3-713B-E677-33DF-011DBD547D42}"/>
+            </a:ext>
+          </a:extLst>
+        </p:cNvPr>
+        <p:cNvGrpSpPr/>
+        <p:nvPr/>
+      </p:nvGrpSpPr>
+      <p:grpSpPr>
+        <a:xfrm>
+          <a:off x="0" y="0"/>
+          <a:ext cx="0" cy="0"/>
+          <a:chOff x="0" y="0"/>
+          <a:chExt cx="0" cy="0"/>
+        </a:xfrm>
+      </p:grpSpPr>
+      <p:sp>
+        <p:nvSpPr>
+          <p:cNvPr id="37" name="TextBox 36">
+            <a:extLst>
+              <a:ext uri="{FF2B5EF4-FFF2-40B4-BE49-F238E27FC236}">
+                <a16:creationId xmlns:a16="http://schemas.microsoft.com/office/drawing/2014/main" id="{D7AF4DCE-3052-B5E1-2B06-EE8776829497}"/>
+              </a:ext>
+            </a:extLst>
+          </p:cNvPr>
+          <p:cNvSpPr txBox="1"/>
+          <p:nvPr/>
+        </p:nvSpPr>
+        <p:spPr>
+          <a:xfrm>
+            <a:off x="3320015" y="2560598"/>
+            <a:ext cx="5551969" cy="1107996"/>
+          </a:xfrm>
+          <a:prstGeom prst="rect">
+            <a:avLst/>
+          </a:prstGeom>
+          <a:noFill/>
+        </p:spPr>
+        <p:txBody>
+          <a:bodyPr wrap="none" rtlCol="0">
+            <a:spAutoFit/>
+          </a:bodyPr>
+          <a:lstStyle/>
+          <a:p>
+            <a:r>
+              <a:rPr lang="en-US" sz="6600" b="1" dirty="0"/>
+              <a:t>Supplementary</a:t>
+            </a:r>
+            <a:endParaRPr lang="en-MY" sz="6600" b="1" dirty="0"/>
+          </a:p>
+        </p:txBody>
+      </p:sp>
+    </p:spTree>
+    <p:extLst>
+      <p:ext uri="{BB962C8B-B14F-4D97-AF65-F5344CB8AC3E}">
+        <p14:creationId xmlns:p14="http://schemas.microsoft.com/office/powerpoint/2010/main" val="4078703098"/>
       </p:ext>
     </p:extLst>
   </p:cSld>
@@ -19836,6 +18669,577 @@
         </p:nvSpPr>
         <p:spPr>
           <a:xfrm>
+            <a:off x="548640" y="402336"/>
+            <a:ext cx="10607040" cy="237744"/>
+          </a:xfrm>
+          <a:prstGeom prst="rect">
+            <a:avLst/>
+          </a:prstGeom>
+          <a:noFill/>
+        </p:spPr>
+        <p:txBody>
+          <a:bodyPr wrap="square" lIns="0" tIns="0" rIns="0" bIns="0" anchor="t">
+            <a:spAutoFit/>
+          </a:bodyPr>
+          <a:lstStyle/>
+          <a:p>
+            <a:pPr algn="l"/>
+            <a:r>
+              <a:rPr sz="1050" b="1" i="0" spc="200">
+                <a:solidFill>
+                  <a:srgbClr val="C46A24"/>
+                </a:solidFill>
+                <a:latin typeface="Calibri"/>
+              </a:rPr>
+              <a:t>05  ·  METHOD SELECTION</a:t>
+            </a:r>
+          </a:p>
+        </p:txBody>
+      </p:sp>
+      <p:sp>
+        <p:nvSpPr>
+          <p:cNvPr id="3" name="TextBox 2"/>
+          <p:cNvSpPr txBox="1"/>
+          <p:nvPr/>
+        </p:nvSpPr>
+        <p:spPr>
+          <a:xfrm>
+            <a:off x="548640" y="694944"/>
+            <a:ext cx="11091672" cy="475488"/>
+          </a:xfrm>
+          <a:prstGeom prst="rect">
+            <a:avLst/>
+          </a:prstGeom>
+          <a:noFill/>
+        </p:spPr>
+        <p:txBody>
+          <a:bodyPr wrap="square" lIns="0" tIns="0" rIns="0" bIns="0" anchor="t">
+            <a:spAutoFit/>
+          </a:bodyPr>
+          <a:lstStyle/>
+          <a:p>
+            <a:pPr algn="l"/>
+            <a:r>
+              <a:rPr sz="2900" b="1" i="0">
+                <a:solidFill>
+                  <a:srgbClr val="1B2430"/>
+                </a:solidFill>
+                <a:latin typeface="Cambria"/>
+              </a:rPr>
+              <a:t>What was tested before committing</a:t>
+            </a:r>
+          </a:p>
+        </p:txBody>
+      </p:sp>
+      <p:sp>
+        <p:nvSpPr>
+          <p:cNvPr id="4" name="TextBox 3"/>
+          <p:cNvSpPr txBox="1"/>
+          <p:nvPr/>
+        </p:nvSpPr>
+        <p:spPr>
+          <a:xfrm>
+            <a:off x="548640" y="1261872"/>
+            <a:ext cx="10881360" cy="447943"/>
+          </a:xfrm>
+          <a:prstGeom prst="rect">
+            <a:avLst/>
+          </a:prstGeom>
+          <a:noFill/>
+        </p:spPr>
+        <p:txBody>
+          <a:bodyPr wrap="square" lIns="0" tIns="0" rIns="0" bIns="0" anchor="t">
+            <a:spAutoFit/>
+          </a:bodyPr>
+          <a:lstStyle/>
+          <a:p>
+            <a:pPr algn="l">
+              <a:lnSpc>
+                <a:spcPts val="1800"/>
+              </a:lnSpc>
+            </a:pPr>
+            <a:r>
+              <a:rPr sz="1300" b="0" i="0" dirty="0">
+                <a:solidFill>
+                  <a:srgbClr val="4E5A66"/>
+                </a:solidFill>
+                <a:latin typeface="Calibri"/>
+              </a:rPr>
+              <a:t>The client data arrived without labels, so unsupervised methods were used first to discover structure. </a:t>
+            </a:r>
+            <a:endParaRPr lang="en-MY" sz="1300" b="0" i="0" dirty="0">
+              <a:solidFill>
+                <a:srgbClr val="4E5A66"/>
+              </a:solidFill>
+              <a:latin typeface="Calibri"/>
+            </a:endParaRPr>
+          </a:p>
+          <a:p>
+            <a:pPr algn="l">
+              <a:lnSpc>
+                <a:spcPts val="1800"/>
+              </a:lnSpc>
+            </a:pPr>
+            <a:r>
+              <a:rPr sz="1300" b="0" i="0" dirty="0">
+                <a:solidFill>
+                  <a:srgbClr val="4E5A66"/>
+                </a:solidFill>
+                <a:latin typeface="Calibri"/>
+              </a:rPr>
+              <a:t>Supervised models were then trained on what they revealed. Every choice below was benchmarked, not assumed.</a:t>
+            </a:r>
+          </a:p>
+        </p:txBody>
+      </p:sp>
+      <p:sp>
+        <p:nvSpPr>
+          <p:cNvPr id="5" name="Rounded Rectangle 4"/>
+          <p:cNvSpPr/>
+          <p:nvPr/>
+        </p:nvSpPr>
+        <p:spPr>
+          <a:xfrm>
+            <a:off x="548640" y="1965960"/>
+            <a:ext cx="5440680" cy="3840480"/>
+          </a:xfrm>
+          <a:prstGeom prst="roundRect">
+            <a:avLst>
+              <a:gd name="adj" fmla="val 5500"/>
+            </a:avLst>
+          </a:prstGeom>
+          <a:solidFill>
+            <a:srgbClr val="EAF2EE"/>
+          </a:solidFill>
+          <a:ln w="9525">
+            <a:solidFill>
+              <a:srgbClr val="DFE4E9"/>
+            </a:solidFill>
+          </a:ln>
+          <a:effectLst/>
+        </p:spPr>
+        <p:style>
+          <a:lnRef idx="1">
+            <a:schemeClr val="accent1"/>
+          </a:lnRef>
+          <a:fillRef idx="3">
+            <a:schemeClr val="accent1"/>
+          </a:fillRef>
+          <a:effectRef idx="2">
+            <a:schemeClr val="accent1"/>
+          </a:effectRef>
+          <a:fontRef idx="minor">
+            <a:schemeClr val="lt1"/>
+          </a:fontRef>
+        </p:style>
+        <p:txBody>
+          <a:bodyPr wrap="square" rtlCol="0" anchor="ctr"/>
+          <a:lstStyle/>
+          <a:p>
+            <a:pPr algn="ctr"/>
+            <a:endParaRPr/>
+          </a:p>
+        </p:txBody>
+      </p:sp>
+      <p:sp>
+        <p:nvSpPr>
+          <p:cNvPr id="6" name="TextBox 5"/>
+          <p:cNvSpPr txBox="1"/>
+          <p:nvPr/>
+        </p:nvSpPr>
+        <p:spPr>
+          <a:xfrm>
+            <a:off x="822960" y="2221992"/>
+            <a:ext cx="4892040" cy="219456"/>
+          </a:xfrm>
+          <a:prstGeom prst="rect">
+            <a:avLst/>
+          </a:prstGeom>
+          <a:noFill/>
+        </p:spPr>
+        <p:txBody>
+          <a:bodyPr wrap="square" lIns="0" tIns="0" rIns="0" bIns="0" anchor="t">
+            <a:spAutoFit/>
+          </a:bodyPr>
+          <a:lstStyle/>
+          <a:p>
+            <a:pPr algn="l"/>
+            <a:r>
+              <a:rPr sz="1050" b="1" i="0" spc="180">
+                <a:solidFill>
+                  <a:srgbClr val="2E7D63"/>
+                </a:solidFill>
+                <a:latin typeface="Calibri"/>
+              </a:rPr>
+              <a:t>ADOPTED IN PRODUCTION</a:t>
+            </a:r>
+          </a:p>
+        </p:txBody>
+      </p:sp>
+      <p:sp>
+        <p:nvSpPr>
+          <p:cNvPr id="7" name="TextBox 6"/>
+          <p:cNvSpPr txBox="1"/>
+          <p:nvPr/>
+        </p:nvSpPr>
+        <p:spPr>
+          <a:xfrm>
+            <a:off x="822960" y="2587752"/>
+            <a:ext cx="4892040" cy="237744"/>
+          </a:xfrm>
+          <a:prstGeom prst="rect">
+            <a:avLst/>
+          </a:prstGeom>
+          <a:noFill/>
+        </p:spPr>
+        <p:txBody>
+          <a:bodyPr wrap="square" lIns="0" tIns="0" rIns="0" bIns="0" anchor="t">
+            <a:spAutoFit/>
+          </a:bodyPr>
+          <a:lstStyle/>
+          <a:p>
+            <a:pPr algn="l"/>
+            <a:r>
+              <a:rPr sz="1300" b="1" i="0">
+                <a:solidFill>
+                  <a:srgbClr val="1B2430"/>
+                </a:solidFill>
+                <a:latin typeface="Cambria"/>
+              </a:rPr>
+              <a:t>Chained prediction</a:t>
+            </a:r>
+          </a:p>
+        </p:txBody>
+      </p:sp>
+      <p:sp>
+        <p:nvSpPr>
+          <p:cNvPr id="8" name="TextBox 7"/>
+          <p:cNvSpPr txBox="1"/>
+          <p:nvPr/>
+        </p:nvSpPr>
+        <p:spPr>
+          <a:xfrm>
+            <a:off x="822960" y="2843784"/>
+            <a:ext cx="4892040" cy="457200"/>
+          </a:xfrm>
+          <a:prstGeom prst="rect">
+            <a:avLst/>
+          </a:prstGeom>
+          <a:noFill/>
+        </p:spPr>
+        <p:txBody>
+          <a:bodyPr wrap="square" lIns="0" tIns="0" rIns="0" bIns="0" anchor="t">
+            <a:spAutoFit/>
+          </a:bodyPr>
+          <a:lstStyle/>
+          <a:p>
+            <a:pPr algn="l">
+              <a:lnSpc>
+                <a:spcPts val="1400"/>
+              </a:lnSpc>
+            </a:pPr>
+            <a:r>
+              <a:rPr sz="1050" b="0" i="0" dirty="0">
+                <a:solidFill>
+                  <a:srgbClr val="4E5A66"/>
+                </a:solidFill>
+                <a:latin typeface="Calibri"/>
+              </a:rPr>
+              <a:t>Device type. Deterministic and fully readable — an engineer edits it directly and the change applies on the next run.</a:t>
+            </a:r>
+          </a:p>
+        </p:txBody>
+      </p:sp>
+      <p:sp>
+        <p:nvSpPr>
+          <p:cNvPr id="9" name="TextBox 8"/>
+          <p:cNvSpPr txBox="1"/>
+          <p:nvPr/>
+        </p:nvSpPr>
+        <p:spPr>
+          <a:xfrm>
+            <a:off x="822960" y="3374136"/>
+            <a:ext cx="4892040" cy="237744"/>
+          </a:xfrm>
+          <a:prstGeom prst="rect">
+            <a:avLst/>
+          </a:prstGeom>
+          <a:noFill/>
+        </p:spPr>
+        <p:txBody>
+          <a:bodyPr wrap="square" lIns="0" tIns="0" rIns="0" bIns="0" anchor="t">
+            <a:spAutoFit/>
+          </a:bodyPr>
+          <a:lstStyle/>
+          <a:p>
+            <a:pPr algn="l"/>
+            <a:r>
+              <a:rPr sz="1300" b="1" i="0">
+                <a:solidFill>
+                  <a:srgbClr val="1B2430"/>
+                </a:solidFill>
+                <a:latin typeface="Cambria"/>
+              </a:rPr>
+              <a:t>XGBoost</a:t>
+            </a:r>
+          </a:p>
+        </p:txBody>
+      </p:sp>
+      <p:sp>
+        <p:nvSpPr>
+          <p:cNvPr id="10" name="TextBox 9"/>
+          <p:cNvSpPr txBox="1"/>
+          <p:nvPr/>
+        </p:nvSpPr>
+        <p:spPr>
+          <a:xfrm>
+            <a:off x="822960" y="3630168"/>
+            <a:ext cx="4892040" cy="457200"/>
+          </a:xfrm>
+          <a:prstGeom prst="rect">
+            <a:avLst/>
+          </a:prstGeom>
+          <a:noFill/>
+        </p:spPr>
+        <p:txBody>
+          <a:bodyPr wrap="square" lIns="0" tIns="0" rIns="0" bIns="0" anchor="t">
+            <a:spAutoFit/>
+          </a:bodyPr>
+          <a:lstStyle/>
+          <a:p>
+            <a:pPr algn="l">
+              <a:lnSpc>
+                <a:spcPts val="1400"/>
+              </a:lnSpc>
+            </a:pPr>
+            <a:r>
+              <a:rPr sz="1050" b="0" i="0">
+                <a:solidFill>
+                  <a:srgbClr val="4E5A66"/>
+                </a:solidFill>
+                <a:latin typeface="Calibri"/>
+              </a:rPr>
+              <a:t>Section and cluster. Best accuracy of everything tested on engineered tabular features.</a:t>
+            </a:r>
+          </a:p>
+        </p:txBody>
+      </p:sp>
+      <p:sp>
+        <p:nvSpPr>
+          <p:cNvPr id="11" name="TextBox 10"/>
+          <p:cNvSpPr txBox="1"/>
+          <p:nvPr/>
+        </p:nvSpPr>
+        <p:spPr>
+          <a:xfrm>
+            <a:off x="822960" y="4160520"/>
+            <a:ext cx="4892040" cy="237744"/>
+          </a:xfrm>
+          <a:prstGeom prst="rect">
+            <a:avLst/>
+          </a:prstGeom>
+          <a:noFill/>
+        </p:spPr>
+        <p:txBody>
+          <a:bodyPr wrap="square" lIns="0" tIns="0" rIns="0" bIns="0" anchor="t">
+            <a:spAutoFit/>
+          </a:bodyPr>
+          <a:lstStyle/>
+          <a:p>
+            <a:pPr algn="l"/>
+            <a:r>
+              <a:rPr sz="1300" b="1" i="0">
+                <a:solidFill>
+                  <a:srgbClr val="1B2430"/>
+                </a:solidFill>
+                <a:latin typeface="Cambria"/>
+              </a:rPr>
+              <a:t>k-NN distance test</a:t>
+            </a:r>
+          </a:p>
+        </p:txBody>
+      </p:sp>
+      <p:sp>
+        <p:nvSpPr>
+          <p:cNvPr id="12" name="TextBox 11"/>
+          <p:cNvSpPr txBox="1"/>
+          <p:nvPr/>
+        </p:nvSpPr>
+        <p:spPr>
+          <a:xfrm>
+            <a:off x="822960" y="4416552"/>
+            <a:ext cx="4892040" cy="457200"/>
+          </a:xfrm>
+          <a:prstGeom prst="rect">
+            <a:avLst/>
+          </a:prstGeom>
+          <a:noFill/>
+        </p:spPr>
+        <p:txBody>
+          <a:bodyPr wrap="square" lIns="0" tIns="0" rIns="0" bIns="0" anchor="t">
+            <a:spAutoFit/>
+          </a:bodyPr>
+          <a:lstStyle/>
+          <a:p>
+            <a:pPr algn="l">
+              <a:lnSpc>
+                <a:spcPts val="1400"/>
+              </a:lnSpc>
+            </a:pPr>
+            <a:r>
+              <a:rPr sz="1050" b="0" i="0">
+                <a:solidFill>
+                  <a:srgbClr val="4E5A66"/>
+                </a:solidFill>
+                <a:latin typeface="Calibri"/>
+              </a:rPr>
+              <a:t>Out-of-distribution check that cuts section and cluster confidence for unfamiliar tags.</a:t>
+            </a:r>
+          </a:p>
+        </p:txBody>
+      </p:sp>
+      <p:sp>
+        <p:nvSpPr>
+          <p:cNvPr id="13" name="TextBox 12"/>
+          <p:cNvSpPr txBox="1"/>
+          <p:nvPr/>
+        </p:nvSpPr>
+        <p:spPr>
+          <a:xfrm>
+            <a:off x="822960" y="4946904"/>
+            <a:ext cx="4892040" cy="237744"/>
+          </a:xfrm>
+          <a:prstGeom prst="rect">
+            <a:avLst/>
+          </a:prstGeom>
+          <a:noFill/>
+        </p:spPr>
+        <p:txBody>
+          <a:bodyPr wrap="square" lIns="0" tIns="0" rIns="0" bIns="0" anchor="t">
+            <a:spAutoFit/>
+          </a:bodyPr>
+          <a:lstStyle/>
+          <a:p>
+            <a:pPr algn="l"/>
+            <a:r>
+              <a:rPr sz="1300" b="1" i="0">
+                <a:solidFill>
+                  <a:srgbClr val="1B2430"/>
+                </a:solidFill>
+                <a:latin typeface="Cambria"/>
+              </a:rPr>
+              <a:t>Prefix dictionary</a:t>
+            </a:r>
+          </a:p>
+        </p:txBody>
+      </p:sp>
+      <p:sp>
+        <p:nvSpPr>
+          <p:cNvPr id="14" name="TextBox 13"/>
+          <p:cNvSpPr txBox="1"/>
+          <p:nvPr/>
+        </p:nvSpPr>
+        <p:spPr>
+          <a:xfrm>
+            <a:off x="822960" y="5202936"/>
+            <a:ext cx="4892040" cy="457200"/>
+          </a:xfrm>
+          <a:prstGeom prst="rect">
+            <a:avLst/>
+          </a:prstGeom>
+          <a:noFill/>
+        </p:spPr>
+        <p:txBody>
+          <a:bodyPr wrap="square" lIns="0" tIns="0" rIns="0" bIns="0" anchor="t">
+            <a:spAutoFit/>
+          </a:bodyPr>
+          <a:lstStyle/>
+          <a:p>
+            <a:pPr algn="l">
+              <a:lnSpc>
+                <a:spcPts val="1400"/>
+              </a:lnSpc>
+            </a:pPr>
+            <a:r>
+              <a:rPr sz="1050" b="0" i="0">
+                <a:solidFill>
+                  <a:srgbClr val="4E5A66"/>
+                </a:solidFill>
+                <a:latin typeface="Calibri"/>
+              </a:rPr>
+              <a:t>The predicted section is fed to the cluster model as an input feature rather than predicted independently.</a:t>
+            </a:r>
+          </a:p>
+        </p:txBody>
+      </p:sp>
+      <p:sp>
+        <p:nvSpPr>
+          <p:cNvPr id="27" name="TextBox 26"/>
+          <p:cNvSpPr txBox="1"/>
+          <p:nvPr/>
+        </p:nvSpPr>
+        <p:spPr>
+          <a:xfrm>
+            <a:off x="548640" y="6419088"/>
+            <a:ext cx="8229600" cy="237744"/>
+          </a:xfrm>
+          <a:prstGeom prst="rect">
+            <a:avLst/>
+          </a:prstGeom>
+          <a:noFill/>
+        </p:spPr>
+        <p:txBody>
+          <a:bodyPr wrap="square" lIns="0" tIns="0" rIns="0" bIns="0" anchor="t">
+            <a:spAutoFit/>
+          </a:bodyPr>
+          <a:lstStyle/>
+          <a:p>
+            <a:pPr algn="l"/>
+            <a:r>
+              <a:rPr sz="900" b="0" i="0">
+                <a:solidFill>
+                  <a:srgbClr val="A6AEB6"/>
+                </a:solidFill>
+                <a:latin typeface="Calibri"/>
+              </a:rPr>
+              <a:t>Device Identifier  ·  Progress Report  ·  September 2026</a:t>
+            </a:r>
+          </a:p>
+        </p:txBody>
+      </p:sp>
+    </p:spTree>
+  </p:cSld>
+  <p:clrMapOvr>
+    <a:masterClrMapping/>
+  </p:clrMapOvr>
+</p:sld>
+</file>
+
+<file path=ppt/slides/slide25.xml><?xml version="1.0" encoding="utf-8"?>
+<p:sld xmlns:a="http://schemas.openxmlformats.org/drawingml/2006/main" xmlns:r="http://schemas.openxmlformats.org/officeDocument/2006/relationships" xmlns:p="http://schemas.openxmlformats.org/presentationml/2006/main" show="0">
+  <p:cSld>
+    <p:spTree>
+      <p:nvGrpSpPr>
+        <p:cNvPr id="1" name=""/>
+        <p:cNvGrpSpPr/>
+        <p:nvPr/>
+      </p:nvGrpSpPr>
+      <p:grpSpPr>
+        <a:xfrm>
+          <a:off x="0" y="0"/>
+          <a:ext cx="0" cy="0"/>
+          <a:chOff x="0" y="0"/>
+          <a:chExt cx="0" cy="0"/>
+        </a:xfrm>
+      </p:grpSpPr>
+      <p:sp>
+        <p:nvSpPr>
+          <p:cNvPr id="2" name="TextBox 1"/>
+          <p:cNvSpPr txBox="1"/>
+          <p:nvPr/>
+        </p:nvSpPr>
+        <p:spPr>
+          <a:xfrm>
             <a:off x="548640" y="960120"/>
             <a:ext cx="10058400" cy="256032"/>
           </a:xfrm>
@@ -21783,8 +21187,8 @@
         </p:nvSpPr>
         <p:spPr>
           <a:xfrm>
-            <a:off x="868680" y="5230368"/>
-            <a:ext cx="10424160" cy="472117"/>
+            <a:off x="868680" y="5097018"/>
+            <a:ext cx="10424160" cy="715773"/>
           </a:xfrm>
           <a:prstGeom prst="rect">
             <a:avLst/>
@@ -21806,31 +21210,63 @@
               <a:rPr sz="1350" b="0" i="0" dirty="0">
                 <a:latin typeface="Calibri"/>
               </a:rPr>
-              <a:t>The engine is built, integrated and handed over. What remains is </a:t>
-            </a:r>
-            <a:r>
-              <a:rPr sz="1350" b="0" i="0" dirty="0" err="1">
-                <a:latin typeface="Calibri"/>
-              </a:rPr>
-              <a:t>is</a:t>
+              <a:t>The </a:t>
+            </a:r>
+            <a:r>
+              <a:rPr lang="en-MY" sz="1350" b="0" i="0" dirty="0">
+                <a:latin typeface="Calibri"/>
+              </a:rPr>
+              <a:t>ML </a:t>
             </a:r>
             <a:r>
               <a:rPr sz="1350" b="0" i="0" dirty="0">
                 <a:latin typeface="Calibri"/>
               </a:rPr>
-              <a:t> reference data from engineering, a user interface</a:t>
-            </a:r>
+              <a:t>engine is built, integrated and handed over. </a:t>
+            </a:r>
+            <a:endParaRPr lang="en-MY" sz="1350" b="0" i="0" dirty="0">
+              <a:latin typeface="Calibri"/>
+            </a:endParaRPr>
+          </a:p>
+          <a:p>
+            <a:pPr algn="l">
+              <a:lnSpc>
+                <a:spcPts val="1900"/>
+              </a:lnSpc>
+            </a:pPr>
+            <a:r>
+              <a:rPr lang="en-MY" sz="1350" dirty="0">
+                <a:latin typeface="Calibri"/>
+              </a:rPr>
+              <a:t>Remaining  	= </a:t>
+            </a:r>
+            <a:r>
+              <a:rPr sz="1350" b="0" i="0" dirty="0">
+                <a:latin typeface="Calibri"/>
+              </a:rPr>
+              <a:t>reference data from engineering</a:t>
+            </a:r>
+            <a:endParaRPr lang="en-MY" sz="1350" dirty="0">
+              <a:latin typeface="Calibri"/>
+            </a:endParaRPr>
+          </a:p>
+          <a:p>
+            <a:pPr algn="l">
+              <a:lnSpc>
+                <a:spcPts val="1900"/>
+              </a:lnSpc>
+            </a:pPr>
             <a:r>
               <a:rPr lang="en-MY" sz="1350" b="0" i="0" dirty="0">
                 <a:latin typeface="Calibri"/>
               </a:rPr>
-              <a:t> (UI)</a:t>
+              <a:t>		= </a:t>
             </a:r>
             <a:r>
               <a:rPr sz="1350" b="0" i="0" dirty="0">
                 <a:latin typeface="Calibri"/>
               </a:rPr>
-              <a:t> and one validation run against a project whose correct answer is already known.</a:t>
+              <a:t>validation run against a project whose correct answer is already known.</a:t>
             </a:r>
           </a:p>
         </p:txBody>
@@ -23227,7 +22663,7 @@
         <p:spPr>
           <a:xfrm>
             <a:off x="8252460" y="4572000"/>
-            <a:ext cx="3017520" cy="457200"/>
+            <a:ext cx="3017520" cy="215380"/>
           </a:xfrm>
           <a:prstGeom prst="rect">
             <a:avLst/>
@@ -23246,14 +22682,20 @@
               </a:lnSpc>
             </a:pPr>
             <a:r>
-              <a:rPr sz="1450" b="1" i="0">
+              <a:rPr lang="en-MY" sz="1450" b="1" dirty="0">
                 <a:solidFill>
                   <a:srgbClr val="1B2430"/>
                 </a:solidFill>
                 <a:latin typeface="Cambria"/>
               </a:rPr>
-              <a:t>Incremental Learning</a:t>
-            </a:r>
+              <a:t>Feedback and retraining</a:t>
+            </a:r>
+            <a:endParaRPr sz="1450" b="1" i="0" dirty="0">
+              <a:solidFill>
+                <a:srgbClr val="1B2430"/>
+              </a:solidFill>
+              <a:latin typeface="Cambria"/>
+            </a:endParaRPr>
           </a:p>
         </p:txBody>
       </p:sp>
@@ -28498,7 +27940,7 @@
         <p:spPr>
           <a:xfrm>
             <a:off x="822959" y="3227832"/>
-            <a:ext cx="3017520" cy="731520"/>
+            <a:ext cx="3017520" cy="530979"/>
           </a:xfrm>
           <a:prstGeom prst="rect">
             <a:avLst/>
@@ -28517,13 +27959,31 @@
               </a:lnSpc>
             </a:pPr>
             <a:r>
-              <a:rPr sz="1100" b="0" i="0">
+              <a:rPr sz="1100" b="0" i="0" dirty="0">
                 <a:solidFill>
                   <a:srgbClr val="4E5A66"/>
                 </a:solidFill>
                 <a:latin typeface="Calibri"/>
               </a:rPr>
-              <a:t>Each Section–Cluster–DeviceType bucket takes its highest-scoring matching devices, up to its target count. Any shortfall is recorded as a deficit.</a:t>
+              <a:t>Each Section–Cluster–</a:t>
+            </a:r>
+            <a:r>
+              <a:rPr sz="1100" b="0" i="0" dirty="0" err="1">
+                <a:solidFill>
+                  <a:srgbClr val="4E5A66"/>
+                </a:solidFill>
+                <a:latin typeface="Calibri"/>
+              </a:rPr>
+              <a:t>DeviceType</a:t>
+            </a:r>
+            <a:r>
+              <a:rPr sz="1100" b="0" i="0" dirty="0">
+                <a:solidFill>
+                  <a:srgbClr val="4E5A66"/>
+                </a:solidFill>
+                <a:latin typeface="Calibri"/>
+              </a:rPr>
+              <a:t> bucket takes its highest-scoring matching devices, up to its target count. </a:t>
             </a:r>
           </a:p>
         </p:txBody>
@@ -29322,7 +28782,7 @@
 </file>
 
 <file path=ppt/slides/slide9.xml><?xml version="1.0" encoding="utf-8"?>
-<p:sld xmlns:a="http://schemas.openxmlformats.org/drawingml/2006/main" xmlns:r="http://schemas.openxmlformats.org/officeDocument/2006/relationships" xmlns:p="http://schemas.openxmlformats.org/presentationml/2006/main" show="0">
+<p:sld xmlns:a="http://schemas.openxmlformats.org/drawingml/2006/main" xmlns:r="http://schemas.openxmlformats.org/officeDocument/2006/relationships" xmlns:p="http://schemas.openxmlformats.org/presentationml/2006/main">
   <p:cSld>
     <p:spTree>
       <p:nvGrpSpPr>
@@ -29368,7 +28828,7 @@
                 </a:solidFill>
                 <a:latin typeface="Calibri"/>
               </a:rPr>
-              <a:t>05  ·  METHOD SELECTION</a:t>
+              <a:t>06  ·  DEPLOYMENT ARCHITECTURE</a:t>
             </a:r>
           </a:p>
         </p:txBody>
@@ -29403,82 +28863,390 @@
                 </a:solidFill>
                 <a:latin typeface="Cambria"/>
               </a:rPr>
-              <a:t>What was tested before committing</a:t>
-            </a:r>
-          </a:p>
-        </p:txBody>
-      </p:sp>
-      <p:sp>
-        <p:nvSpPr>
-          <p:cNvPr id="4" name="TextBox 3"/>
-          <p:cNvSpPr txBox="1"/>
-          <p:nvPr/>
-        </p:nvSpPr>
-        <p:spPr>
-          <a:xfrm>
-            <a:off x="548640" y="1261872"/>
-            <a:ext cx="10881360" cy="447943"/>
-          </a:xfrm>
-          <a:prstGeom prst="rect">
-            <a:avLst/>
-          </a:prstGeom>
-          <a:noFill/>
-        </p:spPr>
-        <p:txBody>
-          <a:bodyPr wrap="square" lIns="0" tIns="0" rIns="0" bIns="0" anchor="t">
+              <a:t>How the models reach the product</a:t>
+            </a:r>
+          </a:p>
+        </p:txBody>
+      </p:sp>
+      <p:sp>
+        <p:nvSpPr>
+          <p:cNvPr id="4" name="Rounded Rectangle 3"/>
+          <p:cNvSpPr/>
+          <p:nvPr/>
+        </p:nvSpPr>
+        <p:spPr>
+          <a:xfrm>
+            <a:off x="548640" y="1463040"/>
+            <a:ext cx="6035040" cy="713232"/>
+          </a:xfrm>
+          <a:prstGeom prst="roundRect">
+            <a:avLst>
+              <a:gd name="adj" fmla="val 5500"/>
+            </a:avLst>
+          </a:prstGeom>
+          <a:solidFill>
+            <a:srgbClr val="F3F5F7"/>
+          </a:solidFill>
+          <a:ln w="9525">
+            <a:solidFill>
+              <a:srgbClr val="DFE4E9"/>
+            </a:solidFill>
+          </a:ln>
+          <a:effectLst/>
+        </p:spPr>
+        <p:style>
+          <a:lnRef idx="1">
+            <a:schemeClr val="accent1"/>
+          </a:lnRef>
+          <a:fillRef idx="3">
+            <a:schemeClr val="accent1"/>
+          </a:fillRef>
+          <a:effectRef idx="2">
+            <a:schemeClr val="accent1"/>
+          </a:effectRef>
+          <a:fontRef idx="minor">
+            <a:schemeClr val="lt1"/>
+          </a:fontRef>
+        </p:style>
+        <p:txBody>
+          <a:bodyPr wrap="square" rtlCol="0" anchor="ctr"/>
+          <a:lstStyle/>
+          <a:p>
+            <a:pPr algn="ctr"/>
+            <a:endParaRPr/>
+          </a:p>
+        </p:txBody>
+      </p:sp>
+      <p:sp>
+        <p:nvSpPr>
+          <p:cNvPr id="5" name="TextBox 4"/>
+          <p:cNvSpPr txBox="1"/>
+          <p:nvPr/>
+        </p:nvSpPr>
+        <p:spPr>
+          <a:xfrm>
+            <a:off x="804672" y="1463040"/>
+            <a:ext cx="2194560" cy="713232"/>
+          </a:xfrm>
+          <a:prstGeom prst="rect">
+            <a:avLst/>
+          </a:prstGeom>
+          <a:noFill/>
+        </p:spPr>
+        <p:txBody>
+          <a:bodyPr wrap="square" lIns="0" tIns="0" rIns="0" bIns="0" anchor="ctr">
+            <a:spAutoFit/>
+          </a:bodyPr>
+          <a:lstStyle/>
+          <a:p>
+            <a:pPr algn="l"/>
+            <a:r>
+              <a:rPr sz="1350" b="1" i="0">
+                <a:solidFill>
+                  <a:srgbClr val="1B2430"/>
+                </a:solidFill>
+                <a:latin typeface="Cambria"/>
+              </a:rPr>
+              <a:t>Caller</a:t>
+            </a:r>
+          </a:p>
+        </p:txBody>
+      </p:sp>
+      <p:sp>
+        <p:nvSpPr>
+          <p:cNvPr id="6" name="TextBox 5"/>
+          <p:cNvSpPr txBox="1"/>
+          <p:nvPr/>
+        </p:nvSpPr>
+        <p:spPr>
+          <a:xfrm>
+            <a:off x="3200400" y="1463040"/>
+            <a:ext cx="3108960" cy="713232"/>
+          </a:xfrm>
+          <a:prstGeom prst="rect">
+            <a:avLst/>
+          </a:prstGeom>
+          <a:noFill/>
+        </p:spPr>
+        <p:txBody>
+          <a:bodyPr wrap="square" lIns="0" tIns="0" rIns="0" bIns="0" anchor="ctr">
             <a:spAutoFit/>
           </a:bodyPr>
           <a:lstStyle/>
           <a:p>
             <a:pPr algn="l">
               <a:lnSpc>
-                <a:spcPts val="1800"/>
+                <a:spcPts val="1400"/>
               </a:lnSpc>
             </a:pPr>
             <a:r>
-              <a:rPr sz="1300" b="0" i="0" dirty="0">
+              <a:rPr sz="1050" b="0" i="0">
                 <a:solidFill>
                   <a:srgbClr val="4E5A66"/>
                 </a:solidFill>
                 <a:latin typeface="Calibri"/>
               </a:rPr>
-              <a:t>The client data arrived without labels, so unsupervised methods were used first to discover structure. </a:t>
-            </a:r>
-            <a:endParaRPr lang="en-MY" sz="1300" b="0" i="0" dirty="0">
-              <a:solidFill>
-                <a:srgbClr val="4E5A66"/>
-              </a:solidFill>
-              <a:latin typeface="Calibri"/>
-            </a:endParaRPr>
-          </a:p>
+              <a:t>Console app today; a user interface next</a:t>
+            </a:r>
+          </a:p>
+        </p:txBody>
+      </p:sp>
+      <p:sp>
+        <p:nvSpPr>
+          <p:cNvPr id="7" name="Rounded Rectangle 6"/>
+          <p:cNvSpPr/>
+          <p:nvPr/>
+        </p:nvSpPr>
+        <p:spPr>
+          <a:xfrm>
+            <a:off x="548640" y="2304288"/>
+            <a:ext cx="6035040" cy="713232"/>
+          </a:xfrm>
+          <a:prstGeom prst="roundRect">
+            <a:avLst>
+              <a:gd name="adj" fmla="val 5500"/>
+            </a:avLst>
+          </a:prstGeom>
+          <a:solidFill>
+            <a:srgbClr val="FAF1E8"/>
+          </a:solidFill>
+          <a:ln w="9525">
+            <a:solidFill>
+              <a:srgbClr val="DFE4E9"/>
+            </a:solidFill>
+          </a:ln>
+          <a:effectLst/>
+        </p:spPr>
+        <p:style>
+          <a:lnRef idx="1">
+            <a:schemeClr val="accent1"/>
+          </a:lnRef>
+          <a:fillRef idx="3">
+            <a:schemeClr val="accent1"/>
+          </a:fillRef>
+          <a:effectRef idx="2">
+            <a:schemeClr val="accent1"/>
+          </a:effectRef>
+          <a:fontRef idx="minor">
+            <a:schemeClr val="lt1"/>
+          </a:fontRef>
+        </p:style>
+        <p:txBody>
+          <a:bodyPr wrap="square" rtlCol="0" anchor="ctr"/>
+          <a:lstStyle/>
+          <a:p>
+            <a:pPr algn="ctr"/>
+            <a:endParaRPr/>
+          </a:p>
+        </p:txBody>
+      </p:sp>
+      <p:sp>
+        <p:nvSpPr>
+          <p:cNvPr id="8" name="TextBox 7"/>
+          <p:cNvSpPr txBox="1"/>
+          <p:nvPr/>
+        </p:nvSpPr>
+        <p:spPr>
+          <a:xfrm>
+            <a:off x="804672" y="2304288"/>
+            <a:ext cx="2194560" cy="713232"/>
+          </a:xfrm>
+          <a:prstGeom prst="rect">
+            <a:avLst/>
+          </a:prstGeom>
+          <a:noFill/>
+        </p:spPr>
+        <p:txBody>
+          <a:bodyPr wrap="square" lIns="0" tIns="0" rIns="0" bIns="0" anchor="ctr">
+            <a:spAutoFit/>
+          </a:bodyPr>
+          <a:lstStyle/>
+          <a:p>
+            <a:pPr algn="l"/>
+            <a:r>
+              <a:rPr sz="1350" b="1" i="0">
+                <a:solidFill>
+                  <a:srgbClr val="1B2430"/>
+                </a:solidFill>
+                <a:latin typeface="Cambria"/>
+              </a:rPr>
+              <a:t>Logic.dll</a:t>
+            </a:r>
+          </a:p>
+        </p:txBody>
+      </p:sp>
+      <p:sp>
+        <p:nvSpPr>
+          <p:cNvPr id="9" name="TextBox 8"/>
+          <p:cNvSpPr txBox="1"/>
+          <p:nvPr/>
+        </p:nvSpPr>
+        <p:spPr>
+          <a:xfrm>
+            <a:off x="3200400" y="2304288"/>
+            <a:ext cx="3108960" cy="713232"/>
+          </a:xfrm>
+          <a:prstGeom prst="rect">
+            <a:avLst/>
+          </a:prstGeom>
+          <a:noFill/>
+        </p:spPr>
+        <p:txBody>
+          <a:bodyPr wrap="square" lIns="0" tIns="0" rIns="0" bIns="0" anchor="ctr">
+            <a:spAutoFit/>
+          </a:bodyPr>
+          <a:lstStyle/>
           <a:p>
             <a:pPr algn="l">
               <a:lnSpc>
-                <a:spcPts val="1800"/>
+                <a:spcPts val="1400"/>
               </a:lnSpc>
             </a:pPr>
             <a:r>
-              <a:rPr sz="1300" b="0" i="0" dirty="0">
+              <a:rPr sz="1050" b="0" i="0">
                 <a:solidFill>
                   <a:srgbClr val="4E5A66"/>
                 </a:solidFill>
                 <a:latin typeface="Calibri"/>
               </a:rPr>
-              <a:t>Supervised models were then trained on what they revealed. Every choice below was benchmarked, not assumed.</a:t>
-            </a:r>
-          </a:p>
-        </p:txBody>
-      </p:sp>
-      <p:sp>
-        <p:nvSpPr>
-          <p:cNvPr id="5" name="Rounded Rectangle 4"/>
+              <a:t>Orchestration, quota allocation, placement, review queue</a:t>
+            </a:r>
+          </a:p>
+        </p:txBody>
+      </p:sp>
+      <p:sp>
+        <p:nvSpPr>
+          <p:cNvPr id="10" name="Rounded Rectangle 9"/>
           <p:cNvSpPr/>
           <p:nvPr/>
         </p:nvSpPr>
         <p:spPr>
           <a:xfrm>
-            <a:off x="548640" y="1965960"/>
-            <a:ext cx="5440680" cy="3840480"/>
+            <a:off x="548640" y="3145536"/>
+            <a:ext cx="6035040" cy="713232"/>
+          </a:xfrm>
+          <a:prstGeom prst="roundRect">
+            <a:avLst>
+              <a:gd name="adj" fmla="val 5500"/>
+            </a:avLst>
+          </a:prstGeom>
+          <a:solidFill>
+            <a:srgbClr val="FAF1E8"/>
+          </a:solidFill>
+          <a:ln w="9525">
+            <a:solidFill>
+              <a:srgbClr val="DFE4E9"/>
+            </a:solidFill>
+          </a:ln>
+          <a:effectLst/>
+        </p:spPr>
+        <p:style>
+          <a:lnRef idx="1">
+            <a:schemeClr val="accent1"/>
+          </a:lnRef>
+          <a:fillRef idx="3">
+            <a:schemeClr val="accent1"/>
+          </a:fillRef>
+          <a:effectRef idx="2">
+            <a:schemeClr val="accent1"/>
+          </a:effectRef>
+          <a:fontRef idx="minor">
+            <a:schemeClr val="lt1"/>
+          </a:fontRef>
+        </p:style>
+        <p:txBody>
+          <a:bodyPr wrap="square" rtlCol="0" anchor="ctr"/>
+          <a:lstStyle/>
+          <a:p>
+            <a:pPr algn="ctr"/>
+            <a:endParaRPr/>
+          </a:p>
+        </p:txBody>
+      </p:sp>
+      <p:sp>
+        <p:nvSpPr>
+          <p:cNvPr id="11" name="TextBox 10"/>
+          <p:cNvSpPr txBox="1"/>
+          <p:nvPr/>
+        </p:nvSpPr>
+        <p:spPr>
+          <a:xfrm>
+            <a:off x="804672" y="3145536"/>
+            <a:ext cx="2194560" cy="713232"/>
+          </a:xfrm>
+          <a:prstGeom prst="rect">
+            <a:avLst/>
+          </a:prstGeom>
+          <a:noFill/>
+        </p:spPr>
+        <p:txBody>
+          <a:bodyPr wrap="square" lIns="0" tIns="0" rIns="0" bIns="0" anchor="ctr">
+            <a:spAutoFit/>
+          </a:bodyPr>
+          <a:lstStyle/>
+          <a:p>
+            <a:pPr algn="l"/>
+            <a:r>
+              <a:rPr sz="1350" b="1" i="0">
+                <a:solidFill>
+                  <a:srgbClr val="1B2430"/>
+                </a:solidFill>
+                <a:latin typeface="Cambria"/>
+              </a:rPr>
+              <a:t>Model.dll</a:t>
+            </a:r>
+          </a:p>
+        </p:txBody>
+      </p:sp>
+      <p:sp>
+        <p:nvSpPr>
+          <p:cNvPr id="12" name="TextBox 11"/>
+          <p:cNvSpPr txBox="1"/>
+          <p:nvPr/>
+        </p:nvSpPr>
+        <p:spPr>
+          <a:xfrm>
+            <a:off x="3200400" y="3145536"/>
+            <a:ext cx="3108960" cy="713232"/>
+          </a:xfrm>
+          <a:prstGeom prst="rect">
+            <a:avLst/>
+          </a:prstGeom>
+          <a:noFill/>
+        </p:spPr>
+        <p:txBody>
+          <a:bodyPr wrap="square" lIns="0" tIns="0" rIns="0" bIns="0" anchor="ctr">
+            <a:spAutoFit/>
+          </a:bodyPr>
+          <a:lstStyle/>
+          <a:p>
+            <a:pPr algn="l">
+              <a:lnSpc>
+                <a:spcPts val="1400"/>
+              </a:lnSpc>
+            </a:pPr>
+            <a:r>
+              <a:rPr sz="1050" b="0" i="0">
+                <a:solidFill>
+                  <a:srgbClr val="4E5A66"/>
+                </a:solidFill>
+                <a:latin typeface="Calibri"/>
+              </a:rPr>
+              <a:t>SQL Server access, and predictions over HTTP or via local Python</a:t>
+            </a:r>
+          </a:p>
+        </p:txBody>
+      </p:sp>
+      <p:sp>
+        <p:nvSpPr>
+          <p:cNvPr id="13" name="Rounded Rectangle 12"/>
+          <p:cNvSpPr/>
+          <p:nvPr/>
+        </p:nvSpPr>
+        <p:spPr>
+          <a:xfrm>
+            <a:off x="548640" y="3986784"/>
+            <a:ext cx="6035040" cy="713232"/>
           </a:xfrm>
           <a:prstGeom prst="roundRect">
             <a:avLst>
@@ -29520,92 +29288,57 @@
       </p:sp>
       <p:sp>
         <p:nvSpPr>
-          <p:cNvPr id="6" name="TextBox 5"/>
-          <p:cNvSpPr txBox="1"/>
-          <p:nvPr/>
-        </p:nvSpPr>
-        <p:spPr>
-          <a:xfrm>
-            <a:off x="822960" y="2221992"/>
-            <a:ext cx="4892040" cy="219456"/>
-          </a:xfrm>
-          <a:prstGeom prst="rect">
-            <a:avLst/>
-          </a:prstGeom>
-          <a:noFill/>
-        </p:spPr>
-        <p:txBody>
-          <a:bodyPr wrap="square" lIns="0" tIns="0" rIns="0" bIns="0" anchor="t">
+          <p:cNvPr id="14" name="TextBox 13"/>
+          <p:cNvSpPr txBox="1"/>
+          <p:nvPr/>
+        </p:nvSpPr>
+        <p:spPr>
+          <a:xfrm>
+            <a:off x="804672" y="3986784"/>
+            <a:ext cx="2194560" cy="713232"/>
+          </a:xfrm>
+          <a:prstGeom prst="rect">
+            <a:avLst/>
+          </a:prstGeom>
+          <a:noFill/>
+        </p:spPr>
+        <p:txBody>
+          <a:bodyPr wrap="square" lIns="0" tIns="0" rIns="0" bIns="0" anchor="ctr">
             <a:spAutoFit/>
           </a:bodyPr>
           <a:lstStyle/>
           <a:p>
             <a:pPr algn="l"/>
             <a:r>
-              <a:rPr sz="1050" b="1" i="0" spc="180">
-                <a:solidFill>
-                  <a:srgbClr val="2E7D63"/>
-                </a:solidFill>
-                <a:latin typeface="Calibri"/>
-              </a:rPr>
-              <a:t>ADOPTED IN PRODUCTION</a:t>
-            </a:r>
-          </a:p>
-        </p:txBody>
-      </p:sp>
-      <p:sp>
-        <p:nvSpPr>
-          <p:cNvPr id="7" name="TextBox 6"/>
-          <p:cNvSpPr txBox="1"/>
-          <p:nvPr/>
-        </p:nvSpPr>
-        <p:spPr>
-          <a:xfrm>
-            <a:off x="822960" y="2587752"/>
-            <a:ext cx="4892040" cy="237744"/>
-          </a:xfrm>
-          <a:prstGeom prst="rect">
-            <a:avLst/>
-          </a:prstGeom>
-          <a:noFill/>
-        </p:spPr>
-        <p:txBody>
-          <a:bodyPr wrap="square" lIns="0" tIns="0" rIns="0" bIns="0" anchor="t">
-            <a:spAutoFit/>
-          </a:bodyPr>
-          <a:lstStyle/>
-          <a:p>
-            <a:pPr algn="l"/>
-            <a:r>
-              <a:rPr sz="1300" b="1" i="0">
+              <a:rPr sz="1350" b="1" i="0">
                 <a:solidFill>
                   <a:srgbClr val="1B2430"/>
                 </a:solidFill>
                 <a:latin typeface="Cambria"/>
               </a:rPr>
-              <a:t>Chained prediction</a:t>
-            </a:r>
-          </a:p>
-        </p:txBody>
-      </p:sp>
-      <p:sp>
-        <p:nvSpPr>
-          <p:cNvPr id="8" name="TextBox 7"/>
-          <p:cNvSpPr txBox="1"/>
-          <p:nvPr/>
-        </p:nvSpPr>
-        <p:spPr>
-          <a:xfrm>
-            <a:off x="822960" y="2843784"/>
-            <a:ext cx="4892040" cy="457200"/>
-          </a:xfrm>
-          <a:prstGeom prst="rect">
-            <a:avLst/>
-          </a:prstGeom>
-          <a:noFill/>
-        </p:spPr>
-        <p:txBody>
-          <a:bodyPr wrap="square" lIns="0" tIns="0" rIns="0" bIns="0" anchor="t">
+              <a:t>ML service</a:t>
+            </a:r>
+          </a:p>
+        </p:txBody>
+      </p:sp>
+      <p:sp>
+        <p:nvSpPr>
+          <p:cNvPr id="15" name="TextBox 14"/>
+          <p:cNvSpPr txBox="1"/>
+          <p:nvPr/>
+        </p:nvSpPr>
+        <p:spPr>
+          <a:xfrm>
+            <a:off x="3200400" y="3986784"/>
+            <a:ext cx="3108960" cy="713232"/>
+          </a:xfrm>
+          <a:prstGeom prst="rect">
+            <a:avLst/>
+          </a:prstGeom>
+          <a:noFill/>
+        </p:spPr>
+        <p:txBody>
+          <a:bodyPr wrap="square" lIns="0" tIns="0" rIns="0" bIns="0" anchor="ctr">
             <a:spAutoFit/>
           </a:bodyPr>
           <a:lstStyle/>
@@ -29616,70 +29349,126 @@
               </a:lnSpc>
             </a:pPr>
             <a:r>
+              <a:rPr sz="1050" b="0" i="0" dirty="0" err="1">
+                <a:solidFill>
+                  <a:srgbClr val="4E5A66"/>
+                </a:solidFill>
+                <a:latin typeface="Calibri"/>
+              </a:rPr>
+              <a:t>FastAPI</a:t>
+            </a:r>
+            <a:r>
               <a:rPr sz="1050" b="0" i="0" dirty="0">
                 <a:solidFill>
                   <a:srgbClr val="4E5A66"/>
                 </a:solidFill>
                 <a:latin typeface="Calibri"/>
               </a:rPr>
-              <a:t>Device type. Deterministic and fully readable — an engineer edits it directly and the change applies on the next run.</a:t>
-            </a:r>
-          </a:p>
-        </p:txBody>
-      </p:sp>
-      <p:sp>
-        <p:nvSpPr>
-          <p:cNvPr id="9" name="TextBox 8"/>
-          <p:cNvSpPr txBox="1"/>
-          <p:nvPr/>
-        </p:nvSpPr>
-        <p:spPr>
-          <a:xfrm>
-            <a:off x="822960" y="3374136"/>
-            <a:ext cx="4892040" cy="237744"/>
-          </a:xfrm>
-          <a:prstGeom prst="rect">
-            <a:avLst/>
-          </a:prstGeom>
-          <a:noFill/>
-        </p:spPr>
-        <p:txBody>
-          <a:bodyPr wrap="square" lIns="0" tIns="0" rIns="0" bIns="0" anchor="t">
+              <a:t> on 128.100.8.213:8000 — models loaded once, held in memory</a:t>
+            </a:r>
+          </a:p>
+        </p:txBody>
+      </p:sp>
+      <p:sp>
+        <p:nvSpPr>
+          <p:cNvPr id="16" name="Rounded Rectangle 15"/>
+          <p:cNvSpPr/>
+          <p:nvPr/>
+        </p:nvSpPr>
+        <p:spPr>
+          <a:xfrm>
+            <a:off x="548640" y="4828032"/>
+            <a:ext cx="6035040" cy="713232"/>
+          </a:xfrm>
+          <a:prstGeom prst="roundRect">
+            <a:avLst>
+              <a:gd name="adj" fmla="val 5500"/>
+            </a:avLst>
+          </a:prstGeom>
+          <a:solidFill>
+            <a:srgbClr val="1B2430"/>
+          </a:solidFill>
+          <a:ln>
+            <a:noFill/>
+          </a:ln>
+          <a:effectLst/>
+        </p:spPr>
+        <p:style>
+          <a:lnRef idx="1">
+            <a:schemeClr val="accent1"/>
+          </a:lnRef>
+          <a:fillRef idx="3">
+            <a:schemeClr val="accent1"/>
+          </a:fillRef>
+          <a:effectRef idx="2">
+            <a:schemeClr val="accent1"/>
+          </a:effectRef>
+          <a:fontRef idx="minor">
+            <a:schemeClr val="lt1"/>
+          </a:fontRef>
+        </p:style>
+        <p:txBody>
+          <a:bodyPr wrap="square" rtlCol="0" anchor="ctr"/>
+          <a:lstStyle/>
+          <a:p>
+            <a:pPr algn="ctr"/>
+            <a:endParaRPr/>
+          </a:p>
+        </p:txBody>
+      </p:sp>
+      <p:sp>
+        <p:nvSpPr>
+          <p:cNvPr id="17" name="TextBox 16"/>
+          <p:cNvSpPr txBox="1"/>
+          <p:nvPr/>
+        </p:nvSpPr>
+        <p:spPr>
+          <a:xfrm>
+            <a:off x="804672" y="4828032"/>
+            <a:ext cx="2194560" cy="713232"/>
+          </a:xfrm>
+          <a:prstGeom prst="rect">
+            <a:avLst/>
+          </a:prstGeom>
+          <a:noFill/>
+        </p:spPr>
+        <p:txBody>
+          <a:bodyPr wrap="square" lIns="0" tIns="0" rIns="0" bIns="0" anchor="ctr">
             <a:spAutoFit/>
           </a:bodyPr>
           <a:lstStyle/>
           <a:p>
             <a:pPr algn="l"/>
             <a:r>
-              <a:rPr sz="1300" b="1" i="0">
-                <a:solidFill>
-                  <a:srgbClr val="1B2430"/>
+              <a:rPr sz="1350" b="1" i="0">
+                <a:solidFill>
+                  <a:srgbClr val="FFFFFF"/>
                 </a:solidFill>
                 <a:latin typeface="Cambria"/>
               </a:rPr>
-              <a:t>XGBoost</a:t>
-            </a:r>
-          </a:p>
-        </p:txBody>
-      </p:sp>
-      <p:sp>
-        <p:nvSpPr>
-          <p:cNvPr id="10" name="TextBox 9"/>
-          <p:cNvSpPr txBox="1"/>
-          <p:nvPr/>
-        </p:nvSpPr>
-        <p:spPr>
-          <a:xfrm>
-            <a:off x="822960" y="3630168"/>
-            <a:ext cx="4892040" cy="457200"/>
-          </a:xfrm>
-          <a:prstGeom prst="rect">
-            <a:avLst/>
-          </a:prstGeom>
-          <a:noFill/>
-        </p:spPr>
-        <p:txBody>
-          <a:bodyPr wrap="square" lIns="0" tIns="0" rIns="0" bIns="0" anchor="t">
+              <a:t>SQL Server</a:t>
+            </a:r>
+          </a:p>
+        </p:txBody>
+      </p:sp>
+      <p:sp>
+        <p:nvSpPr>
+          <p:cNvPr id="18" name="TextBox 17"/>
+          <p:cNvSpPr txBox="1"/>
+          <p:nvPr/>
+        </p:nvSpPr>
+        <p:spPr>
+          <a:xfrm>
+            <a:off x="3200400" y="5009792"/>
+            <a:ext cx="3108960" cy="349711"/>
+          </a:xfrm>
+          <a:prstGeom prst="rect">
+            <a:avLst/>
+          </a:prstGeom>
+          <a:noFill/>
+        </p:spPr>
+        <p:txBody>
+          <a:bodyPr wrap="square" lIns="0" tIns="0" rIns="0" bIns="0" anchor="ctr">
             <a:spAutoFit/>
           </a:bodyPr>
           <a:lstStyle/>
@@ -29690,27 +29479,36 @@
               </a:lnSpc>
             </a:pPr>
             <a:r>
-              <a:rPr sz="1050" b="0" i="0">
-                <a:solidFill>
-                  <a:srgbClr val="4E5A66"/>
-                </a:solidFill>
-                <a:latin typeface="Calibri"/>
-              </a:rPr>
-              <a:t>Section and cluster. Best accuracy of everything tested on engineered tabular features.</a:t>
-            </a:r>
-          </a:p>
-        </p:txBody>
-      </p:sp>
-      <p:sp>
-        <p:nvSpPr>
-          <p:cNvPr id="11" name="TextBox 10"/>
-          <p:cNvSpPr txBox="1"/>
-          <p:nvPr/>
-        </p:nvSpPr>
-        <p:spPr>
-          <a:xfrm>
-            <a:off x="822960" y="4160520"/>
-            <a:ext cx="4892040" cy="237744"/>
+              <a:rPr sz="1050" b="0" i="0" dirty="0" err="1">
+                <a:solidFill>
+                  <a:schemeClr val="bg1"/>
+                </a:solidFill>
+                <a:latin typeface="Calibri"/>
+              </a:rPr>
+              <a:t>XenCreator</a:t>
+            </a:r>
+            <a:r>
+              <a:rPr sz="1050" b="0" i="0" dirty="0">
+                <a:solidFill>
+                  <a:schemeClr val="bg1"/>
+                </a:solidFill>
+                <a:latin typeface="Calibri"/>
+              </a:rPr>
+              <a:t> — source table, quota table, two output tables</a:t>
+            </a:r>
+          </a:p>
+        </p:txBody>
+      </p:sp>
+      <p:sp>
+        <p:nvSpPr>
+          <p:cNvPr id="19" name="TextBox 18"/>
+          <p:cNvSpPr txBox="1"/>
+          <p:nvPr/>
+        </p:nvSpPr>
+        <p:spPr>
+          <a:xfrm>
+            <a:off x="548640" y="5669280"/>
+            <a:ext cx="6035040" cy="274320"/>
           </a:xfrm>
           <a:prstGeom prst="rect">
             <a:avLst/>
@@ -29725,27 +29523,109 @@
           <a:p>
             <a:pPr algn="l"/>
             <a:r>
-              <a:rPr sz="1300" b="1" i="0">
-                <a:solidFill>
-                  <a:srgbClr val="1B2430"/>
-                </a:solidFill>
-                <a:latin typeface="Cambria"/>
-              </a:rPr>
-              <a:t>k-NN distance test</a:t>
-            </a:r>
-          </a:p>
-        </p:txBody>
-      </p:sp>
-      <p:sp>
-        <p:nvSpPr>
-          <p:cNvPr id="12" name="TextBox 11"/>
-          <p:cNvSpPr txBox="1"/>
-          <p:nvPr/>
-        </p:nvSpPr>
-        <p:spPr>
-          <a:xfrm>
-            <a:off x="822960" y="4416552"/>
-            <a:ext cx="4892040" cy="457200"/>
+              <a:rPr sz="1050" b="0" i="1">
+                <a:solidFill>
+                  <a:srgbClr val="7A8792"/>
+                </a:solidFill>
+                <a:latin typeface="Calibri"/>
+              </a:rPr>
+              <a:t>Each layer depends only on the one beneath it.</a:t>
+            </a:r>
+          </a:p>
+        </p:txBody>
+      </p:sp>
+      <p:sp>
+        <p:nvSpPr>
+          <p:cNvPr id="20" name="Rounded Rectangle 19"/>
+          <p:cNvSpPr/>
+          <p:nvPr/>
+        </p:nvSpPr>
+        <p:spPr>
+          <a:xfrm>
+            <a:off x="6858000" y="1463040"/>
+            <a:ext cx="4782312" cy="1554480"/>
+          </a:xfrm>
+          <a:prstGeom prst="roundRect">
+            <a:avLst>
+              <a:gd name="adj" fmla="val 5500"/>
+            </a:avLst>
+          </a:prstGeom>
+          <a:solidFill>
+            <a:srgbClr val="1B2430"/>
+          </a:solidFill>
+          <a:ln>
+            <a:noFill/>
+          </a:ln>
+          <a:effectLst/>
+        </p:spPr>
+        <p:style>
+          <a:lnRef idx="1">
+            <a:schemeClr val="accent1"/>
+          </a:lnRef>
+          <a:fillRef idx="3">
+            <a:schemeClr val="accent1"/>
+          </a:fillRef>
+          <a:effectRef idx="2">
+            <a:schemeClr val="accent1"/>
+          </a:effectRef>
+          <a:fontRef idx="minor">
+            <a:schemeClr val="lt1"/>
+          </a:fontRef>
+        </p:style>
+        <p:txBody>
+          <a:bodyPr wrap="square" rtlCol="0" anchor="ctr"/>
+          <a:lstStyle/>
+          <a:p>
+            <a:pPr algn="ctr"/>
+            <a:endParaRPr/>
+          </a:p>
+        </p:txBody>
+      </p:sp>
+      <p:sp>
+        <p:nvSpPr>
+          <p:cNvPr id="21" name="TextBox 20"/>
+          <p:cNvSpPr txBox="1"/>
+          <p:nvPr/>
+        </p:nvSpPr>
+        <p:spPr>
+          <a:xfrm>
+            <a:off x="7114032" y="1682496"/>
+            <a:ext cx="4270248" cy="219456"/>
+          </a:xfrm>
+          <a:prstGeom prst="rect">
+            <a:avLst/>
+          </a:prstGeom>
+          <a:noFill/>
+        </p:spPr>
+        <p:txBody>
+          <a:bodyPr wrap="square" lIns="0" tIns="0" rIns="0" bIns="0" anchor="t">
+            <a:spAutoFit/>
+          </a:bodyPr>
+          <a:lstStyle/>
+          <a:p>
+            <a:pPr algn="l"/>
+            <a:r>
+              <a:rPr sz="1050" b="1" i="0" spc="180">
+                <a:solidFill>
+                  <a:srgbClr val="C46A24"/>
+                </a:solidFill>
+                <a:latin typeface="Calibri"/>
+              </a:rPr>
+              <a:t>ONE CALL RUNS EVERYTHING</a:t>
+            </a:r>
+          </a:p>
+        </p:txBody>
+      </p:sp>
+      <p:sp>
+        <p:nvSpPr>
+          <p:cNvPr id="22" name="TextBox 21"/>
+          <p:cNvSpPr txBox="1"/>
+          <p:nvPr/>
+        </p:nvSpPr>
+        <p:spPr>
+          <a:xfrm>
+            <a:off x="7114032" y="1993392"/>
+            <a:ext cx="4270248" cy="822960"/>
           </a:xfrm>
           <a:prstGeom prst="rect">
             <a:avLst/>
@@ -29766,71 +29646,13 @@
             <a:r>
               <a:rPr sz="1050" b="0" i="0">
                 <a:solidFill>
-                  <a:srgbClr val="4E5A66"/>
-                </a:solidFill>
-                <a:latin typeface="Calibri"/>
-              </a:rPr>
-              <a:t>Out-of-distribution check that cuts section and cluster confidence for unfamiliar tags.</a:t>
-            </a:r>
-          </a:p>
-        </p:txBody>
-      </p:sp>
-      <p:sp>
-        <p:nvSpPr>
-          <p:cNvPr id="13" name="TextBox 12"/>
-          <p:cNvSpPr txBox="1"/>
-          <p:nvPr/>
-        </p:nvSpPr>
-        <p:spPr>
-          <a:xfrm>
-            <a:off x="822960" y="4946904"/>
-            <a:ext cx="4892040" cy="237744"/>
-          </a:xfrm>
-          <a:prstGeom prst="rect">
-            <a:avLst/>
-          </a:prstGeom>
-          <a:noFill/>
-        </p:spPr>
-        <p:txBody>
-          <a:bodyPr wrap="square" lIns="0" tIns="0" rIns="0" bIns="0" anchor="t">
-            <a:spAutoFit/>
-          </a:bodyPr>
-          <a:lstStyle/>
-          <a:p>
-            <a:pPr algn="l"/>
-            <a:r>
-              <a:rPr sz="1300" b="1" i="0">
-                <a:solidFill>
-                  <a:srgbClr val="1B2430"/>
-                </a:solidFill>
-                <a:latin typeface="Cambria"/>
-              </a:rPr>
-              <a:t>Prefix dictionary</a:t>
-            </a:r>
-          </a:p>
-        </p:txBody>
-      </p:sp>
-      <p:sp>
-        <p:nvSpPr>
-          <p:cNvPr id="14" name="TextBox 13"/>
-          <p:cNvSpPr txBox="1"/>
-          <p:nvPr/>
-        </p:nvSpPr>
-        <p:spPr>
-          <a:xfrm>
-            <a:off x="822960" y="5202936"/>
-            <a:ext cx="4892040" cy="457200"/>
-          </a:xfrm>
-          <a:prstGeom prst="rect">
-            <a:avLst/>
-          </a:prstGeom>
-          <a:noFill/>
-        </p:spPr>
-        <p:txBody>
-          <a:bodyPr wrap="square" lIns="0" tIns="0" rIns="0" bIns="0" anchor="t">
-            <a:spAutoFit/>
-          </a:bodyPr>
-          <a:lstStyle/>
+                  <a:srgbClr val="FFFFFF"/>
+                </a:solidFill>
+                <a:latin typeface="Consolas"/>
+              </a:rPr>
+              <a:t>var result = await</a:t>
+            </a:r>
+          </a:p>
           <a:p>
             <a:pPr algn="l">
               <a:lnSpc>
@@ -29840,18 +29662,344 @@
             <a:r>
               <a:rPr sz="1050" b="0" i="0">
                 <a:solidFill>
+                  <a:srgbClr val="FFFFFF"/>
+                </a:solidFill>
+                <a:latin typeface="Consolas"/>
+              </a:rPr>
+              <a:t>DevicePipeline.RunAsync(</a:t>
+            </a:r>
+          </a:p>
+          <a:p>
+            <a:pPr algn="l">
+              <a:lnSpc>
+                <a:spcPts val="1400"/>
+              </a:lnSpc>
+            </a:pPr>
+            <a:r>
+              <a:rPr sz="1050" b="0" i="0">
+                <a:solidFill>
+                  <a:srgbClr val="FFFFFF"/>
+                </a:solidFill>
+                <a:latin typeface="Consolas"/>
+              </a:rPr>
+              <a:t>    sqlReader, client, logic,</a:t>
+            </a:r>
+          </a:p>
+          <a:p>
+            <a:pPr algn="l">
+              <a:lnSpc>
+                <a:spcPts val="1400"/>
+              </a:lnSpc>
+            </a:pPr>
+            <a:r>
+              <a:rPr sz="1050" b="0" i="0">
+                <a:solidFill>
+                  <a:srgbClr val="FFFFFF"/>
+                </a:solidFill>
+                <a:latin typeface="Consolas"/>
+              </a:rPr>
+              <a:t>    projectCode: "A9998");</a:t>
+            </a:r>
+          </a:p>
+        </p:txBody>
+      </p:sp>
+      <p:sp>
+        <p:nvSpPr>
+          <p:cNvPr id="23" name="Rounded Rectangle 22"/>
+          <p:cNvSpPr/>
+          <p:nvPr/>
+        </p:nvSpPr>
+        <p:spPr>
+          <a:xfrm>
+            <a:off x="6858000" y="3145536"/>
+            <a:ext cx="4782312" cy="1234440"/>
+          </a:xfrm>
+          <a:prstGeom prst="roundRect">
+            <a:avLst>
+              <a:gd name="adj" fmla="val 5500"/>
+            </a:avLst>
+          </a:prstGeom>
+          <a:solidFill>
+            <a:srgbClr val="F3F5F7"/>
+          </a:solidFill>
+          <a:ln w="9525">
+            <a:solidFill>
+              <a:srgbClr val="DFE4E9"/>
+            </a:solidFill>
+          </a:ln>
+          <a:effectLst/>
+        </p:spPr>
+        <p:style>
+          <a:lnRef idx="1">
+            <a:schemeClr val="accent1"/>
+          </a:lnRef>
+          <a:fillRef idx="3">
+            <a:schemeClr val="accent1"/>
+          </a:fillRef>
+          <a:effectRef idx="2">
+            <a:schemeClr val="accent1"/>
+          </a:effectRef>
+          <a:fontRef idx="minor">
+            <a:schemeClr val="lt1"/>
+          </a:fontRef>
+        </p:style>
+        <p:txBody>
+          <a:bodyPr wrap="square" rtlCol="0" anchor="ctr"/>
+          <a:lstStyle/>
+          <a:p>
+            <a:pPr algn="ctr"/>
+            <a:endParaRPr/>
+          </a:p>
+        </p:txBody>
+      </p:sp>
+      <p:sp>
+        <p:nvSpPr>
+          <p:cNvPr id="24" name="TextBox 23"/>
+          <p:cNvSpPr txBox="1"/>
+          <p:nvPr/>
+        </p:nvSpPr>
+        <p:spPr>
+          <a:xfrm>
+            <a:off x="7114032" y="3346704"/>
+            <a:ext cx="4270248" cy="219456"/>
+          </a:xfrm>
+          <a:prstGeom prst="rect">
+            <a:avLst/>
+          </a:prstGeom>
+          <a:noFill/>
+        </p:spPr>
+        <p:txBody>
+          <a:bodyPr wrap="square" lIns="0" tIns="0" rIns="0" bIns="0" anchor="t">
+            <a:spAutoFit/>
+          </a:bodyPr>
+          <a:lstStyle/>
+          <a:p>
+            <a:pPr algn="l"/>
+            <a:r>
+              <a:rPr sz="1050" b="1" i="0" spc="180">
+                <a:solidFill>
+                  <a:srgbClr val="C46A24"/>
+                </a:solidFill>
+                <a:latin typeface="Calibri"/>
+              </a:rPr>
+              <a:t>RUNTIME REQUIREMENTS</a:t>
+            </a:r>
+          </a:p>
+        </p:txBody>
+      </p:sp>
+      <p:sp>
+        <p:nvSpPr>
+          <p:cNvPr id="25" name="TextBox 24"/>
+          <p:cNvSpPr txBox="1"/>
+          <p:nvPr/>
+        </p:nvSpPr>
+        <p:spPr>
+          <a:xfrm>
+            <a:off x="7114032" y="3639312"/>
+            <a:ext cx="4270248" cy="548640"/>
+          </a:xfrm>
+          <a:prstGeom prst="rect">
+            <a:avLst/>
+          </a:prstGeom>
+          <a:noFill/>
+        </p:spPr>
+        <p:txBody>
+          <a:bodyPr wrap="square" lIns="0" tIns="0" rIns="0" bIns="0" anchor="t">
+            <a:spAutoFit/>
+          </a:bodyPr>
+          <a:lstStyle/>
+          <a:p>
+            <a:pPr algn="l">
+              <a:lnSpc>
+                <a:spcPts val="1700"/>
+              </a:lnSpc>
+            </a:pPr>
+            <a:r>
+              <a:rPr sz="1200" b="0" i="0">
+                <a:solidFill>
+                  <a:srgbClr val="1B2430"/>
+                </a:solidFill>
+                <a:latin typeface="Calibri"/>
+              </a:rPr>
+              <a:t>.NET 10  ·  Windows x64</a:t>
+            </a:r>
+          </a:p>
+          <a:p>
+            <a:pPr algn="l">
+              <a:lnSpc>
+                <a:spcPts val="1700"/>
+              </a:lnSpc>
+            </a:pPr>
+            <a:r>
+              <a:rPr sz="1200" b="0" i="0">
+                <a:solidFill>
+                  <a:srgbClr val="1B2430"/>
+                </a:solidFill>
+                <a:latin typeface="Calibri"/>
+              </a:rPr>
+              <a:t>SQL Server  ·  ML service reachable</a:t>
+            </a:r>
+          </a:p>
+        </p:txBody>
+      </p:sp>
+      <p:sp>
+        <p:nvSpPr>
+          <p:cNvPr id="26" name="Rounded Rectangle 25"/>
+          <p:cNvSpPr/>
+          <p:nvPr/>
+        </p:nvSpPr>
+        <p:spPr>
+          <a:xfrm>
+            <a:off x="6858000" y="4507992"/>
+            <a:ext cx="4782312" cy="1325880"/>
+          </a:xfrm>
+          <a:prstGeom prst="roundRect">
+            <a:avLst>
+              <a:gd name="adj" fmla="val 5500"/>
+            </a:avLst>
+          </a:prstGeom>
+          <a:solidFill>
+            <a:srgbClr val="F3F5F7"/>
+          </a:solidFill>
+          <a:ln w="9525">
+            <a:solidFill>
+              <a:srgbClr val="DFE4E9"/>
+            </a:solidFill>
+          </a:ln>
+          <a:effectLst/>
+        </p:spPr>
+        <p:style>
+          <a:lnRef idx="1">
+            <a:schemeClr val="accent1"/>
+          </a:lnRef>
+          <a:fillRef idx="3">
+            <a:schemeClr val="accent1"/>
+          </a:fillRef>
+          <a:effectRef idx="2">
+            <a:schemeClr val="accent1"/>
+          </a:effectRef>
+          <a:fontRef idx="minor">
+            <a:schemeClr val="lt1"/>
+          </a:fontRef>
+        </p:style>
+        <p:txBody>
+          <a:bodyPr wrap="square" rtlCol="0" anchor="ctr"/>
+          <a:lstStyle/>
+          <a:p>
+            <a:pPr algn="ctr"/>
+            <a:endParaRPr/>
+          </a:p>
+        </p:txBody>
+      </p:sp>
+      <p:sp>
+        <p:nvSpPr>
+          <p:cNvPr id="27" name="TextBox 26"/>
+          <p:cNvSpPr txBox="1"/>
+          <p:nvPr/>
+        </p:nvSpPr>
+        <p:spPr>
+          <a:xfrm>
+            <a:off x="7114032" y="4709160"/>
+            <a:ext cx="4270248" cy="219456"/>
+          </a:xfrm>
+          <a:prstGeom prst="rect">
+            <a:avLst/>
+          </a:prstGeom>
+          <a:noFill/>
+        </p:spPr>
+        <p:txBody>
+          <a:bodyPr wrap="square" lIns="0" tIns="0" rIns="0" bIns="0" anchor="t">
+            <a:spAutoFit/>
+          </a:bodyPr>
+          <a:lstStyle/>
+          <a:p>
+            <a:pPr algn="l"/>
+            <a:r>
+              <a:rPr sz="1050" b="1" i="0" spc="180">
+                <a:solidFill>
+                  <a:srgbClr val="C46A24"/>
+                </a:solidFill>
+                <a:latin typeface="Calibri"/>
+              </a:rPr>
+              <a:t>HANDOVER PACKAGE DELIVERED</a:t>
+            </a:r>
+          </a:p>
+        </p:txBody>
+      </p:sp>
+      <p:sp>
+        <p:nvSpPr>
+          <p:cNvPr id="28" name="TextBox 27"/>
+          <p:cNvSpPr txBox="1"/>
+          <p:nvPr/>
+        </p:nvSpPr>
+        <p:spPr>
+          <a:xfrm>
+            <a:off x="7114032" y="5001768"/>
+            <a:ext cx="4270248" cy="685800"/>
+          </a:xfrm>
+          <a:prstGeom prst="rect">
+            <a:avLst/>
+          </a:prstGeom>
+          <a:noFill/>
+        </p:spPr>
+        <p:txBody>
+          <a:bodyPr wrap="square" lIns="0" tIns="0" rIns="0" bIns="0" anchor="t">
+            <a:spAutoFit/>
+          </a:bodyPr>
+          <a:lstStyle/>
+          <a:p>
+            <a:pPr algn="l">
+              <a:lnSpc>
+                <a:spcPts val="1600"/>
+              </a:lnSpc>
+            </a:pPr>
+            <a:r>
+              <a:rPr sz="1100" b="0" i="0">
+                <a:solidFill>
                   <a:srgbClr val="4E5A66"/>
                 </a:solidFill>
                 <a:latin typeface="Calibri"/>
               </a:rPr>
-              <a:t>The predicted section is fed to the cluster model as an input feature rather than predicted independently.</a:t>
-            </a:r>
-          </a:p>
-        </p:txBody>
-      </p:sp>
-      <p:sp>
-        <p:nvSpPr>
-          <p:cNvPr id="27" name="TextBox 26"/>
+              <a:t>2 DLLs + 22 dependencies</a:t>
+            </a:r>
+          </a:p>
+          <a:p>
+            <a:pPr algn="l">
+              <a:lnSpc>
+                <a:spcPts val="1600"/>
+              </a:lnSpc>
+            </a:pPr>
+            <a:r>
+              <a:rPr sz="1100" b="0" i="0">
+                <a:solidFill>
+                  <a:srgbClr val="4E5A66"/>
+                </a:solidFill>
+                <a:latin typeface="Calibri"/>
+              </a:rPr>
+              <a:t>Trained models and 3 SQL scripts</a:t>
+            </a:r>
+          </a:p>
+          <a:p>
+            <a:pPr algn="l">
+              <a:lnSpc>
+                <a:spcPts val="1600"/>
+              </a:lnSpc>
+            </a:pPr>
+            <a:r>
+              <a:rPr sz="1100" b="0" i="0">
+                <a:solidFill>
+                  <a:srgbClr val="4E5A66"/>
+                </a:solidFill>
+                <a:latin typeface="Calibri"/>
+              </a:rPr>
+              <a:t>API reference, quick guide, launcher</a:t>
+            </a:r>
+          </a:p>
+        </p:txBody>
+      </p:sp>
+      <p:sp>
+        <p:nvSpPr>
+          <p:cNvPr id="29" name="TextBox 28"/>
           <p:cNvSpPr txBox="1"/>
           <p:nvPr/>
         </p:nvSpPr>
@@ -29880,6 +30028,41 @@
                 <a:latin typeface="Calibri"/>
               </a:rPr>
               <a:t>Device Identifier  ·  Progress Report  ·  September 2026</a:t>
+            </a:r>
+          </a:p>
+        </p:txBody>
+      </p:sp>
+      <p:sp>
+        <p:nvSpPr>
+          <p:cNvPr id="30" name="TextBox 29"/>
+          <p:cNvSpPr txBox="1"/>
+          <p:nvPr/>
+        </p:nvSpPr>
+        <p:spPr>
+          <a:xfrm>
+            <a:off x="10698480" y="6419088"/>
+            <a:ext cx="941832" cy="237744"/>
+          </a:xfrm>
+          <a:prstGeom prst="rect">
+            <a:avLst/>
+          </a:prstGeom>
+          <a:noFill/>
+        </p:spPr>
+        <p:txBody>
+          <a:bodyPr wrap="square" lIns="0" tIns="0" rIns="0" bIns="0" anchor="t">
+            <a:spAutoFit/>
+          </a:bodyPr>
+          <a:lstStyle/>
+          <a:p>
+            <a:pPr algn="r"/>
+            <a:r>
+              <a:rPr sz="900" b="0" i="0">
+                <a:solidFill>
+                  <a:srgbClr val="A6AEB6"/>
+                </a:solidFill>
+                <a:latin typeface="Calibri"/>
+              </a:rPr>
+              <a:t>9</a:t>
             </a:r>
           </a:p>
         </p:txBody>
